--- a/docs/deck/NL Myntra.pptx
+++ b/docs/deck/NL Myntra.pptx
@@ -2091,7 +2091,7 @@
         <p:spPr>
           <a:xfrm>
             <a:off x="640080" y="3246120"/>
-            <a:ext cx="1691640" cy="1051560"/>
+            <a:ext cx="1874520" cy="1051560"/>
           </a:xfrm>
           <a:prstGeom prst="roundRect">
             <a:avLst>
@@ -2118,7 +2118,7 @@
         <p:spPr>
           <a:xfrm>
             <a:off x="713232" y="3246120"/>
-            <a:ext cx="1545336" cy="1051560"/>
+            <a:ext cx="1728216" cy="1051560"/>
           </a:xfrm>
           <a:prstGeom prst="rect">
             <a:avLst/>
@@ -2156,8 +2156,8 @@
         </p:nvSpPr>
         <p:spPr>
           <a:xfrm>
-            <a:off x="2331720" y="3246120"/>
-            <a:ext cx="182880" cy="1051560"/>
+            <a:off x="2514600" y="3246120"/>
+            <a:ext cx="201168" cy="1051560"/>
           </a:xfrm>
           <a:prstGeom prst="rect">
             <a:avLst/>
@@ -2195,8 +2195,8 @@
         </p:nvSpPr>
         <p:spPr>
           <a:xfrm>
-            <a:off x="2496312" y="3246120"/>
-            <a:ext cx="1691640" cy="1051560"/>
+            <a:off x="2697480" y="3246120"/>
+            <a:ext cx="1874520" cy="1051560"/>
           </a:xfrm>
           <a:prstGeom prst="roundRect">
             <a:avLst>
@@ -2222,8 +2222,8 @@
         </p:nvSpPr>
         <p:spPr>
           <a:xfrm>
-            <a:off x="2569464" y="3246120"/>
-            <a:ext cx="1545336" cy="1051560"/>
+            <a:off x="2770632" y="3246120"/>
+            <a:ext cx="1728216" cy="1051560"/>
           </a:xfrm>
           <a:prstGeom prst="rect">
             <a:avLst/>
@@ -2261,8 +2261,8 @@
         </p:nvSpPr>
         <p:spPr>
           <a:xfrm>
-            <a:off x="4187952" y="3246120"/>
-            <a:ext cx="182880" cy="1051560"/>
+            <a:off x="4572000" y="3246120"/>
+            <a:ext cx="201168" cy="1051560"/>
           </a:xfrm>
           <a:prstGeom prst="rect">
             <a:avLst/>
@@ -2300,8 +2300,8 @@
         </p:nvSpPr>
         <p:spPr>
           <a:xfrm>
-            <a:off x="4352544" y="3246120"/>
-            <a:ext cx="1691640" cy="1051560"/>
+            <a:off x="4754880" y="3246120"/>
+            <a:ext cx="1874520" cy="1051560"/>
           </a:xfrm>
           <a:prstGeom prst="roundRect">
             <a:avLst>
@@ -2327,8 +2327,8 @@
         </p:nvSpPr>
         <p:spPr>
           <a:xfrm>
-            <a:off x="4425696" y="3246120"/>
-            <a:ext cx="1545336" cy="1051560"/>
+            <a:off x="4828032" y="3246120"/>
+            <a:ext cx="1728216" cy="1051560"/>
           </a:xfrm>
           <a:prstGeom prst="rect">
             <a:avLst/>
@@ -2352,7 +2352,7 @@
                 <a:ea typeface="Calibri" pitchFamily="34" charset="-122"/>
                 <a:cs typeface="Calibri" pitchFamily="34" charset="-120"/>
               </a:rPr>
-              <a:t>Price-Certainty</a:t>
+              <a:t>Re-encounter</a:t>
             </a:r>
             <a:endParaRPr lang="en-US" sz="1400" dirty="0"/>
           </a:p>
@@ -2366,8 +2366,8 @@
         </p:nvSpPr>
         <p:spPr>
           <a:xfrm>
-            <a:off x="6044184" y="3246120"/>
-            <a:ext cx="182880" cy="1051560"/>
+            <a:off x="6629400" y="3246120"/>
+            <a:ext cx="201168" cy="1051560"/>
           </a:xfrm>
           <a:prstGeom prst="rect">
             <a:avLst/>
@@ -2405,8 +2405,8 @@
         </p:nvSpPr>
         <p:spPr>
           <a:xfrm>
-            <a:off x="6208776" y="3246120"/>
-            <a:ext cx="1691640" cy="1051560"/>
+            <a:off x="6812280" y="3246120"/>
+            <a:ext cx="1874520" cy="1051560"/>
           </a:xfrm>
           <a:prstGeom prst="roundRect">
             <a:avLst>
@@ -2432,8 +2432,8 @@
         </p:nvSpPr>
         <p:spPr>
           <a:xfrm>
-            <a:off x="6281928" y="3246120"/>
-            <a:ext cx="1545336" cy="1051560"/>
+            <a:off x="6885432" y="3246120"/>
+            <a:ext cx="1728216" cy="1051560"/>
           </a:xfrm>
           <a:prstGeom prst="rect">
             <a:avLst/>
@@ -2457,7 +2457,7 @@
                 <a:ea typeface="Calibri" pitchFamily="34" charset="-122"/>
                 <a:cs typeface="Calibri" pitchFamily="34" charset="-120"/>
               </a:rPr>
-              <a:t>Re-encounter</a:t>
+              <a:t>Resolution</a:t>
             </a:r>
             <a:endParaRPr lang="en-US" sz="1400" dirty="0"/>
           </a:p>
@@ -2471,8 +2471,8 @@
         </p:nvSpPr>
         <p:spPr>
           <a:xfrm>
-            <a:off x="7900416" y="3246120"/>
-            <a:ext cx="182880" cy="1051560"/>
+            <a:off x="8686800" y="3246120"/>
+            <a:ext cx="201168" cy="1051560"/>
           </a:xfrm>
           <a:prstGeom prst="rect">
             <a:avLst/>
@@ -2510,8 +2510,8 @@
         </p:nvSpPr>
         <p:spPr>
           <a:xfrm>
-            <a:off x="8065008" y="3246120"/>
-            <a:ext cx="1691640" cy="1051560"/>
+            <a:off x="8869680" y="3246120"/>
+            <a:ext cx="1874520" cy="1051560"/>
           </a:xfrm>
           <a:prstGeom prst="roundRect">
             <a:avLst>
@@ -2537,8 +2537,8 @@
         </p:nvSpPr>
         <p:spPr>
           <a:xfrm>
-            <a:off x="8138160" y="3246120"/>
-            <a:ext cx="1545336" cy="1051560"/>
+            <a:off x="8942832" y="3246120"/>
+            <a:ext cx="1728216" cy="1051560"/>
           </a:xfrm>
           <a:prstGeom prst="rect">
             <a:avLst/>
@@ -2562,7 +2562,7 @@
                 <a:ea typeface="Calibri" pitchFamily="34" charset="-122"/>
                 <a:cs typeface="Calibri" pitchFamily="34" charset="-120"/>
               </a:rPr>
-              <a:t>Resolution</a:t>
+              <a:t>Checkout</a:t>
             </a:r>
             <a:endParaRPr lang="en-US" sz="1400" dirty="0"/>
           </a:p>
@@ -2570,65 +2570,26 @@
       </p:sp>
       <p:sp>
         <p:nvSpPr>
-          <p:cNvPr id="19" name="Text 17"/>
-          <p:cNvSpPr txBox="1"/>
-          <p:nvPr/>
-        </p:nvSpPr>
-        <p:spPr>
-          <a:xfrm>
-            <a:off x="9756648" y="3246120"/>
-            <a:ext cx="182880" cy="1051560"/>
-          </a:xfrm>
-          <a:prstGeom prst="rect">
-            <a:avLst/>
-          </a:prstGeom>
-          <a:noFill/>
-          <a:ln/>
-        </p:spPr>
-        <p:txBody>
-          <a:bodyPr wrap="square" lIns="0" tIns="0" rIns="0" bIns="0" rtlCol="0" anchor="ctr"/>
-          <a:lstStyle/>
-          <a:p>
-            <a:pPr algn="ctr" indent="0" marL="0">
-              <a:buNone/>
-            </a:pPr>
-            <a:r>
-              <a:rPr lang="en-US" sz="1600" dirty="0">
-                <a:solidFill>
-                  <a:srgbClr val="B5822A"/>
-                </a:solidFill>
-                <a:latin typeface="Calibri" pitchFamily="34" charset="0"/>
-                <a:ea typeface="Calibri" pitchFamily="34" charset="-122"/>
-                <a:cs typeface="Calibri" pitchFamily="34" charset="-120"/>
-              </a:rPr>
-              <a:t>→</a:t>
-            </a:r>
-            <a:endParaRPr lang="en-US" sz="1600" dirty="0"/>
-          </a:p>
-        </p:txBody>
-      </p:sp>
-      <p:sp>
-        <p:nvSpPr>
-          <p:cNvPr id="20" name="Shape 18"/>
+          <p:cNvPr id="19" name="Shape 17"/>
           <p:cNvSpPr/>
           <p:nvPr/>
         </p:nvSpPr>
         <p:spPr>
           <a:xfrm>
-            <a:off x="9921240" y="3246120"/>
-            <a:ext cx="1691640" cy="1051560"/>
+            <a:off x="640080" y="4572000"/>
+            <a:ext cx="10104120" cy="594360"/>
           </a:xfrm>
           <a:prstGeom prst="roundRect">
             <a:avLst>
-              <a:gd name="adj" fmla="val 6957"/>
+              <a:gd name="adj" fmla="val 12308"/>
             </a:avLst>
           </a:prstGeom>
           <a:solidFill>
             <a:srgbClr val="6E4A5B"/>
           </a:solidFill>
-          <a:ln w="6350">
+          <a:ln w="12700">
             <a:solidFill>
-              <a:srgbClr val="6E4A5B"/>
+              <a:srgbClr val="B5822A"/>
             </a:solidFill>
             <a:prstDash val="solid"/>
           </a:ln>
@@ -2636,53 +2597,53 @@
       </p:sp>
       <p:sp>
         <p:nvSpPr>
+          <p:cNvPr id="20" name="Text 18"/>
+          <p:cNvSpPr txBox="1"/>
+          <p:nvPr/>
+        </p:nvSpPr>
+        <p:spPr>
+          <a:xfrm>
+            <a:off x="868680" y="4572000"/>
+            <a:ext cx="9646920" cy="594360"/>
+          </a:xfrm>
+          <a:prstGeom prst="rect">
+            <a:avLst/>
+          </a:prstGeom>
+          <a:noFill/>
+          <a:ln/>
+        </p:spPr>
+        <p:txBody>
+          <a:bodyPr wrap="square" lIns="0" tIns="0" rIns="0" bIns="0" rtlCol="0" anchor="ctr"/>
+          <a:lstStyle/>
+          <a:p>
+            <a:pPr algn="ctr" indent="0" marL="0">
+              <a:buNone/>
+            </a:pPr>
+            <a:r>
+              <a:rPr lang="en-US" sz="1400" i="1" dirty="0">
+                <a:solidFill>
+                  <a:srgbClr val="E9DFD3"/>
+                </a:solidFill>
+                <a:latin typeface="Calibri" pitchFamily="34" charset="0"/>
+                <a:ea typeface="Calibri" pitchFamily="34" charset="-122"/>
+                <a:cs typeface="Calibri" pitchFamily="34" charset="-120"/>
+              </a:rPr>
+              <a:t>+ Price-Certainty — a soft hesitation factor that modulates Resolution, not a hard sequential gate like Availability</a:t>
+            </a:r>
+            <a:endParaRPr lang="en-US" sz="1400" dirty="0"/>
+          </a:p>
+        </p:txBody>
+      </p:sp>
+      <p:sp>
+        <p:nvSpPr>
           <p:cNvPr id="21" name="Text 19"/>
           <p:cNvSpPr txBox="1"/>
           <p:nvPr/>
         </p:nvSpPr>
         <p:spPr>
           <a:xfrm>
-            <a:off x="9994392" y="3246120"/>
-            <a:ext cx="1545336" cy="1051560"/>
-          </a:xfrm>
-          <a:prstGeom prst="rect">
-            <a:avLst/>
-          </a:prstGeom>
-          <a:noFill/>
-          <a:ln/>
-        </p:spPr>
-        <p:txBody>
-          <a:bodyPr wrap="square" lIns="0" tIns="0" rIns="0" bIns="0" rtlCol="0" anchor="ctr"/>
-          <a:lstStyle/>
-          <a:p>
-            <a:pPr algn="ctr" indent="0" marL="0">
-              <a:buNone/>
-            </a:pPr>
-            <a:r>
-              <a:rPr lang="en-US" sz="1400" b="1" dirty="0">
-                <a:solidFill>
-                  <a:srgbClr val="F6F1EA"/>
-                </a:solidFill>
-                <a:latin typeface="Calibri" pitchFamily="34" charset="0"/>
-                <a:ea typeface="Calibri" pitchFamily="34" charset="-122"/>
-                <a:cs typeface="Calibri" pitchFamily="34" charset="-120"/>
-              </a:rPr>
-              <a:t>Checkout</a:t>
-            </a:r>
-            <a:endParaRPr lang="en-US" sz="1400" dirty="0"/>
-          </a:p>
-        </p:txBody>
-      </p:sp>
-      <p:sp>
-        <p:nvSpPr>
-          <p:cNvPr id="22" name="Text 20"/>
-          <p:cNvSpPr txBox="1"/>
-          <p:nvPr/>
-        </p:nvSpPr>
-        <p:spPr>
-          <a:xfrm>
-            <a:off x="640080" y="4663440"/>
-            <a:ext cx="10058400" cy="822960"/>
+            <a:off x="640080" y="5349240"/>
+            <a:ext cx="10058400" cy="777240"/>
           </a:xfrm>
           <a:prstGeom prst="rect">
             <a:avLst/>
@@ -2717,7 +2678,7 @@
       </p:sp>
       <p:sp>
         <p:nvSpPr>
-          <p:cNvPr id="23" name="Text 21"/>
+          <p:cNvPr id="22" name="Text 20"/>
           <p:cNvSpPr txBox="1"/>
           <p:nvPr/>
         </p:nvSpPr>
@@ -2756,7 +2717,7 @@
       </p:sp>
       <p:sp>
         <p:nvSpPr>
-          <p:cNvPr id="24" name="Text 22"/>
+          <p:cNvPr id="23" name="Text 21"/>
           <p:cNvSpPr txBox="1"/>
           <p:nvPr/>
         </p:nvSpPr>
@@ -7885,7 +7846,7 @@
                 <a:ea typeface="Calibri" pitchFamily="34" charset="-122"/>
                 <a:cs typeface="Calibri" pitchFamily="34" charset="-120"/>
               </a:rPr>
-              <a:t>Wishlist Grid</a:t>
+              <a:t>Wishlist Intelligence</a:t>
             </a:r>
             <a:endParaRPr lang="en-US" sz="1400" dirty="0"/>
           </a:p>
@@ -8095,7 +8056,7 @@
                 <a:ea typeface="Calibri" pitchFamily="34" charset="-122"/>
                 <a:cs typeface="Calibri" pitchFamily="34" charset="-120"/>
               </a:rPr>
-              <a:t>AI Trace Widget</a:t>
+              <a:t>Decision Check</a:t>
             </a:r>
             <a:endParaRPr lang="en-US" sz="1400" dirty="0"/>
           </a:p>

--- a/docs/deck/NL Myntra.pptx
+++ b/docs/deck/NL Myntra.pptx
@@ -339,6 +339,257 @@
         <c:axId val="2094734552"/>
         <c:scaling>
           <c:orientation val="minMax"/>
+        </c:scaling>
+        <c:delete val="1"/>
+        <c:axPos val="b"/>
+        <c:numFmt formatCode="General" sourceLinked="0"/>
+        <c:majorTickMark val="out"/>
+        <c:minorTickMark val="none"/>
+        <c:tickLblPos val="low"/>
+        <c:spPr>
+          <a:ln w="12700" cap="flat">
+            <a:solidFill>
+              <a:srgbClr val="888888"/>
+            </a:solidFill>
+            <a:prstDash val="solid"/>
+            <a:round/>
+          </a:ln>
+        </c:spPr>
+        <c:txPr>
+          <a:bodyPr/>
+          <a:lstStyle/>
+          <a:p>
+            <a:pPr>
+              <a:defRPr sz="1200" b="0" i="0" u="none" strike="noStrike">
+                <a:solidFill>
+                  <a:srgbClr val="000000"/>
+                </a:solidFill>
+                <a:latin typeface="Arial"/>
+              </a:defRPr>
+            </a:pPr>
+            <a:endParaRPr lang="en-US"/>
+          </a:p>
+        </c:txPr>
+        <c:crossAx val="2094734554"/>
+        <c:crosses val="autoZero"/>
+        <c:crossBetween val="between"/>
+      </c:valAx>
+      <c:spPr>
+        <a:solidFill>
+          <a:srgbClr val="F6F1EA"/>
+        </a:solidFill>
+        <a:ln>
+          <a:noFill/>
+        </a:ln>
+        <a:effectLst/>
+      </c:spPr>
+    </c:plotArea>
+    <c:plotVisOnly val="1"/>
+    <c:dispBlanksAs val="span"/>
+  </c:chart>
+  <c:spPr>
+    <a:solidFill>
+      <a:srgbClr val="F6F1EA"/>
+    </a:solidFill>
+    <a:ln>
+      <a:noFill/>
+    </a:ln>
+    <a:effectLst/>
+  </c:spPr>
+  <c:externalData r:id="rId1">
+    <c:autoUpdate val="0"/>
+  </c:externalData>
+</c:chartSpace>
+</file>
+
+<file path=ppt/charts/chart2.xml><?xml version="1.0" encoding="utf-8"?>
+<c:chartSpace xmlns:c="http://schemas.openxmlformats.org/drawingml/2006/chart" xmlns:a="http://schemas.openxmlformats.org/drawingml/2006/main" xmlns:r="http://schemas.openxmlformats.org/officeDocument/2006/relationships">
+  <c:date1904 val="0"/>
+  <c:roundedCorners val="1"/>
+  <c:chart>
+    <c:autoTitleDeleted val="1"/>
+    <c:plotArea>
+      <c:layout/>
+      <c:barChart>
+        <c:barDir val="bar"/>
+        <c:grouping val="clustered"/>
+        <c:varyColors val="0"/>
+        <c:ser>
+          <c:idx val="0"/>
+          <c:order val="0"/>
+          <c:tx>
+            <c:strRef>
+              <c:f>Sheet1!$B$1</c:f>
+              <c:strCache>
+                <c:ptCount val="1"/>
+                <c:pt idx="0">
+                  <c:v>Score (0–1 scale)</c:v>
+                </c:pt>
+              </c:strCache>
+            </c:strRef>
+          </c:tx>
+          <c:spPr>
+            <a:solidFill>
+              <a:srgbClr val="5B3A4A"/>
+            </a:solidFill>
+            <a:effectLst/>
+          </c:spPr>
+          <c:invertIfNegative val="0"/>
+          <c:dLbls>
+            <c:numFmt formatCode="0.000" sourceLinked="0"/>
+            <c:txPr>
+              <a:bodyPr/>
+              <a:lstStyle/>
+              <a:p>
+                <a:pPr>
+                  <a:defRPr b="0" i="0" strike="noStrike" sz="1400" u="none">
+                    <a:solidFill>
+                      <a:srgbClr val="211D1B"/>
+                    </a:solidFill>
+                    <a:latin typeface="Arial"/>
+                  </a:defRPr>
+                </a:pPr>
+              </a:p>
+            </c:txPr>
+            <c:showLegendKey val="0"/>
+            <c:showVal val="1"/>
+            <c:showCatName val="0"/>
+            <c:showSerName val="0"/>
+            <c:showPercent val="0"/>
+            <c:showBubbleSize val="0"/>
+            <c:showLeaderLines val="0"/>
+          </c:dLbls>
+          <c:dPt>
+            <c:idx val="0"/>
+            <c:invertIfNegative val="0"/>
+            <c:bubble3D val="0"/>
+            <c:spPr>
+              <a:solidFill>
+                <a:srgbClr val="5B3A4A"/>
+              </a:solidFill>
+              <a:effectLst/>
+            </c:spPr>
+          </c:dPt>
+          <c:dPt>
+            <c:idx val="1"/>
+            <c:invertIfNegative val="0"/>
+            <c:bubble3D val="0"/>
+            <c:spPr>
+              <a:solidFill>
+                <a:srgbClr val="B5822A"/>
+              </a:solidFill>
+              <a:effectLst/>
+            </c:spPr>
+          </c:dPt>
+          <c:cat>
+            <c:multiLvlStrRef>
+              <c:f>Sheet1!$A$2:$A$3</c:f>
+              <c:multiLvlStrCache>
+                <c:ptCount val="2"/>
+                <c:lvl>
+                  <c:pt idx="0">
+                    <c:v>E1 — accuracy vs. 137 human-labeled reviews</c:v>
+                  </c:pt>
+                  <c:pt idx="1">
+                    <c:v>E3 — cross-model agreement (Cohen's kappa)</c:v>
+                  </c:pt>
+                </c:lvl>
+              </c:multiLvlStrCache>
+            </c:multiLvlStrRef>
+          </c:cat>
+          <c:val>
+            <c:numRef>
+              <c:f>Sheet1!$B$2:$B$3</c:f>
+              <c:numCache>
+                <c:formatCode>General</c:formatCode>
+                <c:ptCount val="2"/>
+                <c:pt idx="0">
+                  <c:v>0.875</c:v>
+                </c:pt>
+                <c:pt idx="1">
+                  <c:v>0.159</c:v>
+                </c:pt>
+              </c:numCache>
+            </c:numRef>
+          </c:val>
+        </c:ser>
+        <c:dLbls>
+          <c:numFmt formatCode="0.000" sourceLinked="0"/>
+          <c:txPr>
+            <a:bodyPr/>
+            <a:lstStyle/>
+            <a:p>
+              <a:pPr>
+                <a:defRPr b="0" i="0" strike="noStrike" sz="1400" u="none">
+                  <a:solidFill>
+                    <a:srgbClr val="211D1B"/>
+                  </a:solidFill>
+                  <a:latin typeface="Arial"/>
+                </a:defRPr>
+              </a:pPr>
+            </a:p>
+          </c:txPr>
+          <c:showLegendKey val="0"/>
+          <c:showVal val="1"/>
+          <c:showCatName val="0"/>
+          <c:showSerName val="0"/>
+          <c:showPercent val="0"/>
+          <c:showBubbleSize val="0"/>
+          <c:showLeaderLines val="0"/>
+        </c:dLbls>
+        <c:gapWidth val="150"/>
+        <c:overlap val="0"/>
+        <c:axId val="2094734554"/>
+        <c:axId val="2094734552"/>
+        <c:axId val="2094734556"/>
+      </c:barChart>
+      <c:catAx>
+        <c:axId val="2094734554"/>
+        <c:scaling>
+          <c:orientation val="minMax"/>
+        </c:scaling>
+        <c:delete val="0"/>
+        <c:axPos val="l"/>
+        <c:numFmt formatCode="General" sourceLinked="1"/>
+        <c:majorTickMark val="out"/>
+        <c:minorTickMark val="none"/>
+        <c:tickLblPos val="nextTo"/>
+        <c:spPr>
+          <a:ln w="12700" cap="flat">
+            <a:solidFill>
+              <a:srgbClr val="888888"/>
+            </a:solidFill>
+            <a:prstDash val="solid"/>
+            <a:round/>
+          </a:ln>
+        </c:spPr>
+        <c:txPr>
+          <a:bodyPr/>
+          <a:lstStyle/>
+          <a:p>
+            <a:pPr>
+              <a:defRPr sz="1400" b="0" i="0" u="none" strike="noStrike">
+                <a:solidFill>
+                  <a:srgbClr val="4A433C"/>
+                </a:solidFill>
+                <a:latin typeface="Arial"/>
+              </a:defRPr>
+            </a:pPr>
+            <a:endParaRPr lang="en-US"/>
+          </a:p>
+        </c:txPr>
+        <c:crossAx val="2094734552"/>
+        <c:crosses val="autoZero"/>
+        <c:auto val="1"/>
+        <c:lblAlgn val="ctr"/>
+        <c:noMultiLvlLbl val="1"/>
+      </c:catAx>
+      <c:valAx>
+        <c:axId val="2094734552"/>
+        <c:scaling>
+          <c:orientation val="minMax"/>
+          <c:max val="1"/>
+          <c:min val="0"/>
         </c:scaling>
         <c:delete val="1"/>
         <c:axPos val="b"/>
@@ -2864,7 +3115,7 @@
         <p:spPr>
           <a:xfrm>
             <a:off x="914400" y="1993392"/>
-            <a:ext cx="4709160" cy="365760"/>
+            <a:ext cx="4572000" cy="365760"/>
           </a:xfrm>
           <a:prstGeom prst="rect">
             <a:avLst/>
@@ -2981,6 +3232,65 @@
       <p:sp>
         <p:nvSpPr>
           <p:cNvPr id="7" name="Shape 5"/>
+          <p:cNvSpPr/>
+          <p:nvPr/>
+        </p:nvSpPr>
+        <p:spPr>
+          <a:xfrm>
+            <a:off x="5486400" y="1965960"/>
+            <a:ext cx="292608" cy="292608"/>
+          </a:xfrm>
+          <a:prstGeom prst="ellipse">
+            <a:avLst/>
+          </a:prstGeom>
+          <a:solidFill>
+            <a:srgbClr val="B5822A"/>
+          </a:solidFill>
+          <a:ln/>
+        </p:spPr>
+      </p:sp>
+      <p:sp>
+        <p:nvSpPr>
+          <p:cNvPr id="8" name="Text 6"/>
+          <p:cNvSpPr txBox="1"/>
+          <p:nvPr/>
+        </p:nvSpPr>
+        <p:spPr>
+          <a:xfrm>
+            <a:off x="5486400" y="1965960"/>
+            <a:ext cx="292608" cy="292608"/>
+          </a:xfrm>
+          <a:prstGeom prst="rect">
+            <a:avLst/>
+          </a:prstGeom>
+          <a:noFill/>
+          <a:ln/>
+        </p:spPr>
+        <p:txBody>
+          <a:bodyPr wrap="square" lIns="0" tIns="0" rIns="0" bIns="0" rtlCol="0" anchor="ctr"/>
+          <a:lstStyle/>
+          <a:p>
+            <a:pPr algn="ctr" indent="0" marL="0">
+              <a:buNone/>
+            </a:pPr>
+            <a:r>
+              <a:rPr lang="en-US" sz="1400" b="1" dirty="0">
+                <a:solidFill>
+                  <a:srgbClr val="FFFFFF"/>
+                </a:solidFill>
+                <a:latin typeface="Calibri" pitchFamily="34" charset="0"/>
+                <a:ea typeface="Calibri" pitchFamily="34" charset="-122"/>
+                <a:cs typeface="Calibri" pitchFamily="34" charset="-120"/>
+              </a:rPr>
+              <a:t>1</a:t>
+            </a:r>
+            <a:endParaRPr lang="en-US" sz="1400" dirty="0"/>
+          </a:p>
+        </p:txBody>
+      </p:sp>
+      <p:sp>
+        <p:nvSpPr>
+          <p:cNvPr id="9" name="Shape 7"/>
           <p:cNvSpPr/>
           <p:nvPr/>
         </p:nvSpPr>
@@ -3007,14 +3317,14 @@
       </p:sp>
       <p:sp>
         <p:nvSpPr>
-          <p:cNvPr id="8" name="Text 6"/>
+          <p:cNvPr id="10" name="Text 8"/>
           <p:cNvSpPr txBox="1"/>
           <p:nvPr/>
         </p:nvSpPr>
         <p:spPr>
           <a:xfrm>
             <a:off x="6537960" y="1993392"/>
-            <a:ext cx="4709160" cy="365760"/>
+            <a:ext cx="4572000" cy="365760"/>
           </a:xfrm>
           <a:prstGeom prst="rect">
             <a:avLst/>
@@ -3046,7 +3356,7 @@
       </p:sp>
       <p:sp>
         <p:nvSpPr>
-          <p:cNvPr id="9" name="Text 7"/>
+          <p:cNvPr id="11" name="Text 9"/>
           <p:cNvSpPr txBox="1"/>
           <p:nvPr/>
         </p:nvSpPr>
@@ -3080,7 +3390,7 @@
                 <a:ea typeface="Calibri" pitchFamily="34" charset="-122"/>
                 <a:cs typeface="Calibri" pitchFamily="34" charset="-120"/>
               </a:rPr>
-              <a:t>Review-writers aren't representative; Reddit was scoped out for policy reasons.</a:t>
+              <a:t>Review-writers aren't representative; Reddit/YouTube/social scoped out for policy/time reasons.</a:t>
             </a:r>
             <a:endParaRPr lang="en-US" sz="1400" dirty="0"/>
           </a:p>
@@ -3088,7 +3398,7 @@
       </p:sp>
       <p:sp>
         <p:nvSpPr>
-          <p:cNvPr id="10" name="Text 8"/>
+          <p:cNvPr id="12" name="Text 10"/>
           <p:cNvSpPr txBox="1"/>
           <p:nvPr/>
         </p:nvSpPr>
@@ -3130,7 +3440,66 @@
       </p:sp>
       <p:sp>
         <p:nvSpPr>
-          <p:cNvPr id="11" name="Shape 9"/>
+          <p:cNvPr id="13" name="Shape 11"/>
+          <p:cNvSpPr/>
+          <p:nvPr/>
+        </p:nvSpPr>
+        <p:spPr>
+          <a:xfrm>
+            <a:off x="11109960" y="1965960"/>
+            <a:ext cx="292608" cy="292608"/>
+          </a:xfrm>
+          <a:prstGeom prst="ellipse">
+            <a:avLst/>
+          </a:prstGeom>
+          <a:solidFill>
+            <a:srgbClr val="B5822A"/>
+          </a:solidFill>
+          <a:ln/>
+        </p:spPr>
+      </p:sp>
+      <p:sp>
+        <p:nvSpPr>
+          <p:cNvPr id="14" name="Text 12"/>
+          <p:cNvSpPr txBox="1"/>
+          <p:nvPr/>
+        </p:nvSpPr>
+        <p:spPr>
+          <a:xfrm>
+            <a:off x="11109960" y="1965960"/>
+            <a:ext cx="292608" cy="292608"/>
+          </a:xfrm>
+          <a:prstGeom prst="rect">
+            <a:avLst/>
+          </a:prstGeom>
+          <a:noFill/>
+          <a:ln/>
+        </p:spPr>
+        <p:txBody>
+          <a:bodyPr wrap="square" lIns="0" tIns="0" rIns="0" bIns="0" rtlCol="0" anchor="ctr"/>
+          <a:lstStyle/>
+          <a:p>
+            <a:pPr algn="ctr" indent="0" marL="0">
+              <a:buNone/>
+            </a:pPr>
+            <a:r>
+              <a:rPr lang="en-US" sz="1400" b="1" dirty="0">
+                <a:solidFill>
+                  <a:srgbClr val="FFFFFF"/>
+                </a:solidFill>
+                <a:latin typeface="Calibri" pitchFamily="34" charset="0"/>
+                <a:ea typeface="Calibri" pitchFamily="34" charset="-122"/>
+                <a:cs typeface="Calibri" pitchFamily="34" charset="-120"/>
+              </a:rPr>
+              <a:t>2</a:t>
+            </a:r>
+            <a:endParaRPr lang="en-US" sz="1400" dirty="0"/>
+          </a:p>
+        </p:txBody>
+      </p:sp>
+      <p:sp>
+        <p:nvSpPr>
+          <p:cNvPr id="15" name="Shape 13"/>
           <p:cNvSpPr/>
           <p:nvPr/>
         </p:nvSpPr>
@@ -3157,14 +3526,14 @@
       </p:sp>
       <p:sp>
         <p:nvSpPr>
-          <p:cNvPr id="12" name="Text 10"/>
+          <p:cNvPr id="16" name="Text 14"/>
           <p:cNvSpPr txBox="1"/>
           <p:nvPr/>
         </p:nvSpPr>
         <p:spPr>
           <a:xfrm>
             <a:off x="914400" y="4233672"/>
-            <a:ext cx="4709160" cy="365760"/>
+            <a:ext cx="4572000" cy="365760"/>
           </a:xfrm>
           <a:prstGeom prst="rect">
             <a:avLst/>
@@ -3196,7 +3565,7 @@
       </p:sp>
       <p:sp>
         <p:nvSpPr>
-          <p:cNvPr id="13" name="Text 11"/>
+          <p:cNvPr id="17" name="Text 15"/>
           <p:cNvSpPr txBox="1"/>
           <p:nvPr/>
         </p:nvSpPr>
@@ -3230,7 +3599,7 @@
                 <a:ea typeface="Calibri" pitchFamily="34" charset="-122"/>
                 <a:cs typeface="Calibri" pitchFamily="34" charset="-120"/>
               </a:rPr>
-              <a:t>κ = 0.159 between the primary and backup classifiers.</a:t>
+              <a:t>Kappa = 0.159 between the primary and backup classifiers.</a:t>
             </a:r>
             <a:endParaRPr lang="en-US" sz="1400" dirty="0"/>
           </a:p>
@@ -3238,7 +3607,7 @@
       </p:sp>
       <p:sp>
         <p:nvSpPr>
-          <p:cNvPr id="14" name="Text 12"/>
+          <p:cNvPr id="18" name="Text 16"/>
           <p:cNvSpPr txBox="1"/>
           <p:nvPr/>
         </p:nvSpPr>
@@ -3280,7 +3649,66 @@
       </p:sp>
       <p:sp>
         <p:nvSpPr>
-          <p:cNvPr id="15" name="Shape 13"/>
+          <p:cNvPr id="19" name="Shape 17"/>
+          <p:cNvSpPr/>
+          <p:nvPr/>
+        </p:nvSpPr>
+        <p:spPr>
+          <a:xfrm>
+            <a:off x="5486400" y="4206240"/>
+            <a:ext cx="292608" cy="292608"/>
+          </a:xfrm>
+          <a:prstGeom prst="ellipse">
+            <a:avLst/>
+          </a:prstGeom>
+          <a:solidFill>
+            <a:srgbClr val="B5822A"/>
+          </a:solidFill>
+          <a:ln/>
+        </p:spPr>
+      </p:sp>
+      <p:sp>
+        <p:nvSpPr>
+          <p:cNvPr id="20" name="Text 18"/>
+          <p:cNvSpPr txBox="1"/>
+          <p:nvPr/>
+        </p:nvSpPr>
+        <p:spPr>
+          <a:xfrm>
+            <a:off x="5486400" y="4206240"/>
+            <a:ext cx="292608" cy="292608"/>
+          </a:xfrm>
+          <a:prstGeom prst="rect">
+            <a:avLst/>
+          </a:prstGeom>
+          <a:noFill/>
+          <a:ln/>
+        </p:spPr>
+        <p:txBody>
+          <a:bodyPr wrap="square" lIns="0" tIns="0" rIns="0" bIns="0" rtlCol="0" anchor="ctr"/>
+          <a:lstStyle/>
+          <a:p>
+            <a:pPr algn="ctr" indent="0" marL="0">
+              <a:buNone/>
+            </a:pPr>
+            <a:r>
+              <a:rPr lang="en-US" sz="1400" b="1" dirty="0">
+                <a:solidFill>
+                  <a:srgbClr val="FFFFFF"/>
+                </a:solidFill>
+                <a:latin typeface="Calibri" pitchFamily="34" charset="0"/>
+                <a:ea typeface="Calibri" pitchFamily="34" charset="-122"/>
+                <a:cs typeface="Calibri" pitchFamily="34" charset="-120"/>
+              </a:rPr>
+              <a:t>3</a:t>
+            </a:r>
+            <a:endParaRPr lang="en-US" sz="1400" dirty="0"/>
+          </a:p>
+        </p:txBody>
+      </p:sp>
+      <p:sp>
+        <p:nvSpPr>
+          <p:cNvPr id="21" name="Shape 19"/>
           <p:cNvSpPr/>
           <p:nvPr/>
         </p:nvSpPr>
@@ -3307,14 +3735,14 @@
       </p:sp>
       <p:sp>
         <p:nvSpPr>
-          <p:cNvPr id="16" name="Text 14"/>
+          <p:cNvPr id="22" name="Text 20"/>
           <p:cNvSpPr txBox="1"/>
           <p:nvPr/>
         </p:nvSpPr>
         <p:spPr>
           <a:xfrm>
             <a:off x="6537960" y="4233672"/>
-            <a:ext cx="4709160" cy="365760"/>
+            <a:ext cx="4572000" cy="365760"/>
           </a:xfrm>
           <a:prstGeom prst="rect">
             <a:avLst/>
@@ -3346,7 +3774,7 @@
       </p:sp>
       <p:sp>
         <p:nvSpPr>
-          <p:cNvPr id="17" name="Text 15"/>
+          <p:cNvPr id="23" name="Text 21"/>
           <p:cNvSpPr txBox="1"/>
           <p:nvPr/>
         </p:nvSpPr>
@@ -3388,7 +3816,7 @@
       </p:sp>
       <p:sp>
         <p:nvSpPr>
-          <p:cNvPr id="18" name="Text 16"/>
+          <p:cNvPr id="24" name="Text 22"/>
           <p:cNvSpPr txBox="1"/>
           <p:nvPr/>
         </p:nvSpPr>
@@ -3430,7 +3858,66 @@
       </p:sp>
       <p:sp>
         <p:nvSpPr>
-          <p:cNvPr id="19" name="Text 17"/>
+          <p:cNvPr id="25" name="Shape 23"/>
+          <p:cNvSpPr/>
+          <p:nvPr/>
+        </p:nvSpPr>
+        <p:spPr>
+          <a:xfrm>
+            <a:off x="11109960" y="4206240"/>
+            <a:ext cx="292608" cy="292608"/>
+          </a:xfrm>
+          <a:prstGeom prst="ellipse">
+            <a:avLst/>
+          </a:prstGeom>
+          <a:solidFill>
+            <a:srgbClr val="B5822A"/>
+          </a:solidFill>
+          <a:ln/>
+        </p:spPr>
+      </p:sp>
+      <p:sp>
+        <p:nvSpPr>
+          <p:cNvPr id="26" name="Text 24"/>
+          <p:cNvSpPr txBox="1"/>
+          <p:nvPr/>
+        </p:nvSpPr>
+        <p:spPr>
+          <a:xfrm>
+            <a:off x="11109960" y="4206240"/>
+            <a:ext cx="292608" cy="292608"/>
+          </a:xfrm>
+          <a:prstGeom prst="rect">
+            <a:avLst/>
+          </a:prstGeom>
+          <a:noFill/>
+          <a:ln/>
+        </p:spPr>
+        <p:txBody>
+          <a:bodyPr wrap="square" lIns="0" tIns="0" rIns="0" bIns="0" rtlCol="0" anchor="ctr"/>
+          <a:lstStyle/>
+          <a:p>
+            <a:pPr algn="ctr" indent="0" marL="0">
+              <a:buNone/>
+            </a:pPr>
+            <a:r>
+              <a:rPr lang="en-US" sz="1400" b="1" dirty="0">
+                <a:solidFill>
+                  <a:srgbClr val="FFFFFF"/>
+                </a:solidFill>
+                <a:latin typeface="Calibri" pitchFamily="34" charset="0"/>
+                <a:ea typeface="Calibri" pitchFamily="34" charset="-122"/>
+                <a:cs typeface="Calibri" pitchFamily="34" charset="-120"/>
+              </a:rPr>
+              <a:t>4</a:t>
+            </a:r>
+            <a:endParaRPr lang="en-US" sz="1400" dirty="0"/>
+          </a:p>
+        </p:txBody>
+      </p:sp>
+      <p:sp>
+        <p:nvSpPr>
+          <p:cNvPr id="27" name="Text 25"/>
           <p:cNvSpPr txBox="1"/>
           <p:nvPr/>
         </p:nvSpPr>
@@ -3469,7 +3956,7 @@
       </p:sp>
       <p:sp>
         <p:nvSpPr>
-          <p:cNvPr id="20" name="Text 18"/>
+          <p:cNvPr id="28" name="Text 26"/>
           <p:cNvSpPr txBox="1"/>
           <p:nvPr/>
         </p:nvSpPr>
@@ -4990,7 +5477,9 @@
       </p:sp>
       <p:sp>
         <p:nvSpPr>
-          <p:cNvPr id="43" name="Text 41"/>
+          <p:cNvPr id="43" name="Text 41">
+            <a:hlinkClick r:id="rId1" tooltip=""/>
+          </p:cNvPr>
           <p:cNvSpPr txBox="1"/>
           <p:nvPr/>
         </p:nvSpPr>
@@ -5016,13 +5505,20 @@
               <a:buNone/>
             </a:pPr>
             <a:r>
-              <a:rPr lang="en-US" sz="1400" dirty="0">
+              <a:rPr lang="en-US" sz="1400" u="sng" dirty="0">
                 <a:solidFill>
                   <a:srgbClr val="211D1B"/>
                 </a:solidFill>
                 <a:latin typeface="Courier New" pitchFamily="34" charset="0"/>
                 <a:ea typeface="Courier New" pitchFamily="34" charset="-122"/>
                 <a:cs typeface="Courier New" pitchFamily="34" charset="-120"/>
+                <a:hlinkClick r:id="rId1" invalidUrl="" action="" tgtFrame="" tooltip="" history="1" highlightClick="0" endSnd="0">
+                  <a:extLst>
+                    <a:ext uri="{A12FA001-AC4F-418D-AE19-62706E023703}">
+                      <ahyp:hlinkClr xmlns:ahyp="http://schemas.microsoft.com/office/drawing/2018/hyperlinkcolor" val="tx"/>
+                    </a:ext>
+                  </a:extLst>
+                </a:hlinkClick>
               </a:rPr>
               <a:t>https://zeusworkspace1.app.n8n.cloud/webhook/</a:t>
             </a:r>
@@ -5036,13 +5532,20 @@
               <a:buNone/>
             </a:pPr>
             <a:r>
-              <a:rPr lang="en-US" sz="1400" dirty="0">
+              <a:rPr lang="en-US" sz="1400" u="sng" dirty="0">
                 <a:solidFill>
                   <a:srgbClr val="211D1B"/>
                 </a:solidFill>
                 <a:latin typeface="Courier New" pitchFamily="34" charset="0"/>
                 <a:ea typeface="Courier New" pitchFamily="34" charset="-122"/>
                 <a:cs typeface="Courier New" pitchFamily="34" charset="-120"/>
+                <a:hlinkClick r:id="rId1" invalidUrl="" action="" tgtFrame="" tooltip="" history="1" highlightClick="0" endSnd="0">
+                  <a:extLst>
+                    <a:ext uri="{A12FA001-AC4F-418D-AE19-62706E023703}">
+                      <ahyp:hlinkClr xmlns:ahyp="http://schemas.microsoft.com/office/drawing/2018/hyperlinkcolor" val="tx"/>
+                    </a:ext>
+                  </a:extLst>
+                </a:hlinkClick>
               </a:rPr>
               <a:t>wishlist-discovery-engine</a:t>
             </a:r>
@@ -5058,8 +5561,8 @@
         </p:nvSpPr>
         <p:spPr>
           <a:xfrm>
-            <a:off x="640080" y="5074920"/>
-            <a:ext cx="10424160" cy="777240"/>
+            <a:off x="640080" y="5029200"/>
+            <a:ext cx="10424160" cy="822960"/>
           </a:xfrm>
           <a:prstGeom prst="rect">
             <a:avLst/>
@@ -5073,7 +5576,7 @@
           <a:p>
             <a:pPr indent="0" marL="0">
               <a:lnSpc>
-                <a:spcPct val="115000"/>
+                <a:spcPct val="110000"/>
               </a:lnSpc>
               <a:buNone/>
             </a:pPr>
@@ -5086,7 +5589,7 @@
                 <a:ea typeface="Calibri" pitchFamily="34" charset="-122"/>
                 <a:cs typeface="Calibri" pitchFamily="34" charset="-120"/>
               </a:rPr>
-              <a:t>One honest scope decision: Reddit was excluded. Reddit's Responsible Builder Policy funnels bulk research use through a formal researcher program with a timeline this project's window couldn't accommodate — disclosed here, not quietly worked around.</a:t>
+              <a:t>Sources actually scraped at scale: Play Store + App Store reviews. Two were consciously not pursued in this window, not silently skipped: Reddit was scoped out per Reddit's Responsible Builder Policy, which funnels bulk research use through a formal researcher program this project's timeline couldn't accommodate. YouTube comments and social/community sources were never attempted — disclosed here for the same reason, not hidden.</a:t>
             </a:r>
             <a:endParaRPr lang="en-US" sz="1400" dirty="0"/>
           </a:p>
@@ -5516,7 +6019,7 @@
           <a:p>
             <a:pPr indent="0" marL="0">
               <a:lnSpc>
-                <a:spcPct val="115000"/>
+                <a:spcPct val="110000"/>
               </a:lnSpc>
               <a:buNone/>
             </a:pPr>
@@ -6110,7 +6613,7 @@
         <p:spPr>
           <a:xfrm>
             <a:off x="640080" y="5074920"/>
-            <a:ext cx="10515600" cy="640080"/>
+            <a:ext cx="10515600" cy="502920"/>
           </a:xfrm>
           <a:prstGeom prst="rect">
             <a:avLst/>
@@ -6151,6 +6654,66 @@
         </p:nvSpPr>
         <p:spPr>
           <a:xfrm>
+            <a:off x="640080" y="5669280"/>
+            <a:ext cx="10515600" cy="292608"/>
+          </a:xfrm>
+          <a:prstGeom prst="rect">
+            <a:avLst/>
+          </a:prstGeom>
+          <a:noFill/>
+          <a:ln/>
+        </p:spPr>
+        <p:txBody>
+          <a:bodyPr wrap="square" lIns="0" tIns="0" rIns="0" bIns="0" rtlCol="0" anchor="ctr"/>
+          <a:lstStyle/>
+          <a:p>
+            <a:pPr indent="0" marL="0">
+              <a:buNone/>
+            </a:pPr>
+            <a:r>
+              <a:rPr lang="en-US" sz="1400" b="1" spc="50" kern="0" dirty="0">
+                <a:solidFill>
+                  <a:srgbClr val="4B6B4F"/>
+                </a:solidFill>
+                <a:latin typeface="Calibri" pitchFamily="34" charset="0"/>
+                <a:ea typeface="Calibri" pitchFamily="34" charset="-122"/>
+                <a:cs typeface="Calibri" pitchFamily="34" charset="-120"/>
+              </a:rPr>
+              <a:t>SURVEY (n=32)   </a:t>
+            </a:r>
+            <a:pPr indent="0" marL="0">
+              <a:buNone/>
+            </a:pPr>
+            <a:r>
+              <a:rPr lang="en-US" sz="1400" u="sng" dirty="0">
+                <a:solidFill>
+                  <a:srgbClr val="211D1B"/>
+                </a:solidFill>
+                <a:latin typeface="Calibri" pitchFamily="34" charset="0"/>
+                <a:ea typeface="Calibri" pitchFamily="34" charset="-122"/>
+                <a:cs typeface="Calibri" pitchFamily="34" charset="-120"/>
+                <a:hlinkClick r:id="rId1" invalidUrl="" action="" tgtFrame="" tooltip="" history="1" highlightClick="0" endSnd="0">
+                  <a:extLst>
+                    <a:ext uri="{A12FA001-AC4F-418D-AE19-62706E023703}">
+                      <ahyp:hlinkClr xmlns:ahyp="http://schemas.microsoft.com/office/drawing/2018/hyperlinkcolor" val="tx"/>
+                    </a:ext>
+                  </a:extLst>
+                </a:hlinkClick>
+              </a:rPr>
+              <a:t>docs.google.com/forms/d/e/1FAIpQLScsU5OcvTbEetugF0pG-ek2eo_8VEz1DLEjX0gMDsydgOHizA/viewform</a:t>
+            </a:r>
+            <a:endParaRPr lang="en-US" sz="1400" dirty="0"/>
+          </a:p>
+        </p:txBody>
+      </p:sp>
+      <p:sp>
+        <p:nvSpPr>
+          <p:cNvPr id="17" name="Text 15"/>
+          <p:cNvSpPr txBox="1"/>
+          <p:nvPr/>
+        </p:nvSpPr>
+        <p:spPr>
+          <a:xfrm>
             <a:off x="457200" y="6492240"/>
             <a:ext cx="5486400" cy="274320"/>
           </a:xfrm>
@@ -6184,7 +6747,7 @@
       </p:sp>
       <p:sp>
         <p:nvSpPr>
-          <p:cNvPr id="17" name="Text 15"/>
+          <p:cNvPr id="18" name="Text 16"/>
           <p:cNvSpPr txBox="1"/>
           <p:nvPr/>
         </p:nvSpPr>
@@ -6303,12 +6866,12 @@
         </p:nvSpPr>
         <p:spPr>
           <a:xfrm>
-            <a:off x="640080" y="1828800"/>
-            <a:ext cx="5257800" cy="1965960"/>
+            <a:off x="640080" y="1737360"/>
+            <a:ext cx="5257800" cy="1645920"/>
           </a:xfrm>
           <a:prstGeom prst="roundRect">
             <a:avLst>
-              <a:gd name="adj" fmla="val 3721"/>
+              <a:gd name="adj" fmla="val 4444"/>
             </a:avLst>
           </a:prstGeom>
           <a:solidFill>
@@ -6324,14 +6887,95 @@
       </p:sp>
       <p:sp>
         <p:nvSpPr>
-          <p:cNvPr id="4" name="Shape 2"/>
+          <p:cNvPr id="4" name="Text 2"/>
+          <p:cNvSpPr txBox="1"/>
+          <p:nvPr/>
+        </p:nvSpPr>
+        <p:spPr>
+          <a:xfrm>
+            <a:off x="960120" y="1883664"/>
+            <a:ext cx="4480560" cy="274320"/>
+          </a:xfrm>
+          <a:prstGeom prst="rect">
+            <a:avLst/>
+          </a:prstGeom>
+          <a:noFill/>
+          <a:ln/>
+        </p:spPr>
+        <p:txBody>
+          <a:bodyPr wrap="square" lIns="0" tIns="0" rIns="0" bIns="0" rtlCol="0" anchor="ctr"/>
+          <a:lstStyle/>
+          <a:p>
+            <a:pPr indent="0" marL="0">
+              <a:buNone/>
+            </a:pPr>
+            <a:r>
+              <a:rPr lang="en-US" sz="1400" b="1" spc="100" kern="0" dirty="0">
+                <a:solidFill>
+                  <a:srgbClr val="5B3A4A"/>
+                </a:solidFill>
+                <a:latin typeface="Calibri" pitchFamily="34" charset="0"/>
+                <a:ea typeface="Calibri" pitchFamily="34" charset="-122"/>
+                <a:cs typeface="Calibri" pitchFamily="34" charset="-120"/>
+              </a:rPr>
+              <a:t>SEGMENT</a:t>
+            </a:r>
+            <a:endParaRPr lang="en-US" sz="1400" dirty="0"/>
+          </a:p>
+        </p:txBody>
+      </p:sp>
+      <p:sp>
+        <p:nvSpPr>
+          <p:cNvPr id="5" name="Text 3"/>
+          <p:cNvSpPr txBox="1"/>
+          <p:nvPr/>
+        </p:nvSpPr>
+        <p:spPr>
+          <a:xfrm>
+            <a:off x="960120" y="2194560"/>
+            <a:ext cx="4663440" cy="1051560"/>
+          </a:xfrm>
+          <a:prstGeom prst="rect">
+            <a:avLst/>
+          </a:prstGeom>
+          <a:noFill/>
+          <a:ln/>
+        </p:spPr>
+        <p:txBody>
+          <a:bodyPr wrap="square" lIns="0" tIns="0" rIns="0" bIns="0" rtlCol="0" anchor="ctr"/>
+          <a:lstStyle/>
+          <a:p>
+            <a:pPr indent="0" marL="0">
+              <a:lnSpc>
+                <a:spcPct val="110000"/>
+              </a:lnSpc>
+              <a:buNone/>
+            </a:pPr>
+            <a:r>
+              <a:rPr lang="en-US" sz="1400" dirty="0">
+                <a:solidFill>
+                  <a:srgbClr val="3A342E"/>
+                </a:solidFill>
+                <a:latin typeface="Calibri" pitchFamily="34" charset="0"/>
+                <a:ea typeface="Calibri" pitchFamily="34" charset="-122"/>
+                <a:cs typeface="Calibri" pitchFamily="34" charset="-120"/>
+              </a:rPr>
+              <a:t>Wishlist-savers with unresolved decision-stage uncertainty — spans price, fit, quality, occasion, and availability doubt, not one narrow group.</a:t>
+            </a:r>
+            <a:endParaRPr lang="en-US" sz="1400" dirty="0"/>
+          </a:p>
+        </p:txBody>
+      </p:sp>
+      <p:sp>
+        <p:nvSpPr>
+          <p:cNvPr id="6" name="Shape 4"/>
           <p:cNvSpPr/>
           <p:nvPr/>
         </p:nvSpPr>
         <p:spPr>
           <a:xfrm>
-            <a:off x="914400" y="2048256"/>
-            <a:ext cx="146304" cy="146304"/>
+            <a:off x="5486400" y="1856232"/>
+            <a:ext cx="292608" cy="292608"/>
           </a:xfrm>
           <a:prstGeom prst="ellipse">
             <a:avLst/>
@@ -6344,38 +6988,38 @@
       </p:sp>
       <p:sp>
         <p:nvSpPr>
-          <p:cNvPr id="5" name="Text 3"/>
-          <p:cNvSpPr txBox="1"/>
-          <p:nvPr/>
-        </p:nvSpPr>
-        <p:spPr>
-          <a:xfrm>
-            <a:off x="1170432" y="2011680"/>
-            <a:ext cx="4480560" cy="274320"/>
-          </a:xfrm>
-          <a:prstGeom prst="rect">
-            <a:avLst/>
-          </a:prstGeom>
-          <a:noFill/>
-          <a:ln/>
-        </p:spPr>
-        <p:txBody>
-          <a:bodyPr wrap="square" lIns="0" tIns="0" rIns="0" bIns="0" rtlCol="0" anchor="ctr"/>
-          <a:lstStyle/>
-          <a:p>
-            <a:pPr indent="0" marL="0">
-              <a:buNone/>
-            </a:pPr>
-            <a:r>
-              <a:rPr lang="en-US" sz="1400" b="1" spc="100" kern="0" dirty="0">
-                <a:solidFill>
-                  <a:srgbClr val="5B3A4A"/>
-                </a:solidFill>
-                <a:latin typeface="Calibri" pitchFamily="34" charset="0"/>
-                <a:ea typeface="Calibri" pitchFamily="34" charset="-122"/>
-                <a:cs typeface="Calibri" pitchFamily="34" charset="-120"/>
-              </a:rPr>
-              <a:t>SEGMENT</a:t>
+          <p:cNvPr id="7" name="Text 5"/>
+          <p:cNvSpPr txBox="1"/>
+          <p:nvPr/>
+        </p:nvSpPr>
+        <p:spPr>
+          <a:xfrm>
+            <a:off x="5486400" y="1856232"/>
+            <a:ext cx="292608" cy="292608"/>
+          </a:xfrm>
+          <a:prstGeom prst="rect">
+            <a:avLst/>
+          </a:prstGeom>
+          <a:noFill/>
+          <a:ln/>
+        </p:spPr>
+        <p:txBody>
+          <a:bodyPr wrap="square" lIns="0" tIns="0" rIns="0" bIns="0" rtlCol="0" anchor="ctr"/>
+          <a:lstStyle/>
+          <a:p>
+            <a:pPr algn="ctr" indent="0" marL="0">
+              <a:buNone/>
+            </a:pPr>
+            <a:r>
+              <a:rPr lang="en-US" sz="1400" b="1" dirty="0">
+                <a:solidFill>
+                  <a:srgbClr val="FFFFFF"/>
+                </a:solidFill>
+                <a:latin typeface="Calibri" pitchFamily="34" charset="0"/>
+                <a:ea typeface="Calibri" pitchFamily="34" charset="-122"/>
+                <a:cs typeface="Calibri" pitchFamily="34" charset="-120"/>
+              </a:rPr>
+              <a:t>1</a:t>
             </a:r>
             <a:endParaRPr lang="en-US" sz="1400" dirty="0"/>
           </a:p>
@@ -6383,60 +7027,18 @@
       </p:sp>
       <p:sp>
         <p:nvSpPr>
-          <p:cNvPr id="6" name="Text 4"/>
-          <p:cNvSpPr txBox="1"/>
-          <p:nvPr/>
-        </p:nvSpPr>
-        <p:spPr>
-          <a:xfrm>
-            <a:off x="960120" y="2377440"/>
-            <a:ext cx="4663440" cy="1234440"/>
-          </a:xfrm>
-          <a:prstGeom prst="rect">
-            <a:avLst/>
-          </a:prstGeom>
-          <a:noFill/>
-          <a:ln/>
-        </p:spPr>
-        <p:txBody>
-          <a:bodyPr wrap="square" lIns="0" tIns="0" rIns="0" bIns="0" rtlCol="0" anchor="ctr"/>
-          <a:lstStyle/>
-          <a:p>
-            <a:pPr indent="0" marL="0">
-              <a:lnSpc>
-                <a:spcPct val="120000"/>
-              </a:lnSpc>
-              <a:buNone/>
-            </a:pPr>
-            <a:r>
-              <a:rPr lang="en-US" sz="1400" dirty="0">
-                <a:solidFill>
-                  <a:srgbClr val="3A342E"/>
-                </a:solidFill>
-                <a:latin typeface="Calibri" pitchFamily="34" charset="0"/>
-                <a:ea typeface="Calibri" pitchFamily="34" charset="-122"/>
-                <a:cs typeface="Calibri" pitchFamily="34" charset="-120"/>
-              </a:rPr>
-              <a:t>Wishlist-savers with unresolved decision-stage uncertainty — spans price, fit, quality, occasion, and availability doubt, not one narrow group.</a:t>
-            </a:r>
-            <a:endParaRPr lang="en-US" sz="1400" dirty="0"/>
-          </a:p>
-        </p:txBody>
-      </p:sp>
-      <p:sp>
-        <p:nvSpPr>
-          <p:cNvPr id="7" name="Shape 5"/>
+          <p:cNvPr id="8" name="Shape 6"/>
           <p:cNvSpPr/>
           <p:nvPr/>
         </p:nvSpPr>
         <p:spPr>
           <a:xfrm>
-            <a:off x="6263640" y="1828800"/>
-            <a:ext cx="5257800" cy="1965960"/>
+            <a:off x="6172200" y="1737360"/>
+            <a:ext cx="5257800" cy="1645920"/>
           </a:xfrm>
           <a:prstGeom prst="roundRect">
             <a:avLst>
-              <a:gd name="adj" fmla="val 3721"/>
+              <a:gd name="adj" fmla="val 4444"/>
             </a:avLst>
           </a:prstGeom>
           <a:solidFill>
@@ -6452,14 +7054,95 @@
       </p:sp>
       <p:sp>
         <p:nvSpPr>
-          <p:cNvPr id="8" name="Shape 6"/>
+          <p:cNvPr id="9" name="Text 7"/>
+          <p:cNvSpPr txBox="1"/>
+          <p:nvPr/>
+        </p:nvSpPr>
+        <p:spPr>
+          <a:xfrm>
+            <a:off x="6492240" y="1883664"/>
+            <a:ext cx="4480560" cy="274320"/>
+          </a:xfrm>
+          <a:prstGeom prst="rect">
+            <a:avLst/>
+          </a:prstGeom>
+          <a:noFill/>
+          <a:ln/>
+        </p:spPr>
+        <p:txBody>
+          <a:bodyPr wrap="square" lIns="0" tIns="0" rIns="0" bIns="0" rtlCol="0" anchor="ctr"/>
+          <a:lstStyle/>
+          <a:p>
+            <a:pPr indent="0" marL="0">
+              <a:buNone/>
+            </a:pPr>
+            <a:r>
+              <a:rPr lang="en-US" sz="1400" b="1" spc="100" kern="0" dirty="0">
+                <a:solidFill>
+                  <a:srgbClr val="5B3A4A"/>
+                </a:solidFill>
+                <a:latin typeface="Calibri" pitchFamily="34" charset="0"/>
+                <a:ea typeface="Calibri" pitchFamily="34" charset="-122"/>
+                <a:cs typeface="Calibri" pitchFamily="34" charset="-120"/>
+              </a:rPr>
+              <a:t>ROOT CAUSE</a:t>
+            </a:r>
+            <a:endParaRPr lang="en-US" sz="1400" dirty="0"/>
+          </a:p>
+        </p:txBody>
+      </p:sp>
+      <p:sp>
+        <p:nvSpPr>
+          <p:cNvPr id="10" name="Text 8"/>
+          <p:cNvSpPr txBox="1"/>
+          <p:nvPr/>
+        </p:nvSpPr>
+        <p:spPr>
+          <a:xfrm>
+            <a:off x="6492240" y="2194560"/>
+            <a:ext cx="4663440" cy="1051560"/>
+          </a:xfrm>
+          <a:prstGeom prst="rect">
+            <a:avLst/>
+          </a:prstGeom>
+          <a:noFill/>
+          <a:ln/>
+        </p:spPr>
+        <p:txBody>
+          <a:bodyPr wrap="square" lIns="0" tIns="0" rIns="0" bIns="0" rtlCol="0" anchor="ctr"/>
+          <a:lstStyle/>
+          <a:p>
+            <a:pPr indent="0" marL="0">
+              <a:lnSpc>
+                <a:spcPct val="110000"/>
+              </a:lnSpc>
+              <a:buNone/>
+            </a:pPr>
+            <a:r>
+              <a:rPr lang="en-US" sz="1400" dirty="0">
+                <a:solidFill>
+                  <a:srgbClr val="3A342E"/>
+                </a:solidFill>
+                <a:latin typeface="Calibri" pitchFamily="34" charset="0"/>
+                <a:ea typeface="Calibri" pitchFamily="34" charset="-122"/>
+                <a:cs typeface="Calibri" pitchFamily="34" charset="-120"/>
+              </a:rPr>
+              <a:t>Not disinterest. A specific, often-nameable uncertainty sits between saving and buying — today's wishlist gives no help resolving it.</a:t>
+            </a:r>
+            <a:endParaRPr lang="en-US" sz="1400" dirty="0"/>
+          </a:p>
+        </p:txBody>
+      </p:sp>
+      <p:sp>
+        <p:nvSpPr>
+          <p:cNvPr id="11" name="Shape 9"/>
           <p:cNvSpPr/>
           <p:nvPr/>
         </p:nvSpPr>
         <p:spPr>
           <a:xfrm>
-            <a:off x="6537960" y="2048256"/>
-            <a:ext cx="146304" cy="146304"/>
+            <a:off x="11018520" y="1856232"/>
+            <a:ext cx="292608" cy="292608"/>
           </a:xfrm>
           <a:prstGeom prst="ellipse">
             <a:avLst/>
@@ -6472,38 +7155,38 @@
       </p:sp>
       <p:sp>
         <p:nvSpPr>
-          <p:cNvPr id="9" name="Text 7"/>
-          <p:cNvSpPr txBox="1"/>
-          <p:nvPr/>
-        </p:nvSpPr>
-        <p:spPr>
-          <a:xfrm>
-            <a:off x="6793992" y="2011680"/>
-            <a:ext cx="4480560" cy="274320"/>
-          </a:xfrm>
-          <a:prstGeom prst="rect">
-            <a:avLst/>
-          </a:prstGeom>
-          <a:noFill/>
-          <a:ln/>
-        </p:spPr>
-        <p:txBody>
-          <a:bodyPr wrap="square" lIns="0" tIns="0" rIns="0" bIns="0" rtlCol="0" anchor="ctr"/>
-          <a:lstStyle/>
-          <a:p>
-            <a:pPr indent="0" marL="0">
-              <a:buNone/>
-            </a:pPr>
-            <a:r>
-              <a:rPr lang="en-US" sz="1400" b="1" spc="100" kern="0" dirty="0">
-                <a:solidFill>
-                  <a:srgbClr val="5B3A4A"/>
-                </a:solidFill>
-                <a:latin typeface="Calibri" pitchFamily="34" charset="0"/>
-                <a:ea typeface="Calibri" pitchFamily="34" charset="-122"/>
-                <a:cs typeface="Calibri" pitchFamily="34" charset="-120"/>
-              </a:rPr>
-              <a:t>ROOT CAUSE</a:t>
+          <p:cNvPr id="12" name="Text 10"/>
+          <p:cNvSpPr txBox="1"/>
+          <p:nvPr/>
+        </p:nvSpPr>
+        <p:spPr>
+          <a:xfrm>
+            <a:off x="11018520" y="1856232"/>
+            <a:ext cx="292608" cy="292608"/>
+          </a:xfrm>
+          <a:prstGeom prst="rect">
+            <a:avLst/>
+          </a:prstGeom>
+          <a:noFill/>
+          <a:ln/>
+        </p:spPr>
+        <p:txBody>
+          <a:bodyPr wrap="square" lIns="0" tIns="0" rIns="0" bIns="0" rtlCol="0" anchor="ctr"/>
+          <a:lstStyle/>
+          <a:p>
+            <a:pPr algn="ctr" indent="0" marL="0">
+              <a:buNone/>
+            </a:pPr>
+            <a:r>
+              <a:rPr lang="en-US" sz="1400" b="1" dirty="0">
+                <a:solidFill>
+                  <a:srgbClr val="FFFFFF"/>
+                </a:solidFill>
+                <a:latin typeface="Calibri" pitchFamily="34" charset="0"/>
+                <a:ea typeface="Calibri" pitchFamily="34" charset="-122"/>
+                <a:cs typeface="Calibri" pitchFamily="34" charset="-120"/>
+              </a:rPr>
+              <a:t>2</a:t>
             </a:r>
             <a:endParaRPr lang="en-US" sz="1400" dirty="0"/>
           </a:p>
@@ -6511,60 +7194,18 @@
       </p:sp>
       <p:sp>
         <p:nvSpPr>
-          <p:cNvPr id="10" name="Text 8"/>
-          <p:cNvSpPr txBox="1"/>
-          <p:nvPr/>
-        </p:nvSpPr>
-        <p:spPr>
-          <a:xfrm>
-            <a:off x="6583680" y="2377440"/>
-            <a:ext cx="4663440" cy="1234440"/>
-          </a:xfrm>
-          <a:prstGeom prst="rect">
-            <a:avLst/>
-          </a:prstGeom>
-          <a:noFill/>
-          <a:ln/>
-        </p:spPr>
-        <p:txBody>
-          <a:bodyPr wrap="square" lIns="0" tIns="0" rIns="0" bIns="0" rtlCol="0" anchor="ctr"/>
-          <a:lstStyle/>
-          <a:p>
-            <a:pPr indent="0" marL="0">
-              <a:lnSpc>
-                <a:spcPct val="120000"/>
-              </a:lnSpc>
-              <a:buNone/>
-            </a:pPr>
-            <a:r>
-              <a:rPr lang="en-US" sz="1400" dirty="0">
-                <a:solidFill>
-                  <a:srgbClr val="3A342E"/>
-                </a:solidFill>
-                <a:latin typeface="Calibri" pitchFamily="34" charset="0"/>
-                <a:ea typeface="Calibri" pitchFamily="34" charset="-122"/>
-                <a:cs typeface="Calibri" pitchFamily="34" charset="-120"/>
-              </a:rPr>
-              <a:t>Not disinterest. A specific, often-nameable uncertainty sits between saving and buying — and today's wishlist gives the user no help resolving it.</a:t>
-            </a:r>
-            <a:endParaRPr lang="en-US" sz="1400" dirty="0"/>
-          </a:p>
-        </p:txBody>
-      </p:sp>
-      <p:sp>
-        <p:nvSpPr>
-          <p:cNvPr id="11" name="Shape 9"/>
+          <p:cNvPr id="13" name="Shape 11"/>
           <p:cNvSpPr/>
           <p:nvPr/>
         </p:nvSpPr>
         <p:spPr>
           <a:xfrm>
-            <a:off x="640080" y="4069080"/>
-            <a:ext cx="5257800" cy="1965960"/>
+            <a:off x="640080" y="3566160"/>
+            <a:ext cx="5257800" cy="1645920"/>
           </a:xfrm>
           <a:prstGeom prst="roundRect">
             <a:avLst>
-              <a:gd name="adj" fmla="val 3721"/>
+              <a:gd name="adj" fmla="val 4444"/>
             </a:avLst>
           </a:prstGeom>
           <a:solidFill>
@@ -6580,14 +7221,95 @@
       </p:sp>
       <p:sp>
         <p:nvSpPr>
-          <p:cNvPr id="12" name="Shape 10"/>
+          <p:cNvPr id="14" name="Text 12"/>
+          <p:cNvSpPr txBox="1"/>
+          <p:nvPr/>
+        </p:nvSpPr>
+        <p:spPr>
+          <a:xfrm>
+            <a:off x="960120" y="3712464"/>
+            <a:ext cx="4480560" cy="274320"/>
+          </a:xfrm>
+          <a:prstGeom prst="rect">
+            <a:avLst/>
+          </a:prstGeom>
+          <a:noFill/>
+          <a:ln/>
+        </p:spPr>
+        <p:txBody>
+          <a:bodyPr wrap="square" lIns="0" tIns="0" rIns="0" bIns="0" rtlCol="0" anchor="ctr"/>
+          <a:lstStyle/>
+          <a:p>
+            <a:pPr indent="0" marL="0">
+              <a:buNone/>
+            </a:pPr>
+            <a:r>
+              <a:rPr lang="en-US" sz="1400" b="1" spc="100" kern="0" dirty="0">
+                <a:solidFill>
+                  <a:srgbClr val="B5822A"/>
+                </a:solidFill>
+                <a:latin typeface="Calibri" pitchFamily="34" charset="0"/>
+                <a:ea typeface="Calibri" pitchFamily="34" charset="-122"/>
+                <a:cs typeface="Calibri" pitchFamily="34" charset="-120"/>
+              </a:rPr>
+              <a:t>OBSERVED WORKAROUND</a:t>
+            </a:r>
+            <a:endParaRPr lang="en-US" sz="1400" dirty="0"/>
+          </a:p>
+        </p:txBody>
+      </p:sp>
+      <p:sp>
+        <p:nvSpPr>
+          <p:cNvPr id="15" name="Text 13"/>
+          <p:cNvSpPr txBox="1"/>
+          <p:nvPr/>
+        </p:nvSpPr>
+        <p:spPr>
+          <a:xfrm>
+            <a:off x="960120" y="4023360"/>
+            <a:ext cx="4663440" cy="1051560"/>
+          </a:xfrm>
+          <a:prstGeom prst="rect">
+            <a:avLst/>
+          </a:prstGeom>
+          <a:noFill/>
+          <a:ln/>
+        </p:spPr>
+        <p:txBody>
+          <a:bodyPr wrap="square" lIns="0" tIns="0" rIns="0" bIns="0" rtlCol="0" anchor="ctr"/>
+          <a:lstStyle/>
+          <a:p>
+            <a:pPr indent="0" marL="0">
+              <a:lnSpc>
+                <a:spcPct val="110000"/>
+              </a:lnSpc>
+              <a:buNone/>
+            </a:pPr>
+            <a:r>
+              <a:rPr lang="en-US" sz="1400" dirty="0">
+                <a:solidFill>
+                  <a:srgbClr val="3A342E"/>
+                </a:solidFill>
+                <a:latin typeface="Calibri" pitchFamily="34" charset="0"/>
+                <a:ea typeface="Calibri" pitchFamily="34" charset="-122"/>
+                <a:cs typeface="Calibri" pitchFamily="34" charset="-120"/>
+              </a:rPr>
+              <a:t>Users already compensate manually: cross-platform price/review checks, substitute purchases, rushed decisions after a stock-out scare.</a:t>
+            </a:r>
+            <a:endParaRPr lang="en-US" sz="1400" dirty="0"/>
+          </a:p>
+        </p:txBody>
+      </p:sp>
+      <p:sp>
+        <p:nvSpPr>
+          <p:cNvPr id="16" name="Shape 14"/>
           <p:cNvSpPr/>
           <p:nvPr/>
         </p:nvSpPr>
         <p:spPr>
           <a:xfrm>
-            <a:off x="914400" y="4288536"/>
-            <a:ext cx="146304" cy="146304"/>
+            <a:off x="5486400" y="3685032"/>
+            <a:ext cx="292608" cy="292608"/>
           </a:xfrm>
           <a:prstGeom prst="ellipse">
             <a:avLst/>
@@ -6600,38 +7322,38 @@
       </p:sp>
       <p:sp>
         <p:nvSpPr>
-          <p:cNvPr id="13" name="Text 11"/>
-          <p:cNvSpPr txBox="1"/>
-          <p:nvPr/>
-        </p:nvSpPr>
-        <p:spPr>
-          <a:xfrm>
-            <a:off x="1170432" y="4251960"/>
-            <a:ext cx="4480560" cy="274320"/>
-          </a:xfrm>
-          <a:prstGeom prst="rect">
-            <a:avLst/>
-          </a:prstGeom>
-          <a:noFill/>
-          <a:ln/>
-        </p:spPr>
-        <p:txBody>
-          <a:bodyPr wrap="square" lIns="0" tIns="0" rIns="0" bIns="0" rtlCol="0" anchor="ctr"/>
-          <a:lstStyle/>
-          <a:p>
-            <a:pPr indent="0" marL="0">
-              <a:buNone/>
-            </a:pPr>
-            <a:r>
-              <a:rPr lang="en-US" sz="1400" b="1" spc="100" kern="0" dirty="0">
-                <a:solidFill>
-                  <a:srgbClr val="B5822A"/>
-                </a:solidFill>
-                <a:latin typeface="Calibri" pitchFamily="34" charset="0"/>
-                <a:ea typeface="Calibri" pitchFamily="34" charset="-122"/>
-                <a:cs typeface="Calibri" pitchFamily="34" charset="-120"/>
-              </a:rPr>
-              <a:t>OBSERVED WORKAROUND</a:t>
+          <p:cNvPr id="17" name="Text 15"/>
+          <p:cNvSpPr txBox="1"/>
+          <p:nvPr/>
+        </p:nvSpPr>
+        <p:spPr>
+          <a:xfrm>
+            <a:off x="5486400" y="3685032"/>
+            <a:ext cx="292608" cy="292608"/>
+          </a:xfrm>
+          <a:prstGeom prst="rect">
+            <a:avLst/>
+          </a:prstGeom>
+          <a:noFill/>
+          <a:ln/>
+        </p:spPr>
+        <p:txBody>
+          <a:bodyPr wrap="square" lIns="0" tIns="0" rIns="0" bIns="0" rtlCol="0" anchor="ctr"/>
+          <a:lstStyle/>
+          <a:p>
+            <a:pPr algn="ctr" indent="0" marL="0">
+              <a:buNone/>
+            </a:pPr>
+            <a:r>
+              <a:rPr lang="en-US" sz="1400" b="1" dirty="0">
+                <a:solidFill>
+                  <a:srgbClr val="FFFFFF"/>
+                </a:solidFill>
+                <a:latin typeface="Calibri" pitchFamily="34" charset="0"/>
+                <a:ea typeface="Calibri" pitchFamily="34" charset="-122"/>
+                <a:cs typeface="Calibri" pitchFamily="34" charset="-120"/>
+              </a:rPr>
+              <a:t>3</a:t>
             </a:r>
             <a:endParaRPr lang="en-US" sz="1400" dirty="0"/>
           </a:p>
@@ -6639,60 +7361,18 @@
       </p:sp>
       <p:sp>
         <p:nvSpPr>
-          <p:cNvPr id="14" name="Text 12"/>
-          <p:cNvSpPr txBox="1"/>
-          <p:nvPr/>
-        </p:nvSpPr>
-        <p:spPr>
-          <a:xfrm>
-            <a:off x="960120" y="4617720"/>
-            <a:ext cx="4663440" cy="1234440"/>
-          </a:xfrm>
-          <a:prstGeom prst="rect">
-            <a:avLst/>
-          </a:prstGeom>
-          <a:noFill/>
-          <a:ln/>
-        </p:spPr>
-        <p:txBody>
-          <a:bodyPr wrap="square" lIns="0" tIns="0" rIns="0" bIns="0" rtlCol="0" anchor="ctr"/>
-          <a:lstStyle/>
-          <a:p>
-            <a:pPr indent="0" marL="0">
-              <a:lnSpc>
-                <a:spcPct val="120000"/>
-              </a:lnSpc>
-              <a:buNone/>
-            </a:pPr>
-            <a:r>
-              <a:rPr lang="en-US" sz="1400" dirty="0">
-                <a:solidFill>
-                  <a:srgbClr val="3A342E"/>
-                </a:solidFill>
-                <a:latin typeface="Calibri" pitchFamily="34" charset="0"/>
-                <a:ea typeface="Calibri" pitchFamily="34" charset="-122"/>
-                <a:cs typeface="Calibri" pitchFamily="34" charset="-120"/>
-              </a:rPr>
-              <a:t>Users already compensate manually: cross-platform price/review checks, substitute purchases, and rushed decisions after a stock-out scare.</a:t>
-            </a:r>
-            <a:endParaRPr lang="en-US" sz="1400" dirty="0"/>
-          </a:p>
-        </p:txBody>
-      </p:sp>
-      <p:sp>
-        <p:nvSpPr>
-          <p:cNvPr id="15" name="Shape 13"/>
+          <p:cNvPr id="18" name="Shape 16"/>
           <p:cNvSpPr/>
           <p:nvPr/>
         </p:nvSpPr>
         <p:spPr>
           <a:xfrm>
-            <a:off x="6263640" y="4069080"/>
-            <a:ext cx="5257800" cy="1965960"/>
+            <a:off x="6172200" y="3566160"/>
+            <a:ext cx="5257800" cy="1645920"/>
           </a:xfrm>
           <a:prstGeom prst="roundRect">
             <a:avLst>
-              <a:gd name="adj" fmla="val 3721"/>
+              <a:gd name="adj" fmla="val 4444"/>
             </a:avLst>
           </a:prstGeom>
           <a:solidFill>
@@ -6708,14 +7388,95 @@
       </p:sp>
       <p:sp>
         <p:nvSpPr>
-          <p:cNvPr id="16" name="Shape 14"/>
+          <p:cNvPr id="19" name="Text 17"/>
+          <p:cNvSpPr txBox="1"/>
+          <p:nvPr/>
+        </p:nvSpPr>
+        <p:spPr>
+          <a:xfrm>
+            <a:off x="6492240" y="3712464"/>
+            <a:ext cx="4480560" cy="274320"/>
+          </a:xfrm>
+          <a:prstGeom prst="rect">
+            <a:avLst/>
+          </a:prstGeom>
+          <a:noFill/>
+          <a:ln/>
+        </p:spPr>
+        <p:txBody>
+          <a:bodyPr wrap="square" lIns="0" tIns="0" rIns="0" bIns="0" rtlCol="0" anchor="ctr"/>
+          <a:lstStyle/>
+          <a:p>
+            <a:pPr indent="0" marL="0">
+              <a:buNone/>
+            </a:pPr>
+            <a:r>
+              <a:rPr lang="en-US" sz="1400" b="1" spc="100" kern="0" dirty="0">
+                <a:solidFill>
+                  <a:srgbClr val="B5822A"/>
+                </a:solidFill>
+                <a:latin typeface="Calibri" pitchFamily="34" charset="0"/>
+                <a:ea typeface="Calibri" pitchFamily="34" charset="-122"/>
+                <a:cs typeface="Calibri" pitchFamily="34" charset="-120"/>
+              </a:rPr>
+              <a:t>WHY IT MATTERS</a:t>
+            </a:r>
+            <a:endParaRPr lang="en-US" sz="1400" dirty="0"/>
+          </a:p>
+        </p:txBody>
+      </p:sp>
+      <p:sp>
+        <p:nvSpPr>
+          <p:cNvPr id="20" name="Text 18"/>
+          <p:cNvSpPr txBox="1"/>
+          <p:nvPr/>
+        </p:nvSpPr>
+        <p:spPr>
+          <a:xfrm>
+            <a:off x="6492240" y="4023360"/>
+            <a:ext cx="4663440" cy="1051560"/>
+          </a:xfrm>
+          <a:prstGeom prst="rect">
+            <a:avLst/>
+          </a:prstGeom>
+          <a:noFill/>
+          <a:ln/>
+        </p:spPr>
+        <p:txBody>
+          <a:bodyPr wrap="square" lIns="0" tIns="0" rIns="0" bIns="0" rtlCol="0" anchor="ctr"/>
+          <a:lstStyle/>
+          <a:p>
+            <a:pPr indent="0" marL="0">
+              <a:lnSpc>
+                <a:spcPct val="110000"/>
+              </a:lnSpc>
+              <a:buNone/>
+            </a:pPr>
+            <a:r>
+              <a:rPr lang="en-US" sz="1400" dirty="0">
+                <a:solidFill>
+                  <a:srgbClr val="3A342E"/>
+                </a:solidFill>
+                <a:latin typeface="Calibri" pitchFamily="34" charset="0"/>
+                <a:ea typeface="Calibri" pitchFamily="34" charset="-122"/>
+                <a:cs typeface="Calibri" pitchFamily="34" charset="-120"/>
+              </a:rPr>
+              <a:t>User: less regret, less re-research effort. Business: converts demand that's already explicit and already on the platform — no acquisition cost.</a:t>
+            </a:r>
+            <a:endParaRPr lang="en-US" sz="1400" dirty="0"/>
+          </a:p>
+        </p:txBody>
+      </p:sp>
+      <p:sp>
+        <p:nvSpPr>
+          <p:cNvPr id="21" name="Shape 19"/>
           <p:cNvSpPr/>
           <p:nvPr/>
         </p:nvSpPr>
         <p:spPr>
           <a:xfrm>
-            <a:off x="6537960" y="4288536"/>
-            <a:ext cx="146304" cy="146304"/>
+            <a:off x="11018520" y="3685032"/>
+            <a:ext cx="292608" cy="292608"/>
           </a:xfrm>
           <a:prstGeom prst="ellipse">
             <a:avLst/>
@@ -6728,38 +7489,38 @@
       </p:sp>
       <p:sp>
         <p:nvSpPr>
-          <p:cNvPr id="17" name="Text 15"/>
-          <p:cNvSpPr txBox="1"/>
-          <p:nvPr/>
-        </p:nvSpPr>
-        <p:spPr>
-          <a:xfrm>
-            <a:off x="6793992" y="4251960"/>
-            <a:ext cx="4480560" cy="274320"/>
-          </a:xfrm>
-          <a:prstGeom prst="rect">
-            <a:avLst/>
-          </a:prstGeom>
-          <a:noFill/>
-          <a:ln/>
-        </p:spPr>
-        <p:txBody>
-          <a:bodyPr wrap="square" lIns="0" tIns="0" rIns="0" bIns="0" rtlCol="0" anchor="ctr"/>
-          <a:lstStyle/>
-          <a:p>
-            <a:pPr indent="0" marL="0">
-              <a:buNone/>
-            </a:pPr>
-            <a:r>
-              <a:rPr lang="en-US" sz="1400" b="1" spc="100" kern="0" dirty="0">
-                <a:solidFill>
-                  <a:srgbClr val="B5822A"/>
-                </a:solidFill>
-                <a:latin typeface="Calibri" pitchFamily="34" charset="0"/>
-                <a:ea typeface="Calibri" pitchFamily="34" charset="-122"/>
-                <a:cs typeface="Calibri" pitchFamily="34" charset="-120"/>
-              </a:rPr>
-              <a:t>WHY IT MATTERS</a:t>
+          <p:cNvPr id="22" name="Text 20"/>
+          <p:cNvSpPr txBox="1"/>
+          <p:nvPr/>
+        </p:nvSpPr>
+        <p:spPr>
+          <a:xfrm>
+            <a:off x="11018520" y="3685032"/>
+            <a:ext cx="292608" cy="292608"/>
+          </a:xfrm>
+          <a:prstGeom prst="rect">
+            <a:avLst/>
+          </a:prstGeom>
+          <a:noFill/>
+          <a:ln/>
+        </p:spPr>
+        <p:txBody>
+          <a:bodyPr wrap="square" lIns="0" tIns="0" rIns="0" bIns="0" rtlCol="0" anchor="ctr"/>
+          <a:lstStyle/>
+          <a:p>
+            <a:pPr algn="ctr" indent="0" marL="0">
+              <a:buNone/>
+            </a:pPr>
+            <a:r>
+              <a:rPr lang="en-US" sz="1400" b="1" dirty="0">
+                <a:solidFill>
+                  <a:srgbClr val="FFFFFF"/>
+                </a:solidFill>
+                <a:latin typeface="Calibri" pitchFamily="34" charset="0"/>
+                <a:ea typeface="Calibri" pitchFamily="34" charset="-122"/>
+                <a:cs typeface="Calibri" pitchFamily="34" charset="-120"/>
+              </a:rPr>
+              <a:t>4</a:t>
             </a:r>
             <a:endParaRPr lang="en-US" sz="1400" dirty="0"/>
           </a:p>
@@ -6767,14 +7528,14 @@
       </p:sp>
       <p:sp>
         <p:nvSpPr>
-          <p:cNvPr id="18" name="Text 16"/>
-          <p:cNvSpPr txBox="1"/>
-          <p:nvPr/>
-        </p:nvSpPr>
-        <p:spPr>
-          <a:xfrm>
-            <a:off x="6583680" y="4617720"/>
-            <a:ext cx="4663440" cy="1234440"/>
+          <p:cNvPr id="23" name="Text 21"/>
+          <p:cNvSpPr txBox="1"/>
+          <p:nvPr/>
+        </p:nvSpPr>
+        <p:spPr>
+          <a:xfrm>
+            <a:off x="640080" y="5532120"/>
+            <a:ext cx="10515600" cy="685800"/>
           </a:xfrm>
           <a:prstGeom prst="rect">
             <a:avLst/>
@@ -6788,20 +7549,20 @@
           <a:p>
             <a:pPr indent="0" marL="0">
               <a:lnSpc>
-                <a:spcPct val="120000"/>
+                <a:spcPct val="108000"/>
               </a:lnSpc>
               <a:buNone/>
             </a:pPr>
             <a:r>
-              <a:rPr lang="en-US" sz="1400" dirty="0">
-                <a:solidFill>
-                  <a:srgbClr val="3A342E"/>
-                </a:solidFill>
-                <a:latin typeface="Calibri" pitchFamily="34" charset="0"/>
-                <a:ea typeface="Calibri" pitchFamily="34" charset="-122"/>
-                <a:cs typeface="Calibri" pitchFamily="34" charset="-120"/>
-              </a:rPr>
-              <a:t>User: less regret, less re-research effort. Business: converts demand that's already explicit and already on the platform — no acquisition cost.</a:t>
+              <a:rPr lang="en-US" sz="1400" i="1" dirty="0">
+                <a:solidFill>
+                  <a:srgbClr val="8A8078"/>
+                </a:solidFill>
+                <a:latin typeface="Calibri" pitchFamily="34" charset="0"/>
+                <a:ea typeface="Calibri" pitchFamily="34" charset="-122"/>
+                <a:cs typeface="Calibri" pitchFamily="34" charset="-120"/>
+              </a:rPr>
+              <a:t>Process note: the brief's kill-criteria single-segment selection could not be run — no segment-tagged corpus data exists, and building it risked reopening the frozen gold set or inferring segments never observed. Full reasoning: docs/decisions/opportunity-selection.md</a:t>
             </a:r>
             <a:endParaRPr lang="en-US" sz="1400" dirty="0"/>
           </a:p>
@@ -6809,7 +7570,7 @@
       </p:sp>
       <p:sp>
         <p:nvSpPr>
-          <p:cNvPr id="19" name="Text 17"/>
+          <p:cNvPr id="24" name="Text 22"/>
           <p:cNvSpPr txBox="1"/>
           <p:nvPr/>
         </p:nvSpPr>
@@ -6848,7 +7609,7 @@
       </p:sp>
       <p:sp>
         <p:nvSpPr>
-          <p:cNvPr id="20" name="Text 18"/>
+          <p:cNvPr id="25" name="Text 23"/>
           <p:cNvSpPr txBox="1"/>
           <p:nvPr/>
         </p:nvSpPr>
@@ -6968,7 +7729,7 @@
         <p:spPr>
           <a:xfrm>
             <a:off x="640080" y="1554480"/>
-            <a:ext cx="10515600" cy="457200"/>
+            <a:ext cx="10515600" cy="411480"/>
           </a:xfrm>
           <a:prstGeom prst="rect">
             <a:avLst/>
@@ -7006,12 +7767,12 @@
         </p:nvSpPr>
         <p:spPr>
           <a:xfrm>
-            <a:off x="640080" y="2331720"/>
-            <a:ext cx="3429000" cy="3200400"/>
+            <a:off x="640080" y="2148840"/>
+            <a:ext cx="3429000" cy="2880360"/>
           </a:xfrm>
           <a:prstGeom prst="roundRect">
             <a:avLst>
-              <a:gd name="adj" fmla="val 2857"/>
+              <a:gd name="adj" fmla="val 3175"/>
             </a:avLst>
           </a:prstGeom>
           <a:solidFill>
@@ -7040,8 +7801,8 @@
         </p:nvSpPr>
         <p:spPr>
           <a:xfrm>
-            <a:off x="2061972" y="2651760"/>
-            <a:ext cx="585216" cy="585216"/>
+            <a:off x="2080260" y="2423160"/>
+            <a:ext cx="548640" cy="548640"/>
           </a:xfrm>
           <a:prstGeom prst="ellipse">
             <a:avLst/>
@@ -7060,8 +7821,8 @@
         </p:nvSpPr>
         <p:spPr>
           <a:xfrm>
-            <a:off x="2061972" y="2651760"/>
-            <a:ext cx="585216" cy="585216"/>
+            <a:off x="2080260" y="2423160"/>
+            <a:ext cx="548640" cy="548640"/>
           </a:xfrm>
           <a:prstGeom prst="rect">
             <a:avLst/>
@@ -7077,7 +7838,7 @@
               <a:buNone/>
             </a:pPr>
             <a:r>
-              <a:rPr lang="en-US" sz="2000" b="1" dirty="0">
+              <a:rPr lang="en-US" sz="1900" b="1" dirty="0">
                 <a:solidFill>
                   <a:srgbClr val="F6F1EA"/>
                 </a:solidFill>
@@ -7087,7 +7848,7 @@
               </a:rPr>
               <a:t>1</a:t>
             </a:r>
-            <a:endParaRPr lang="en-US" sz="2000" dirty="0"/>
+            <a:endParaRPr lang="en-US" sz="1900" dirty="0"/>
           </a:p>
         </p:txBody>
       </p:sp>
@@ -7099,8 +7860,8 @@
         </p:nvSpPr>
         <p:spPr>
           <a:xfrm>
-            <a:off x="914400" y="3474720"/>
-            <a:ext cx="2880360" cy="640080"/>
+            <a:off x="914400" y="3172968"/>
+            <a:ext cx="2880360" cy="594360"/>
           </a:xfrm>
           <a:prstGeom prst="rect">
             <a:avLst/>
@@ -7141,8 +7902,8 @@
         </p:nvSpPr>
         <p:spPr>
           <a:xfrm>
-            <a:off x="960120" y="4114800"/>
-            <a:ext cx="2788920" cy="1280160"/>
+            <a:off x="960120" y="3776472"/>
+            <a:ext cx="2788920" cy="1188720"/>
           </a:xfrm>
           <a:prstGeom prst="rect">
             <a:avLst/>
@@ -7183,12 +7944,12 @@
         </p:nvSpPr>
         <p:spPr>
           <a:xfrm>
-            <a:off x="4251960" y="2331720"/>
-            <a:ext cx="3429000" cy="3200400"/>
+            <a:off x="4251960" y="2148840"/>
+            <a:ext cx="3429000" cy="2880360"/>
           </a:xfrm>
           <a:prstGeom prst="roundRect">
             <a:avLst>
-              <a:gd name="adj" fmla="val 2857"/>
+              <a:gd name="adj" fmla="val 3175"/>
             </a:avLst>
           </a:prstGeom>
           <a:solidFill>
@@ -7217,8 +7978,8 @@
         </p:nvSpPr>
         <p:spPr>
           <a:xfrm>
-            <a:off x="5673852" y="2651760"/>
-            <a:ext cx="585216" cy="585216"/>
+            <a:off x="5692140" y="2423160"/>
+            <a:ext cx="548640" cy="548640"/>
           </a:xfrm>
           <a:prstGeom prst="ellipse">
             <a:avLst/>
@@ -7237,8 +7998,8 @@
         </p:nvSpPr>
         <p:spPr>
           <a:xfrm>
-            <a:off x="5673852" y="2651760"/>
-            <a:ext cx="585216" cy="585216"/>
+            <a:off x="5692140" y="2423160"/>
+            <a:ext cx="548640" cy="548640"/>
           </a:xfrm>
           <a:prstGeom prst="rect">
             <a:avLst/>
@@ -7254,7 +8015,7 @@
               <a:buNone/>
             </a:pPr>
             <a:r>
-              <a:rPr lang="en-US" sz="2000" b="1" dirty="0">
+              <a:rPr lang="en-US" sz="1900" b="1" dirty="0">
                 <a:solidFill>
                   <a:srgbClr val="F6F1EA"/>
                 </a:solidFill>
@@ -7264,7 +8025,7 @@
               </a:rPr>
               <a:t>2</a:t>
             </a:r>
-            <a:endParaRPr lang="en-US" sz="2000" dirty="0"/>
+            <a:endParaRPr lang="en-US" sz="1900" dirty="0"/>
           </a:p>
         </p:txBody>
       </p:sp>
@@ -7276,8 +8037,8 @@
         </p:nvSpPr>
         <p:spPr>
           <a:xfrm>
-            <a:off x="4526280" y="3474720"/>
-            <a:ext cx="2880360" cy="640080"/>
+            <a:off x="4526280" y="3172968"/>
+            <a:ext cx="2880360" cy="594360"/>
           </a:xfrm>
           <a:prstGeom prst="rect">
             <a:avLst/>
@@ -7318,8 +8079,8 @@
         </p:nvSpPr>
         <p:spPr>
           <a:xfrm>
-            <a:off x="4572000" y="4114800"/>
-            <a:ext cx="2788920" cy="1280160"/>
+            <a:off x="4572000" y="3776472"/>
+            <a:ext cx="2788920" cy="1188720"/>
           </a:xfrm>
           <a:prstGeom prst="rect">
             <a:avLst/>
@@ -7360,12 +8121,12 @@
         </p:nvSpPr>
         <p:spPr>
           <a:xfrm>
-            <a:off x="7863840" y="2331720"/>
-            <a:ext cx="3429000" cy="3200400"/>
+            <a:off x="7863840" y="2148840"/>
+            <a:ext cx="3429000" cy="2880360"/>
           </a:xfrm>
           <a:prstGeom prst="roundRect">
             <a:avLst>
-              <a:gd name="adj" fmla="val 2857"/>
+              <a:gd name="adj" fmla="val 3175"/>
             </a:avLst>
           </a:prstGeom>
           <a:solidFill>
@@ -7394,8 +8155,8 @@
         </p:nvSpPr>
         <p:spPr>
           <a:xfrm>
-            <a:off x="9285732" y="2651760"/>
-            <a:ext cx="585216" cy="585216"/>
+            <a:off x="9304020" y="2423160"/>
+            <a:ext cx="548640" cy="548640"/>
           </a:xfrm>
           <a:prstGeom prst="ellipse">
             <a:avLst/>
@@ -7414,8 +8175,8 @@
         </p:nvSpPr>
         <p:spPr>
           <a:xfrm>
-            <a:off x="9285732" y="2651760"/>
-            <a:ext cx="585216" cy="585216"/>
+            <a:off x="9304020" y="2423160"/>
+            <a:ext cx="548640" cy="548640"/>
           </a:xfrm>
           <a:prstGeom prst="rect">
             <a:avLst/>
@@ -7431,7 +8192,7 @@
               <a:buNone/>
             </a:pPr>
             <a:r>
-              <a:rPr lang="en-US" sz="2000" b="1" dirty="0">
+              <a:rPr lang="en-US" sz="1900" b="1" dirty="0">
                 <a:solidFill>
                   <a:srgbClr val="F6F1EA"/>
                 </a:solidFill>
@@ -7441,7 +8202,7 @@
               </a:rPr>
               <a:t>3</a:t>
             </a:r>
-            <a:endParaRPr lang="en-US" sz="2000" dirty="0"/>
+            <a:endParaRPr lang="en-US" sz="1900" dirty="0"/>
           </a:p>
         </p:txBody>
       </p:sp>
@@ -7453,8 +8214,8 @@
         </p:nvSpPr>
         <p:spPr>
           <a:xfrm>
-            <a:off x="8138160" y="3474720"/>
-            <a:ext cx="2880360" cy="640080"/>
+            <a:off x="8138160" y="3172968"/>
+            <a:ext cx="2880360" cy="594360"/>
           </a:xfrm>
           <a:prstGeom prst="rect">
             <a:avLst/>
@@ -7495,8 +8256,8 @@
         </p:nvSpPr>
         <p:spPr>
           <a:xfrm>
-            <a:off x="8183880" y="4114800"/>
-            <a:ext cx="2788920" cy="1280160"/>
+            <a:off x="8183880" y="3776472"/>
+            <a:ext cx="2788920" cy="1188720"/>
           </a:xfrm>
           <a:prstGeom prst="rect">
             <a:avLst/>
@@ -7531,7 +8292,88 @@
       </p:sp>
       <p:sp>
         <p:nvSpPr>
-          <p:cNvPr id="19" name="Text 17"/>
+          <p:cNvPr id="19" name="Shape 17"/>
+          <p:cNvSpPr/>
+          <p:nvPr/>
+        </p:nvSpPr>
+        <p:spPr>
+          <a:xfrm>
+            <a:off x="640080" y="5212080"/>
+            <a:ext cx="10881360" cy="685800"/>
+          </a:xfrm>
+          <a:prstGeom prst="roundRect">
+            <a:avLst>
+              <a:gd name="adj" fmla="val 10667"/>
+            </a:avLst>
+          </a:prstGeom>
+          <a:solidFill>
+            <a:srgbClr val="EFE6D8"/>
+          </a:solidFill>
+          <a:ln/>
+        </p:spPr>
+      </p:sp>
+      <p:sp>
+        <p:nvSpPr>
+          <p:cNvPr id="20" name="Text 18"/>
+          <p:cNvSpPr txBox="1"/>
+          <p:nvPr/>
+        </p:nvSpPr>
+        <p:spPr>
+          <a:xfrm>
+            <a:off x="868680" y="5212080"/>
+            <a:ext cx="10424160" cy="685800"/>
+          </a:xfrm>
+          <a:prstGeom prst="rect">
+            <a:avLst/>
+          </a:prstGeom>
+          <a:noFill/>
+          <a:ln/>
+        </p:spPr>
+        <p:txBody>
+          <a:bodyPr wrap="square" lIns="0" tIns="0" rIns="0" bIns="0" rtlCol="0" anchor="ctr"/>
+          <a:lstStyle/>
+          <a:p>
+            <a:pPr indent="0" marL="0">
+              <a:lnSpc>
+                <a:spcPct val="115000"/>
+              </a:lnSpc>
+              <a:buNone/>
+            </a:pPr>
+            <a:r>
+              <a:rPr lang="en-US" sz="1400" b="1" dirty="0">
+                <a:solidFill>
+                  <a:srgbClr val="5B3A4A"/>
+                </a:solidFill>
+                <a:latin typeface="Calibri" pitchFamily="34" charset="0"/>
+                <a:ea typeface="Calibri" pitchFamily="34" charset="-122"/>
+                <a:cs typeface="Calibri" pitchFamily="34" charset="-120"/>
+              </a:rPr>
+              <a:t>Also reachable — </a:t>
+            </a:r>
+            <a:pPr indent="0" marL="0">
+              <a:lnSpc>
+                <a:spcPct val="115000"/>
+              </a:lnSpc>
+              <a:buNone/>
+            </a:pPr>
+            <a:r>
+              <a:rPr lang="en-US" sz="1400" dirty="0">
+                <a:solidFill>
+                  <a:srgbClr val="211D1B"/>
+                </a:solidFill>
+                <a:latin typeface="Calibri" pitchFamily="34" charset="0"/>
+                <a:ea typeface="Calibri" pitchFamily="34" charset="-122"/>
+                <a:cs typeface="Calibri" pitchFamily="34" charset="-120"/>
+              </a:rPr>
+              <a:t>Compare Similar (a real side-by-side against another saved item, never shown empty) and Alternatives (secondary browse, substitutes tied to existing wishlist items). Same 3 rules apply: honest CTAs only — Save / Compare / Move to cart, no "Buy Now" anywhere.</a:t>
+            </a:r>
+            <a:endParaRPr lang="en-US" sz="1400" dirty="0"/>
+          </a:p>
+        </p:txBody>
+      </p:sp>
+      <p:sp>
+        <p:nvSpPr>
+          <p:cNvPr id="21" name="Text 19"/>
           <p:cNvSpPr txBox="1"/>
           <p:nvPr/>
         </p:nvSpPr>
@@ -7570,7 +8412,7 @@
       </p:sp>
       <p:sp>
         <p:nvSpPr>
-          <p:cNvPr id="20" name="Text 18"/>
+          <p:cNvPr id="22" name="Text 20"/>
           <p:cNvSpPr txBox="1"/>
           <p:nvPr/>
         </p:nvSpPr>
@@ -7648,7 +8490,7 @@
         <p:spPr>
           <a:xfrm>
             <a:off x="640080" y="457200"/>
-            <a:ext cx="10911535" cy="1051560"/>
+            <a:ext cx="10911535" cy="777240"/>
           </a:xfrm>
           <a:prstGeom prst="rect">
             <a:avLst/>
@@ -7689,35 +8531,53 @@
         </p:nvSpPr>
         <p:spPr>
           <a:xfrm>
-            <a:off x="640080" y="1783080"/>
-            <a:ext cx="2468880" cy="1188720"/>
+            <a:off x="1903324" y="1362456"/>
+            <a:ext cx="1801368" cy="2670048"/>
           </a:xfrm>
           <a:prstGeom prst="roundRect">
             <a:avLst>
-              <a:gd name="adj" fmla="val 6154"/>
+              <a:gd name="adj" fmla="val 7107"/>
             </a:avLst>
           </a:prstGeom>
           <a:solidFill>
-            <a:srgbClr val="FFFFFF"/>
+            <a:srgbClr val="211D1B"/>
           </a:solidFill>
-          <a:ln w="12700">
-            <a:solidFill>
-              <a:srgbClr val="E3D9CB"/>
-            </a:solidFill>
-            <a:prstDash val="solid"/>
-          </a:ln>
-        </p:spPr>
-      </p:sp>
-      <p:sp>
-        <p:nvSpPr>
-          <p:cNvPr id="4" name="Text 2"/>
-          <p:cNvSpPr txBox="1"/>
-          <p:nvPr/>
-        </p:nvSpPr>
-        <p:spPr>
-          <a:xfrm>
-            <a:off x="777240" y="1783080"/>
-            <a:ext cx="2194560" cy="1188720"/>
+          <a:ln/>
+        </p:spPr>
+      </p:sp>
+      <p:pic>
+        <p:nvPicPr>
+          <p:cNvPr id="4" name="Image 0" descr="C:\Users\sanka\Documents\Projects\NL-Myntra Graduation Project\docs\deck-assets\01-persona-picker-expanded.png">    </p:cNvPr>
+          <p:cNvPicPr>
+            <a:picLocks noChangeAspect="1"/>
+          </p:cNvPicPr>
+          <p:nvPr/>
+        </p:nvPicPr>
+        <p:blipFill>
+          <a:blip r:embed="rId1"/>
+          <a:srcRect l="0" r="0" t="0" b="0"/>
+          <a:stretch/>
+        </p:blipFill>
+        <p:spPr>
+          <a:xfrm>
+            <a:off x="1958188" y="1417320"/>
+            <a:ext cx="1691640" cy="2560320"/>
+          </a:xfrm>
+          <a:prstGeom prst="rect">
+            <a:avLst/>
+          </a:prstGeom>
+        </p:spPr>
+      </p:pic>
+      <p:sp>
+        <p:nvSpPr>
+          <p:cNvPr id="5" name="Text 2"/>
+          <p:cNvSpPr txBox="1"/>
+          <p:nvPr/>
+        </p:nvSpPr>
+        <p:spPr>
+          <a:xfrm>
+            <a:off x="1729588" y="4069080"/>
+            <a:ext cx="2148840" cy="384048"/>
           </a:xfrm>
           <a:prstGeom prst="rect">
             <a:avLst/>
@@ -7730,6 +8590,9 @@
           <a:lstStyle/>
           <a:p>
             <a:pPr algn="ctr" indent="0" marL="0">
+              <a:lnSpc>
+                <a:spcPct val="105000"/>
+              </a:lnSpc>
               <a:buNone/>
             </a:pPr>
             <a:r>
@@ -7749,14 +8612,14 @@
       </p:sp>
       <p:sp>
         <p:nvSpPr>
-          <p:cNvPr id="5" name="Text 3"/>
-          <p:cNvSpPr txBox="1"/>
-          <p:nvPr/>
-        </p:nvSpPr>
-        <p:spPr>
-          <a:xfrm>
-            <a:off x="3108960" y="1783080"/>
-            <a:ext cx="246888" cy="1188720"/>
+          <p:cNvPr id="6" name="Text 3"/>
+          <p:cNvSpPr txBox="1"/>
+          <p:nvPr/>
+        </p:nvSpPr>
+        <p:spPr>
+          <a:xfrm>
+            <a:off x="3649828" y="1417320"/>
+            <a:ext cx="502920" cy="2560320"/>
           </a:xfrm>
           <a:prstGeom prst="rect">
             <a:avLst/>
@@ -7772,7 +8635,7 @@
               <a:buNone/>
             </a:pPr>
             <a:r>
-              <a:rPr lang="en-US" sz="1600" dirty="0">
+              <a:rPr lang="en-US" sz="1800" dirty="0">
                 <a:solidFill>
                   <a:srgbClr val="B5822A"/>
                 </a:solidFill>
@@ -7782,47 +8645,65 @@
               </a:rPr>
               <a:t>→</a:t>
             </a:r>
-            <a:endParaRPr lang="en-US" sz="1600" dirty="0"/>
-          </a:p>
-        </p:txBody>
-      </p:sp>
-      <p:sp>
-        <p:nvSpPr>
-          <p:cNvPr id="6" name="Shape 4"/>
+            <a:endParaRPr lang="en-US" sz="1800" dirty="0"/>
+          </a:p>
+        </p:txBody>
+      </p:sp>
+      <p:sp>
+        <p:nvSpPr>
+          <p:cNvPr id="7" name="Shape 4"/>
           <p:cNvSpPr/>
           <p:nvPr/>
         </p:nvSpPr>
         <p:spPr>
           <a:xfrm>
-            <a:off x="3337560" y="1783080"/>
-            <a:ext cx="2468880" cy="1188720"/>
+            <a:off x="4097884" y="1362456"/>
+            <a:ext cx="1801368" cy="2670048"/>
           </a:xfrm>
           <a:prstGeom prst="roundRect">
             <a:avLst>
-              <a:gd name="adj" fmla="val 6154"/>
+              <a:gd name="adj" fmla="val 7107"/>
             </a:avLst>
           </a:prstGeom>
           <a:solidFill>
-            <a:srgbClr val="FFFFFF"/>
+            <a:srgbClr val="211D1B"/>
           </a:solidFill>
-          <a:ln w="12700">
-            <a:solidFill>
-              <a:srgbClr val="E3D9CB"/>
-            </a:solidFill>
-            <a:prstDash val="solid"/>
-          </a:ln>
-        </p:spPr>
-      </p:sp>
-      <p:sp>
-        <p:nvSpPr>
-          <p:cNvPr id="7" name="Text 5"/>
-          <p:cNvSpPr txBox="1"/>
-          <p:nvPr/>
-        </p:nvSpPr>
-        <p:spPr>
-          <a:xfrm>
-            <a:off x="3474720" y="1783080"/>
-            <a:ext cx="2194560" cy="1188720"/>
+          <a:ln/>
+        </p:spPr>
+      </p:sp>
+      <p:pic>
+        <p:nvPicPr>
+          <p:cNvPr id="8" name="Image 1" descr="C:\Users\sanka\Documents\Projects\NL-Myntra Graduation Project\docs\deck-assets\02-wishlist-intelligence.png">    </p:cNvPr>
+          <p:cNvPicPr>
+            <a:picLocks noChangeAspect="1"/>
+          </p:cNvPicPr>
+          <p:nvPr/>
+        </p:nvPicPr>
+        <p:blipFill>
+          <a:blip r:embed="rId2"/>
+          <a:srcRect l="0" r="0" t="0" b="0"/>
+          <a:stretch/>
+        </p:blipFill>
+        <p:spPr>
+          <a:xfrm>
+            <a:off x="4152748" y="1417320"/>
+            <a:ext cx="1691640" cy="2560320"/>
+          </a:xfrm>
+          <a:prstGeom prst="rect">
+            <a:avLst/>
+          </a:prstGeom>
+        </p:spPr>
+      </p:pic>
+      <p:sp>
+        <p:nvSpPr>
+          <p:cNvPr id="9" name="Text 5"/>
+          <p:cNvSpPr txBox="1"/>
+          <p:nvPr/>
+        </p:nvSpPr>
+        <p:spPr>
+          <a:xfrm>
+            <a:off x="3924148" y="4069080"/>
+            <a:ext cx="2148840" cy="384048"/>
           </a:xfrm>
           <a:prstGeom prst="rect">
             <a:avLst/>
@@ -7835,6 +8716,9 @@
           <a:lstStyle/>
           <a:p>
             <a:pPr algn="ctr" indent="0" marL="0">
+              <a:lnSpc>
+                <a:spcPct val="105000"/>
+              </a:lnSpc>
               <a:buNone/>
             </a:pPr>
             <a:r>
@@ -7854,14 +8738,14 @@
       </p:sp>
       <p:sp>
         <p:nvSpPr>
-          <p:cNvPr id="8" name="Text 6"/>
-          <p:cNvSpPr txBox="1"/>
-          <p:nvPr/>
-        </p:nvSpPr>
-        <p:spPr>
-          <a:xfrm>
-            <a:off x="5806440" y="1783080"/>
-            <a:ext cx="246888" cy="1188720"/>
+          <p:cNvPr id="10" name="Text 6"/>
+          <p:cNvSpPr txBox="1"/>
+          <p:nvPr/>
+        </p:nvSpPr>
+        <p:spPr>
+          <a:xfrm>
+            <a:off x="5844388" y="1417320"/>
+            <a:ext cx="502920" cy="2560320"/>
           </a:xfrm>
           <a:prstGeom prst="rect">
             <a:avLst/>
@@ -7877,7 +8761,7 @@
               <a:buNone/>
             </a:pPr>
             <a:r>
-              <a:rPr lang="en-US" sz="1600" dirty="0">
+              <a:rPr lang="en-US" sz="1800" dirty="0">
                 <a:solidFill>
                   <a:srgbClr val="B5822A"/>
                 </a:solidFill>
@@ -7887,47 +8771,65 @@
               </a:rPr>
               <a:t>→</a:t>
             </a:r>
-            <a:endParaRPr lang="en-US" sz="1600" dirty="0"/>
-          </a:p>
-        </p:txBody>
-      </p:sp>
-      <p:sp>
-        <p:nvSpPr>
-          <p:cNvPr id="9" name="Shape 7"/>
+            <a:endParaRPr lang="en-US" sz="1800" dirty="0"/>
+          </a:p>
+        </p:txBody>
+      </p:sp>
+      <p:sp>
+        <p:nvSpPr>
+          <p:cNvPr id="11" name="Shape 7"/>
           <p:cNvSpPr/>
           <p:nvPr/>
         </p:nvSpPr>
         <p:spPr>
           <a:xfrm>
-            <a:off x="6035040" y="1783080"/>
-            <a:ext cx="2468880" cy="1188720"/>
+            <a:off x="6292444" y="1362456"/>
+            <a:ext cx="1801368" cy="2670048"/>
           </a:xfrm>
           <a:prstGeom prst="roundRect">
             <a:avLst>
-              <a:gd name="adj" fmla="val 6154"/>
+              <a:gd name="adj" fmla="val 7107"/>
             </a:avLst>
           </a:prstGeom>
           <a:solidFill>
-            <a:srgbClr val="FFFFFF"/>
+            <a:srgbClr val="211D1B"/>
           </a:solidFill>
-          <a:ln w="12700">
-            <a:solidFill>
-              <a:srgbClr val="E3D9CB"/>
-            </a:solidFill>
-            <a:prstDash val="solid"/>
-          </a:ln>
-        </p:spPr>
-      </p:sp>
-      <p:sp>
-        <p:nvSpPr>
-          <p:cNvPr id="10" name="Text 8"/>
-          <p:cNvSpPr txBox="1"/>
-          <p:nvPr/>
-        </p:nvSpPr>
-        <p:spPr>
-          <a:xfrm>
-            <a:off x="6172200" y="1783080"/>
-            <a:ext cx="2194560" cy="1188720"/>
+          <a:ln/>
+        </p:spPr>
+      </p:sp>
+      <p:pic>
+        <p:nvPicPr>
+          <p:cNvPr id="12" name="Image 2" descr="C:\Users\sanka\Documents\Projects\NL-Myntra Graduation Project\docs\deck-assets\03-item-detail-price-box.png">    </p:cNvPr>
+          <p:cNvPicPr>
+            <a:picLocks noChangeAspect="1"/>
+          </p:cNvPicPr>
+          <p:nvPr/>
+        </p:nvPicPr>
+        <p:blipFill>
+          <a:blip r:embed="rId3"/>
+          <a:srcRect l="0" r="0" t="0" b="0"/>
+          <a:stretch/>
+        </p:blipFill>
+        <p:spPr>
+          <a:xfrm>
+            <a:off x="6347308" y="1417320"/>
+            <a:ext cx="1691640" cy="2560320"/>
+          </a:xfrm>
+          <a:prstGeom prst="rect">
+            <a:avLst/>
+          </a:prstGeom>
+        </p:spPr>
+      </p:pic>
+      <p:sp>
+        <p:nvSpPr>
+          <p:cNvPr id="13" name="Text 8"/>
+          <p:cNvSpPr txBox="1"/>
+          <p:nvPr/>
+        </p:nvSpPr>
+        <p:spPr>
+          <a:xfrm>
+            <a:off x="6118708" y="4069080"/>
+            <a:ext cx="2148840" cy="384048"/>
           </a:xfrm>
           <a:prstGeom prst="rect">
             <a:avLst/>
@@ -7940,6 +8842,9 @@
           <a:lstStyle/>
           <a:p>
             <a:pPr algn="ctr" indent="0" marL="0">
+              <a:lnSpc>
+                <a:spcPct val="105000"/>
+              </a:lnSpc>
               <a:buNone/>
             </a:pPr>
             <a:r>
@@ -7959,14 +8864,14 @@
       </p:sp>
       <p:sp>
         <p:nvSpPr>
-          <p:cNvPr id="11" name="Text 9"/>
-          <p:cNvSpPr txBox="1"/>
-          <p:nvPr/>
-        </p:nvSpPr>
-        <p:spPr>
-          <a:xfrm>
-            <a:off x="8503920" y="1783080"/>
-            <a:ext cx="246888" cy="1188720"/>
+          <p:cNvPr id="14" name="Text 9"/>
+          <p:cNvSpPr txBox="1"/>
+          <p:nvPr/>
+        </p:nvSpPr>
+        <p:spPr>
+          <a:xfrm>
+            <a:off x="8038948" y="1417320"/>
+            <a:ext cx="502920" cy="2560320"/>
           </a:xfrm>
           <a:prstGeom prst="rect">
             <a:avLst/>
@@ -7982,7 +8887,7 @@
               <a:buNone/>
             </a:pPr>
             <a:r>
-              <a:rPr lang="en-US" sz="1600" dirty="0">
+              <a:rPr lang="en-US" sz="1800" dirty="0">
                 <a:solidFill>
                   <a:srgbClr val="B5822A"/>
                 </a:solidFill>
@@ -7992,47 +8897,65 @@
               </a:rPr>
               <a:t>→</a:t>
             </a:r>
-            <a:endParaRPr lang="en-US" sz="1600" dirty="0"/>
-          </a:p>
-        </p:txBody>
-      </p:sp>
-      <p:sp>
-        <p:nvSpPr>
-          <p:cNvPr id="12" name="Shape 10"/>
+            <a:endParaRPr lang="en-US" sz="1800" dirty="0"/>
+          </a:p>
+        </p:txBody>
+      </p:sp>
+      <p:sp>
+        <p:nvSpPr>
+          <p:cNvPr id="15" name="Shape 10"/>
           <p:cNvSpPr/>
           <p:nvPr/>
         </p:nvSpPr>
         <p:spPr>
           <a:xfrm>
-            <a:off x="8732520" y="1783080"/>
-            <a:ext cx="2468880" cy="1188720"/>
+            <a:off x="8487004" y="1362456"/>
+            <a:ext cx="1801368" cy="2670048"/>
           </a:xfrm>
           <a:prstGeom prst="roundRect">
             <a:avLst>
-              <a:gd name="adj" fmla="val 6154"/>
+              <a:gd name="adj" fmla="val 7107"/>
             </a:avLst>
           </a:prstGeom>
           <a:solidFill>
-            <a:srgbClr val="5B3A4A"/>
+            <a:srgbClr val="211D1B"/>
           </a:solidFill>
-          <a:ln w="12700">
-            <a:solidFill>
-              <a:srgbClr val="5B3A4A"/>
-            </a:solidFill>
-            <a:prstDash val="solid"/>
-          </a:ln>
-        </p:spPr>
-      </p:sp>
-      <p:sp>
-        <p:nvSpPr>
-          <p:cNvPr id="13" name="Text 11"/>
-          <p:cNvSpPr txBox="1"/>
-          <p:nvPr/>
-        </p:nvSpPr>
-        <p:spPr>
-          <a:xfrm>
-            <a:off x="8869680" y="1783080"/>
-            <a:ext cx="2194560" cy="1188720"/>
+          <a:ln/>
+        </p:spPr>
+      </p:sp>
+      <p:pic>
+        <p:nvPicPr>
+          <p:cNvPr id="16" name="Image 3" descr="C:\Users\sanka\Documents\Projects\NL-Myntra Graduation Project\docs\deck-assets\04-decision-check-open.png">    </p:cNvPr>
+          <p:cNvPicPr>
+            <a:picLocks noChangeAspect="1"/>
+          </p:cNvPicPr>
+          <p:nvPr/>
+        </p:nvPicPr>
+        <p:blipFill>
+          <a:blip r:embed="rId4"/>
+          <a:srcRect l="0" r="0" t="0" b="0"/>
+          <a:stretch/>
+        </p:blipFill>
+        <p:spPr>
+          <a:xfrm>
+            <a:off x="8541868" y="1417320"/>
+            <a:ext cx="1691640" cy="2560320"/>
+          </a:xfrm>
+          <a:prstGeom prst="rect">
+            <a:avLst/>
+          </a:prstGeom>
+        </p:spPr>
+      </p:pic>
+      <p:sp>
+        <p:nvSpPr>
+          <p:cNvPr id="17" name="Text 11"/>
+          <p:cNvSpPr txBox="1"/>
+          <p:nvPr/>
+        </p:nvSpPr>
+        <p:spPr>
+          <a:xfrm>
+            <a:off x="8313268" y="4069080"/>
+            <a:ext cx="2148840" cy="384048"/>
           </a:xfrm>
           <a:prstGeom prst="rect">
             <a:avLst/>
@@ -8045,12 +8968,15 @@
           <a:lstStyle/>
           <a:p>
             <a:pPr algn="ctr" indent="0" marL="0">
+              <a:lnSpc>
+                <a:spcPct val="105000"/>
+              </a:lnSpc>
               <a:buNone/>
             </a:pPr>
             <a:r>
               <a:rPr lang="en-US" sz="1400" b="1" dirty="0">
                 <a:solidFill>
-                  <a:srgbClr val="F6F1EA"/>
+                  <a:srgbClr val="211D1B"/>
                 </a:solidFill>
                 <a:latin typeface="Calibri" pitchFamily="34" charset="0"/>
                 <a:ea typeface="Calibri" pitchFamily="34" charset="-122"/>
@@ -8064,18 +8990,18 @@
       </p:sp>
       <p:sp>
         <p:nvSpPr>
-          <p:cNvPr id="14" name="Shape 12"/>
+          <p:cNvPr id="18" name="Shape 12"/>
           <p:cNvSpPr/>
           <p:nvPr/>
         </p:nvSpPr>
         <p:spPr>
           <a:xfrm>
-            <a:off x="640080" y="3246120"/>
-            <a:ext cx="10881360" cy="1600200"/>
+            <a:off x="640080" y="4617720"/>
+            <a:ext cx="10881360" cy="960120"/>
           </a:xfrm>
           <a:prstGeom prst="roundRect">
             <a:avLst>
-              <a:gd name="adj" fmla="val 4571"/>
+              <a:gd name="adj" fmla="val 7619"/>
             </a:avLst>
           </a:prstGeom>
           <a:solidFill>
@@ -8086,14 +9012,14 @@
       </p:sp>
       <p:sp>
         <p:nvSpPr>
-          <p:cNvPr id="15" name="Text 13"/>
-          <p:cNvSpPr txBox="1"/>
-          <p:nvPr/>
-        </p:nvSpPr>
-        <p:spPr>
-          <a:xfrm>
-            <a:off x="914400" y="3429000"/>
-            <a:ext cx="10332720" cy="274320"/>
+          <p:cNvPr id="19" name="Text 13"/>
+          <p:cNvSpPr txBox="1"/>
+          <p:nvPr/>
+        </p:nvSpPr>
+        <p:spPr>
+          <a:xfrm>
+            <a:off x="914400" y="4727448"/>
+            <a:ext cx="10332720" cy="256032"/>
           </a:xfrm>
           <a:prstGeom prst="rect">
             <a:avLst/>
@@ -8125,14 +9051,14 @@
       </p:sp>
       <p:sp>
         <p:nvSpPr>
-          <p:cNvPr id="16" name="Text 14"/>
-          <p:cNvSpPr txBox="1"/>
-          <p:nvPr/>
-        </p:nvSpPr>
-        <p:spPr>
-          <a:xfrm>
-            <a:off x="914400" y="3749040"/>
-            <a:ext cx="10332720" cy="1005840"/>
+          <p:cNvPr id="20" name="Text 14"/>
+          <p:cNvSpPr txBox="1"/>
+          <p:nvPr/>
+        </p:nvSpPr>
+        <p:spPr>
+          <a:xfrm>
+            <a:off x="914400" y="4983480"/>
+            <a:ext cx="10332720" cy="548640"/>
           </a:xfrm>
           <a:prstGeom prst="rect">
             <a:avLst/>
@@ -8146,7 +9072,7 @@
           <a:p>
             <a:pPr indent="0" marL="0">
               <a:lnSpc>
-                <a:spcPct val="120000"/>
+                <a:spcPct val="115000"/>
               </a:lnSpc>
               <a:buNone/>
             </a:pPr>
@@ -8159,7 +9085,7 @@
                 <a:ea typeface="Calibri" pitchFamily="34" charset="-122"/>
                 <a:cs typeface="Calibri" pitchFamily="34" charset="-120"/>
               </a:rPr>
-              <a:t>“If it was 1,200 I probably would've bought it then and there.” — real interview quote, directly powering the item's price-history chart and confidence reasoning in the live MVP. Not a template filled with a plausible-sounding guess.</a:t>
+              <a:t>“If it was 1,200 I probably would've bought it then and there.” — real interview quote, directly powering the item's price-history box and confidence reasoning above. Not a template filled with a plausible-sounding guess.</a:t>
             </a:r>
             <a:endParaRPr lang="en-US" sz="1400" dirty="0"/>
           </a:p>
@@ -8167,18 +9093,18 @@
       </p:sp>
       <p:sp>
         <p:nvSpPr>
-          <p:cNvPr id="17" name="Shape 15"/>
+          <p:cNvPr id="21" name="Shape 15"/>
           <p:cNvSpPr/>
           <p:nvPr/>
         </p:nvSpPr>
         <p:spPr>
           <a:xfrm>
-            <a:off x="640080" y="5074920"/>
-            <a:ext cx="10881360" cy="822960"/>
+            <a:off x="640080" y="5715000"/>
+            <a:ext cx="10881360" cy="502920"/>
           </a:xfrm>
           <a:prstGeom prst="roundRect">
             <a:avLst>
-              <a:gd name="adj" fmla="val 8889"/>
+              <a:gd name="adj" fmla="val 14545"/>
             </a:avLst>
           </a:prstGeom>
           <a:solidFill>
@@ -8194,14 +9120,14 @@
       </p:sp>
       <p:sp>
         <p:nvSpPr>
-          <p:cNvPr id="18" name="Text 16"/>
-          <p:cNvSpPr txBox="1"/>
-          <p:nvPr/>
-        </p:nvSpPr>
-        <p:spPr>
-          <a:xfrm>
-            <a:off x="914400" y="5193792"/>
-            <a:ext cx="2743200" cy="274320"/>
+          <p:cNvPr id="22" name="Text 16"/>
+          <p:cNvSpPr txBox="1"/>
+          <p:nvPr/>
+        </p:nvSpPr>
+        <p:spPr>
+          <a:xfrm>
+            <a:off x="914400" y="5715000"/>
+            <a:ext cx="10058400" cy="502920"/>
           </a:xfrm>
           <a:prstGeom prst="rect">
             <a:avLst/>
@@ -8225,44 +9151,26 @@
                 <a:ea typeface="Calibri" pitchFamily="34" charset="-122"/>
                 <a:cs typeface="Calibri" pitchFamily="34" charset="-120"/>
               </a:rPr>
-              <a:t>LIVE MVP</a:t>
-            </a:r>
-            <a:endParaRPr lang="en-US" sz="1400" dirty="0"/>
-          </a:p>
-        </p:txBody>
-      </p:sp>
-      <p:sp>
-        <p:nvSpPr>
-          <p:cNvPr id="19" name="Text 17"/>
-          <p:cNvSpPr txBox="1"/>
-          <p:nvPr/>
-        </p:nvSpPr>
-        <p:spPr>
-          <a:xfrm>
-            <a:off x="914400" y="5468112"/>
-            <a:ext cx="10058400" cy="365760"/>
-          </a:xfrm>
-          <a:prstGeom prst="rect">
-            <a:avLst/>
-          </a:prstGeom>
-          <a:noFill/>
-          <a:ln/>
-        </p:spPr>
-        <p:txBody>
-          <a:bodyPr wrap="square" lIns="0" tIns="0" rIns="0" bIns="0" rtlCol="0" anchor="ctr"/>
-          <a:lstStyle/>
-          <a:p>
+              <a:t>LIVE MVP   </a:t>
+            </a:r>
             <a:pPr indent="0" marL="0">
               <a:buNone/>
             </a:pPr>
             <a:r>
-              <a:rPr lang="en-US" sz="1400" dirty="0">
+              <a:rPr lang="en-US" sz="1400" u="sng" dirty="0">
                 <a:solidFill>
                   <a:srgbClr val="211D1B"/>
                 </a:solidFill>
                 <a:latin typeface="Courier New" pitchFamily="34" charset="0"/>
                 <a:ea typeface="Courier New" pitchFamily="34" charset="-122"/>
                 <a:cs typeface="Courier New" pitchFamily="34" charset="-120"/>
+                <a:hlinkClick r:id="rId5" invalidUrl="" action="" tgtFrame="" tooltip="" history="1" highlightClick="0" endSnd="0">
+                  <a:extLst>
+                    <a:ext uri="{A12FA001-AC4F-418D-AE19-62706E023703}">
+                      <ahyp:hlinkClr xmlns:ahyp="http://schemas.microsoft.com/office/drawing/2018/hyperlinkcolor" val="tx"/>
+                    </a:ext>
+                  </a:extLst>
+                </a:hlinkClick>
               </a:rPr>
               <a:t>https://mvp-henna-delta.vercel.app</a:t>
             </a:r>
@@ -8272,7 +9180,7 @@
       </p:sp>
       <p:sp>
         <p:nvSpPr>
-          <p:cNvPr id="20" name="Text 18"/>
+          <p:cNvPr id="23" name="Text 17"/>
           <p:cNvSpPr txBox="1"/>
           <p:nvPr/>
         </p:nvSpPr>
@@ -8311,7 +9219,7 @@
       </p:sp>
       <p:sp>
         <p:nvSpPr>
-          <p:cNvPr id="21" name="Text 19"/>
+          <p:cNvPr id="24" name="Text 18"/>
           <p:cNvSpPr txBox="1"/>
           <p:nvPr/>
         </p:nvSpPr>
@@ -8422,226 +9330,31 @@
           </a:p>
         </p:txBody>
       </p:sp>
-      <p:sp>
-        <p:nvSpPr>
-          <p:cNvPr id="3" name="Shape 1"/>
+      <p:graphicFrame>
+        <p:nvGraphicFramePr>
+          <p:cNvPr id="3" name="Chart 0" descr=""/>
+          <p:cNvGraphicFramePr/>
+          <p:nvPr/>
+        </p:nvGraphicFramePr>
+        <p:xfrm>
+          <a:off x="640080" y="1691640"/>
+          <a:ext cx="10881360" cy="1965960"/>
+        </p:xfrm>
+        <a:graphic xmlns:a="http://schemas.openxmlformats.org/drawingml/2006/main">
+          <a:graphicData uri="http://schemas.openxmlformats.org/drawingml/2006/chart">
+            <c:chart xmlns:c="http://schemas.openxmlformats.org/drawingml/2006/chart" r:id="rId1"/>
+          </a:graphicData>
+        </a:graphic>
+      </p:graphicFrame>
+      <p:sp>
+        <p:nvSpPr>
+          <p:cNvPr id="4" name="Shape 1"/>
           <p:cNvSpPr/>
           <p:nvPr/>
         </p:nvSpPr>
         <p:spPr>
           <a:xfrm>
-            <a:off x="640080" y="1783080"/>
-            <a:ext cx="5212080" cy="1965960"/>
-          </a:xfrm>
-          <a:prstGeom prst="roundRect">
-            <a:avLst>
-              <a:gd name="adj" fmla="val 3721"/>
-            </a:avLst>
-          </a:prstGeom>
-          <a:solidFill>
-            <a:srgbClr val="5B3A4A"/>
-          </a:solidFill>
-          <a:ln/>
-        </p:spPr>
-      </p:sp>
-      <p:sp>
-        <p:nvSpPr>
-          <p:cNvPr id="4" name="Text 2"/>
-          <p:cNvSpPr txBox="1"/>
-          <p:nvPr/>
-        </p:nvSpPr>
-        <p:spPr>
-          <a:xfrm>
-            <a:off x="868680" y="1920240"/>
-            <a:ext cx="4754880" cy="685800"/>
-          </a:xfrm>
-          <a:prstGeom prst="rect">
-            <a:avLst/>
-          </a:prstGeom>
-          <a:noFill/>
-          <a:ln/>
-        </p:spPr>
-        <p:txBody>
-          <a:bodyPr wrap="square" lIns="0" tIns="0" rIns="0" bIns="0" rtlCol="0" anchor="ctr"/>
-          <a:lstStyle/>
-          <a:p>
-            <a:pPr indent="0" marL="0">
-              <a:buNone/>
-            </a:pPr>
-            <a:r>
-              <a:rPr lang="en-US" sz="3600" b="1" dirty="0">
-                <a:solidFill>
-                  <a:srgbClr val="F6F1EA"/>
-                </a:solidFill>
-                <a:latin typeface="Cambria" pitchFamily="34" charset="0"/>
-                <a:ea typeface="Cambria" pitchFamily="34" charset="-122"/>
-                <a:cs typeface="Cambria" pitchFamily="34" charset="-120"/>
-              </a:rPr>
-              <a:t>0.875</a:t>
-            </a:r>
-            <a:endParaRPr lang="en-US" sz="3600" dirty="0"/>
-          </a:p>
-        </p:txBody>
-      </p:sp>
-      <p:sp>
-        <p:nvSpPr>
-          <p:cNvPr id="5" name="Text 3"/>
-          <p:cNvSpPr txBox="1"/>
-          <p:nvPr/>
-        </p:nvSpPr>
-        <p:spPr>
-          <a:xfrm>
-            <a:off x="868680" y="2606040"/>
-            <a:ext cx="4754880" cy="1005840"/>
-          </a:xfrm>
-          <a:prstGeom prst="rect">
-            <a:avLst/>
-          </a:prstGeom>
-          <a:noFill/>
-          <a:ln/>
-        </p:spPr>
-        <p:txBody>
-          <a:bodyPr wrap="square" lIns="0" tIns="0" rIns="0" bIns="0" rtlCol="0" anchor="ctr"/>
-          <a:lstStyle/>
-          <a:p>
-            <a:pPr indent="0" marL="0">
-              <a:lnSpc>
-                <a:spcPct val="120000"/>
-              </a:lnSpc>
-              <a:buNone/>
-            </a:pPr>
-            <a:r>
-              <a:rPr lang="en-US" sz="1400" dirty="0">
-                <a:solidFill>
-                  <a:srgbClr val="D9CFC4"/>
-                </a:solidFill>
-                <a:latin typeface="Calibri" pitchFamily="34" charset="0"/>
-                <a:ea typeface="Calibri" pitchFamily="34" charset="-122"/>
-                <a:cs typeface="Calibri" pitchFamily="34" charset="-120"/>
-              </a:rPr>
-              <a:t>E1 — classifier accuracy measured against 137 human-labeled reviews, not self-graded.</a:t>
-            </a:r>
-            <a:endParaRPr lang="en-US" sz="1400" dirty="0"/>
-          </a:p>
-        </p:txBody>
-      </p:sp>
-      <p:sp>
-        <p:nvSpPr>
-          <p:cNvPr id="6" name="Shape 4"/>
-          <p:cNvSpPr/>
-          <p:nvPr/>
-        </p:nvSpPr>
-        <p:spPr>
-          <a:xfrm>
-            <a:off x="6080760" y="1783080"/>
-            <a:ext cx="5440680" cy="1965960"/>
-          </a:xfrm>
-          <a:prstGeom prst="roundRect">
-            <a:avLst>
-              <a:gd name="adj" fmla="val 3721"/>
-            </a:avLst>
-          </a:prstGeom>
-          <a:solidFill>
-            <a:srgbClr val="FFFFFF"/>
-          </a:solidFill>
-          <a:ln w="15875">
-            <a:solidFill>
-              <a:srgbClr val="B5822A"/>
-            </a:solidFill>
-            <a:prstDash val="solid"/>
-          </a:ln>
-        </p:spPr>
-      </p:sp>
-      <p:sp>
-        <p:nvSpPr>
-          <p:cNvPr id="7" name="Text 5"/>
-          <p:cNvSpPr txBox="1"/>
-          <p:nvPr/>
-        </p:nvSpPr>
-        <p:spPr>
-          <a:xfrm>
-            <a:off x="6309360" y="1920240"/>
-            <a:ext cx="5029200" cy="685800"/>
-          </a:xfrm>
-          <a:prstGeom prst="rect">
-            <a:avLst/>
-          </a:prstGeom>
-          <a:noFill/>
-          <a:ln/>
-        </p:spPr>
-        <p:txBody>
-          <a:bodyPr wrap="square" lIns="0" tIns="0" rIns="0" bIns="0" rtlCol="0" anchor="ctr"/>
-          <a:lstStyle/>
-          <a:p>
-            <a:pPr indent="0" marL="0">
-              <a:buNone/>
-            </a:pPr>
-            <a:r>
-              <a:rPr lang="en-US" sz="3000" b="1" dirty="0">
-                <a:solidFill>
-                  <a:srgbClr val="B5822A"/>
-                </a:solidFill>
-                <a:latin typeface="Cambria" pitchFamily="34" charset="0"/>
-                <a:ea typeface="Cambria" pitchFamily="34" charset="-122"/>
-                <a:cs typeface="Cambria" pitchFamily="34" charset="-120"/>
-              </a:rPr>
-              <a:t>Kappa = 0.159</a:t>
-            </a:r>
-            <a:endParaRPr lang="en-US" sz="3000" dirty="0"/>
-          </a:p>
-        </p:txBody>
-      </p:sp>
-      <p:sp>
-        <p:nvSpPr>
-          <p:cNvPr id="8" name="Text 6"/>
-          <p:cNvSpPr txBox="1"/>
-          <p:nvPr/>
-        </p:nvSpPr>
-        <p:spPr>
-          <a:xfrm>
-            <a:off x="6309360" y="2606040"/>
-            <a:ext cx="5029200" cy="1005840"/>
-          </a:xfrm>
-          <a:prstGeom prst="rect">
-            <a:avLst/>
-          </a:prstGeom>
-          <a:noFill/>
-          <a:ln/>
-        </p:spPr>
-        <p:txBody>
-          <a:bodyPr wrap="square" lIns="0" tIns="0" rIns="0" bIns="0" rtlCol="0" anchor="ctr"/>
-          <a:lstStyle/>
-          <a:p>
-            <a:pPr indent="0" marL="0">
-              <a:lnSpc>
-                <a:spcPct val="120000"/>
-              </a:lnSpc>
-              <a:buNone/>
-            </a:pPr>
-            <a:r>
-              <a:rPr lang="en-US" sz="1400" dirty="0">
-                <a:solidFill>
-                  <a:srgbClr val="4A433C"/>
-                </a:solidFill>
-                <a:latin typeface="Calibri" pitchFamily="34" charset="0"/>
-                <a:ea typeface="Calibri" pitchFamily="34" charset="-122"/>
-                <a:cs typeface="Calibri" pitchFamily="34" charset="-120"/>
-              </a:rPr>
-              <a:t>E3 — cross-model agreement, disclosed as a real limitation of the smaller local backup model, not smoothed over.</a:t>
-            </a:r>
-            <a:endParaRPr lang="en-US" sz="1400" dirty="0"/>
-          </a:p>
-        </p:txBody>
-      </p:sp>
-      <p:sp>
-        <p:nvSpPr>
-          <p:cNvPr id="9" name="Shape 7"/>
-          <p:cNvSpPr/>
-          <p:nvPr/>
-        </p:nvSpPr>
-        <p:spPr>
-          <a:xfrm>
-            <a:off x="640080" y="3977640"/>
+            <a:off x="640080" y="3840480"/>
             <a:ext cx="10881360" cy="1691640"/>
           </a:xfrm>
           <a:prstGeom prst="roundRect">
@@ -8657,13 +9370,13 @@
       </p:sp>
       <p:sp>
         <p:nvSpPr>
-          <p:cNvPr id="10" name="Text 8"/>
-          <p:cNvSpPr txBox="1"/>
-          <p:nvPr/>
-        </p:nvSpPr>
-        <p:spPr>
-          <a:xfrm>
-            <a:off x="914400" y="4160520"/>
+          <p:cNvPr id="5" name="Text 2"/>
+          <p:cNvSpPr txBox="1"/>
+          <p:nvPr/>
+        </p:nvSpPr>
+        <p:spPr>
+          <a:xfrm>
+            <a:off x="914400" y="4023360"/>
             <a:ext cx="10332720" cy="365760"/>
           </a:xfrm>
           <a:prstGeom prst="rect">
@@ -8696,14 +9409,14 @@
       </p:sp>
       <p:sp>
         <p:nvSpPr>
-          <p:cNvPr id="11" name="Text 9"/>
-          <p:cNvSpPr txBox="1"/>
-          <p:nvPr/>
-        </p:nvSpPr>
-        <p:spPr>
-          <a:xfrm>
-            <a:off x="914400" y="4526280"/>
-            <a:ext cx="10332720" cy="1097280"/>
+          <p:cNvPr id="6" name="Text 3"/>
+          <p:cNvSpPr txBox="1"/>
+          <p:nvPr/>
+        </p:nvSpPr>
+        <p:spPr>
+          <a:xfrm>
+            <a:off x="914400" y="4389120"/>
+            <a:ext cx="10332720" cy="1051560"/>
           </a:xfrm>
           <a:prstGeom prst="rect">
             <a:avLst/>
@@ -8717,7 +9430,7 @@
           <a:p>
             <a:pPr indent="0" marL="0">
               <a:lnSpc>
-                <a:spcPct val="120000"/>
+                <a:spcPct val="115000"/>
               </a:lnSpc>
               <a:buNone/>
             </a:pPr>
@@ -8738,7 +9451,67 @@
       </p:sp>
       <p:sp>
         <p:nvSpPr>
-          <p:cNvPr id="12" name="Text 10"/>
+          <p:cNvPr id="7" name="Text 4"/>
+          <p:cNvSpPr txBox="1"/>
+          <p:nvPr/>
+        </p:nvSpPr>
+        <p:spPr>
+          <a:xfrm>
+            <a:off x="640080" y="5669280"/>
+            <a:ext cx="10515600" cy="292608"/>
+          </a:xfrm>
+          <a:prstGeom prst="rect">
+            <a:avLst/>
+          </a:prstGeom>
+          <a:noFill/>
+          <a:ln/>
+        </p:spPr>
+        <p:txBody>
+          <a:bodyPr wrap="square" lIns="0" tIns="0" rIns="0" bIns="0" rtlCol="0" anchor="ctr"/>
+          <a:lstStyle/>
+          <a:p>
+            <a:pPr indent="0" marL="0">
+              <a:buNone/>
+            </a:pPr>
+            <a:r>
+              <a:rPr lang="en-US" sz="1400" b="1" spc="50" kern="0" dirty="0">
+                <a:solidFill>
+                  <a:srgbClr val="B5822A"/>
+                </a:solidFill>
+                <a:latin typeface="Calibri" pitchFamily="34" charset="0"/>
+                <a:ea typeface="Calibri" pitchFamily="34" charset="-122"/>
+                <a:cs typeface="Calibri" pitchFamily="34" charset="-120"/>
+              </a:rPr>
+              <a:t>FULL REPO &amp; RESEARCH TRAIL   </a:t>
+            </a:r>
+            <a:pPr indent="0" marL="0">
+              <a:buNone/>
+            </a:pPr>
+            <a:r>
+              <a:rPr lang="en-US" sz="1400" u="sng" dirty="0">
+                <a:solidFill>
+                  <a:srgbClr val="211D1B"/>
+                </a:solidFill>
+                <a:latin typeface="Calibri" pitchFamily="34" charset="0"/>
+                <a:ea typeface="Calibri" pitchFamily="34" charset="-122"/>
+                <a:cs typeface="Calibri" pitchFamily="34" charset="-120"/>
+                <a:hlinkClick r:id="rId2" invalidUrl="" action="" tgtFrame="" tooltip="" history="1" highlightClick="0" endSnd="0">
+                  <a:extLst>
+                    <a:ext uri="{A12FA001-AC4F-418D-AE19-62706E023703}">
+                      <ahyp:hlinkClr xmlns:ahyp="http://schemas.microsoft.com/office/drawing/2018/hyperlinkcolor" val="tx"/>
+                    </a:ext>
+                  </a:extLst>
+                </a:hlinkClick>
+              </a:rPr>
+              <a:t>github.com/blazing-llama/NL-Myntra-Graduation-Project</a:t>
+            </a:r>
+            <a:endParaRPr lang="en-US" sz="1400" dirty="0"/>
+          </a:p>
+        </p:txBody>
+      </p:sp>
+      <p:sp>
+        <p:nvSpPr>
+          <p:cNvPr id="8" name="Text 5"/>
           <p:cNvSpPr txBox="1"/>
           <p:nvPr/>
         </p:nvSpPr>
@@ -8777,7 +9550,7 @@
       </p:sp>
       <p:sp>
         <p:nvSpPr>
-          <p:cNvPr id="13" name="Text 11"/>
+          <p:cNvPr id="9" name="Text 6"/>
           <p:cNvSpPr txBox="1"/>
           <p:nvPr/>
         </p:nvSpPr>
@@ -8897,11 +9670,11 @@
         <p:spPr>
           <a:xfrm>
             <a:off x="640080" y="1691640"/>
-            <a:ext cx="10881360" cy="1280160"/>
+            <a:ext cx="10881360" cy="1417320"/>
           </a:xfrm>
           <a:prstGeom prst="roundRect">
             <a:avLst>
-              <a:gd name="adj" fmla="val 5714"/>
+              <a:gd name="adj" fmla="val 5161"/>
             </a:avLst>
           </a:prstGeom>
           <a:solidFill>
@@ -8923,11 +9696,13 @@
         </p:nvSpPr>
         <p:spPr>
           <a:xfrm>
-            <a:off x="932688" y="1874520"/>
-            <a:ext cx="146304" cy="146304"/>
-          </a:xfrm>
-          <a:prstGeom prst="ellipse">
-            <a:avLst/>
+            <a:off x="777240" y="1828800"/>
+            <a:ext cx="2011680" cy="1143000"/>
+          </a:xfrm>
+          <a:prstGeom prst="roundRect">
+            <a:avLst>
+              <a:gd name="adj" fmla="val 6400"/>
+            </a:avLst>
           </a:prstGeom>
           <a:solidFill>
             <a:srgbClr val="5B3A4A"/>
@@ -8943,8 +9718,8 @@
         </p:nvSpPr>
         <p:spPr>
           <a:xfrm>
-            <a:off x="1188720" y="1819656"/>
-            <a:ext cx="2743200" cy="274320"/>
+            <a:off x="868680" y="1828800"/>
+            <a:ext cx="1828800" cy="1143000"/>
           </a:xfrm>
           <a:prstGeom prst="rect">
             <a:avLst/>
@@ -8957,12 +9732,15 @@
           <a:lstStyle/>
           <a:p>
             <a:pPr indent="0" marL="0">
-              <a:buNone/>
-            </a:pPr>
-            <a:r>
-              <a:rPr lang="en-US" sz="1400" b="1" spc="100" kern="0" dirty="0">
-                <a:solidFill>
-                  <a:srgbClr val="5B3A4A"/>
+              <a:lnSpc>
+                <a:spcPct val="115000"/>
+              </a:lnSpc>
+              <a:buNone/>
+            </a:pPr>
+            <a:r>
+              <a:rPr lang="en-US" sz="1400" b="1" spc="50" kern="0" dirty="0">
+                <a:solidFill>
+                  <a:srgbClr val="F6F1EA"/>
                 </a:solidFill>
                 <a:latin typeface="Calibri" pitchFamily="34" charset="0"/>
                 <a:ea typeface="Calibri" pitchFamily="34" charset="-122"/>
@@ -8982,8 +9760,8 @@
         </p:nvSpPr>
         <p:spPr>
           <a:xfrm>
-            <a:off x="960120" y="2093976"/>
-            <a:ext cx="9966960" cy="365760"/>
+            <a:off x="3383280" y="1874520"/>
+            <a:ext cx="8138160" cy="502920"/>
           </a:xfrm>
           <a:prstGeom prst="rect">
             <a:avLst/>
@@ -8999,7 +9777,7 @@
               <a:buNone/>
             </a:pPr>
             <a:r>
-              <a:rPr lang="en-US" sz="1700" b="1" dirty="0">
+              <a:rPr lang="en-US" sz="1800" b="1" dirty="0">
                 <a:solidFill>
                   <a:srgbClr val="211D1B"/>
                 </a:solidFill>
@@ -9009,7 +9787,7 @@
               </a:rPr>
               <a:t>Wishlist-to-Purchase, Within 30 Days</a:t>
             </a:r>
-            <a:endParaRPr lang="en-US" sz="1700" dirty="0"/>
+            <a:endParaRPr lang="en-US" sz="1800" dirty="0"/>
           </a:p>
         </p:txBody>
       </p:sp>
@@ -9021,8 +9799,8 @@
         </p:nvSpPr>
         <p:spPr>
           <a:xfrm>
-            <a:off x="960120" y="2496312"/>
-            <a:ext cx="9966960" cy="411480"/>
+            <a:off x="3383280" y="2404872"/>
+            <a:ext cx="8138160" cy="594360"/>
           </a:xfrm>
           <a:prstGeom prst="rect">
             <a:avLst/>
@@ -9036,7 +9814,7 @@
           <a:p>
             <a:pPr indent="0" marL="0">
               <a:lnSpc>
-                <a:spcPct val="110000"/>
+                <a:spcPct val="115000"/>
               </a:lnSpc>
               <a:buNone/>
             </a:pPr>
@@ -9063,12 +9841,12 @@
         </p:nvSpPr>
         <p:spPr>
           <a:xfrm>
-            <a:off x="640080" y="3154680"/>
-            <a:ext cx="10881360" cy="1280160"/>
+            <a:off x="640080" y="3291840"/>
+            <a:ext cx="10881360" cy="1417320"/>
           </a:xfrm>
           <a:prstGeom prst="roundRect">
             <a:avLst>
-              <a:gd name="adj" fmla="val 5714"/>
+              <a:gd name="adj" fmla="val 5161"/>
             </a:avLst>
           </a:prstGeom>
           <a:solidFill>
@@ -9090,11 +9868,13 @@
         </p:nvSpPr>
         <p:spPr>
           <a:xfrm>
-            <a:off x="932688" y="3337560"/>
-            <a:ext cx="146304" cy="146304"/>
-          </a:xfrm>
-          <a:prstGeom prst="ellipse">
-            <a:avLst/>
+            <a:off x="777240" y="3429000"/>
+            <a:ext cx="2011680" cy="1143000"/>
+          </a:xfrm>
+          <a:prstGeom prst="roundRect">
+            <a:avLst>
+              <a:gd name="adj" fmla="val 6400"/>
+            </a:avLst>
           </a:prstGeom>
           <a:solidFill>
             <a:srgbClr val="B5822A"/>
@@ -9110,8 +9890,8 @@
         </p:nvSpPr>
         <p:spPr>
           <a:xfrm>
-            <a:off x="1188720" y="3282696"/>
-            <a:ext cx="2743200" cy="274320"/>
+            <a:off x="868680" y="3429000"/>
+            <a:ext cx="1828800" cy="1143000"/>
           </a:xfrm>
           <a:prstGeom prst="rect">
             <a:avLst/>
@@ -9124,12 +9904,15 @@
           <a:lstStyle/>
           <a:p>
             <a:pPr indent="0" marL="0">
-              <a:buNone/>
-            </a:pPr>
-            <a:r>
-              <a:rPr lang="en-US" sz="1400" b="1" spc="100" kern="0" dirty="0">
-                <a:solidFill>
-                  <a:srgbClr val="B5822A"/>
+              <a:lnSpc>
+                <a:spcPct val="115000"/>
+              </a:lnSpc>
+              <a:buNone/>
+            </a:pPr>
+            <a:r>
+              <a:rPr lang="en-US" sz="1400" b="1" spc="50" kern="0" dirty="0">
+                <a:solidFill>
+                  <a:srgbClr val="F6F1EA"/>
                 </a:solidFill>
                 <a:latin typeface="Calibri" pitchFamily="34" charset="0"/>
                 <a:ea typeface="Calibri" pitchFamily="34" charset="-122"/>
@@ -9149,8 +9932,8 @@
         </p:nvSpPr>
         <p:spPr>
           <a:xfrm>
-            <a:off x="960120" y="3557016"/>
-            <a:ext cx="9966960" cy="365760"/>
+            <a:off x="3383280" y="3474720"/>
+            <a:ext cx="8138160" cy="502920"/>
           </a:xfrm>
           <a:prstGeom prst="rect">
             <a:avLst/>
@@ -9166,7 +9949,7 @@
               <a:buNone/>
             </a:pPr>
             <a:r>
-              <a:rPr lang="en-US" sz="1700" b="1" dirty="0">
+              <a:rPr lang="en-US" sz="1800" b="1" dirty="0">
                 <a:solidFill>
                   <a:srgbClr val="211D1B"/>
                 </a:solidFill>
@@ -9174,9 +9957,9 @@
                 <a:ea typeface="Cambria" pitchFamily="34" charset="-122"/>
                 <a:cs typeface="Cambria" pitchFamily="34" charset="-120"/>
               </a:rPr>
-              <a:t>Trace-widget open rate  ·  Trace-to-cart conversion</a:t>
-            </a:r>
-            <a:endParaRPr lang="en-US" sz="1700" dirty="0"/>
+              <a:t>Trace-widget open rate · Trace-to-cart conversion</a:t>
+            </a:r>
+            <a:endParaRPr lang="en-US" sz="1800" dirty="0"/>
           </a:p>
         </p:txBody>
       </p:sp>
@@ -9188,8 +9971,8 @@
         </p:nvSpPr>
         <p:spPr>
           <a:xfrm>
-            <a:off x="960120" y="3959352"/>
-            <a:ext cx="9966960" cy="411480"/>
+            <a:off x="3383280" y="4005072"/>
+            <a:ext cx="8138160" cy="594360"/>
           </a:xfrm>
           <a:prstGeom prst="rect">
             <a:avLst/>
@@ -9203,7 +9986,7 @@
           <a:p>
             <a:pPr indent="0" marL="0">
               <a:lnSpc>
-                <a:spcPct val="110000"/>
+                <a:spcPct val="115000"/>
               </a:lnSpc>
               <a:buNone/>
             </a:pPr>
@@ -9230,12 +10013,12 @@
         </p:nvSpPr>
         <p:spPr>
           <a:xfrm>
-            <a:off x="640080" y="4617720"/>
-            <a:ext cx="10881360" cy="1280160"/>
+            <a:off x="640080" y="4892040"/>
+            <a:ext cx="10881360" cy="1417320"/>
           </a:xfrm>
           <a:prstGeom prst="roundRect">
             <a:avLst>
-              <a:gd name="adj" fmla="val 5714"/>
+              <a:gd name="adj" fmla="val 5161"/>
             </a:avLst>
           </a:prstGeom>
           <a:solidFill>
@@ -9257,11 +10040,13 @@
         </p:nvSpPr>
         <p:spPr>
           <a:xfrm>
-            <a:off x="932688" y="4800600"/>
-            <a:ext cx="146304" cy="146304"/>
-          </a:xfrm>
-          <a:prstGeom prst="ellipse">
-            <a:avLst/>
+            <a:off x="777240" y="5029200"/>
+            <a:ext cx="2011680" cy="1143000"/>
+          </a:xfrm>
+          <a:prstGeom prst="roundRect">
+            <a:avLst>
+              <a:gd name="adj" fmla="val 6400"/>
+            </a:avLst>
           </a:prstGeom>
           <a:solidFill>
             <a:srgbClr val="4B6B4F"/>
@@ -9277,8 +10062,8 @@
         </p:nvSpPr>
         <p:spPr>
           <a:xfrm>
-            <a:off x="1188720" y="4745736"/>
-            <a:ext cx="2743200" cy="274320"/>
+            <a:off x="868680" y="5029200"/>
+            <a:ext cx="1828800" cy="1143000"/>
           </a:xfrm>
           <a:prstGeom prst="rect">
             <a:avLst/>
@@ -9291,12 +10076,15 @@
           <a:lstStyle/>
           <a:p>
             <a:pPr indent="0" marL="0">
-              <a:buNone/>
-            </a:pPr>
-            <a:r>
-              <a:rPr lang="en-US" sz="1400" b="1" spc="100" kern="0" dirty="0">
-                <a:solidFill>
-                  <a:srgbClr val="4B6B4F"/>
+              <a:lnSpc>
+                <a:spcPct val="115000"/>
+              </a:lnSpc>
+              <a:buNone/>
+            </a:pPr>
+            <a:r>
+              <a:rPr lang="en-US" sz="1400" b="1" spc="50" kern="0" dirty="0">
+                <a:solidFill>
+                  <a:srgbClr val="F6F1EA"/>
                 </a:solidFill>
                 <a:latin typeface="Calibri" pitchFamily="34" charset="0"/>
                 <a:ea typeface="Calibri" pitchFamily="34" charset="-122"/>
@@ -9316,8 +10104,8 @@
         </p:nvSpPr>
         <p:spPr>
           <a:xfrm>
-            <a:off x="960120" y="5020056"/>
-            <a:ext cx="9966960" cy="365760"/>
+            <a:off x="3383280" y="5074920"/>
+            <a:ext cx="8138160" cy="502920"/>
           </a:xfrm>
           <a:prstGeom prst="rect">
             <a:avLst/>
@@ -9333,7 +10121,7 @@
               <a:buNone/>
             </a:pPr>
             <a:r>
-              <a:rPr lang="en-US" sz="1700" b="1" dirty="0">
+              <a:rPr lang="en-US" sz="1800" b="1" dirty="0">
                 <a:solidFill>
                   <a:srgbClr val="211D1B"/>
                 </a:solidFill>
@@ -9343,7 +10131,7 @@
               </a:rPr>
               <a:t>False-urgency rate</a:t>
             </a:r>
-            <a:endParaRPr lang="en-US" sz="1700" dirty="0"/>
+            <a:endParaRPr lang="en-US" sz="1800" dirty="0"/>
           </a:p>
         </p:txBody>
       </p:sp>
@@ -9355,8 +10143,8 @@
         </p:nvSpPr>
         <p:spPr>
           <a:xfrm>
-            <a:off x="960120" y="5422392"/>
-            <a:ext cx="9966960" cy="411480"/>
+            <a:off x="3383280" y="5605272"/>
+            <a:ext cx="8138160" cy="594360"/>
           </a:xfrm>
           <a:prstGeom prst="rect">
             <a:avLst/>
@@ -9370,7 +10158,7 @@
           <a:p>
             <a:pPr indent="0" marL="0">
               <a:lnSpc>
-                <a:spcPct val="110000"/>
+                <a:spcPct val="115000"/>
               </a:lnSpc>
               <a:buNone/>
             </a:pPr>

--- a/docs/deck/NL Myntra.pptx
+++ b/docs/deck/NL Myntra.pptx
@@ -2954,7 +2954,7 @@
                 <a:ea typeface="Calibri" pitchFamily="34" charset="-122"/>
                 <a:cs typeface="Calibri" pitchFamily="34" charset="-120"/>
               </a:rPr>
-              <a:t>Thin categories, wobbly numbers</a:t>
+              <a:t>Local-model consistency is weak</a:t>
             </a:r>
             <a:endParaRPr lang="en-US" sz="1400" dirty="0"/>
           </a:p>
@@ -2996,7 +2996,7 @@
                 <a:ea typeface="Calibri" pitchFamily="34" charset="-122"/>
                 <a:cs typeface="Calibri" pitchFamily="34" charset="-120"/>
               </a:rPr>
-              <a:t>fit_size / quality_trust / price_certainty rest on small samples (n=5–11); recall moved run to run (0.4→0.5→0.545).</a:t>
+              <a:t>If ever wired to live inference, inconsistent classification could show contradictory reasoning to the same user across visits — undermining trust in Decision Check specifically, not just a data-quality footnote.</a:t>
             </a:r>
             <a:endParaRPr lang="en-US" sz="1400" dirty="0"/>
           </a:p>
@@ -3038,7 +3038,7 @@
                 <a:ea typeface="Calibri" pitchFamily="34" charset="-122"/>
                 <a:cs typeface="Calibri" pitchFamily="34" charset="-120"/>
               </a:rPr>
-              <a:t>MITIGATION:  Treated as directional, disclosed in every writeup — never presented as exact.</a:t>
+              <a:t>MITIGATION:  Production path uses the stronger hosted model with retry-escalation; local is a documented fallback only.</a:t>
             </a:r>
             <a:endParaRPr lang="en-US" sz="1400" dirty="0"/>
           </a:p>
@@ -3163,7 +3163,7 @@
                 <a:ea typeface="Calibri" pitchFamily="34" charset="-122"/>
                 <a:cs typeface="Calibri" pitchFamily="34" charset="-120"/>
               </a:rPr>
-              <a:t>Corpus skews toward complaints</a:t>
+              <a:t>No mechanism brings users back</a:t>
             </a:r>
             <a:endParaRPr lang="en-US" sz="1400" dirty="0"/>
           </a:p>
@@ -3205,7 +3205,7 @@
                 <a:ea typeface="Calibri" pitchFamily="34" charset="-122"/>
                 <a:cs typeface="Calibri" pitchFamily="34" charset="-120"/>
               </a:rPr>
-              <a:t>Review-writers aren't representative; Reddit/YouTube/social scoped out for policy/time reasons.</a:t>
+              <a:t>Slide 1 names Re-encounter as a decomposition factor, but this MVP has zero feature addressing it — no notification, no reminder, nothing that resurfaces a saved item.</a:t>
             </a:r>
             <a:endParaRPr lang="en-US" sz="1400" dirty="0"/>
           </a:p>
@@ -3247,7 +3247,7 @@
                 <a:ea typeface="Calibri" pitchFamily="34" charset="-122"/>
                 <a:cs typeface="Calibri" pitchFamily="34" charset="-120"/>
               </a:rPr>
-              <a:t>MITIGATION:  Triangulated against survey (n=32) and interviews (n=6) — caught what the corpus alone would have missed.</a:t>
+              <a:t>MITIGATION:  Explicitly out of scope for this MVP — named here as the single most important next-build priority, not hidden.</a:t>
             </a:r>
             <a:endParaRPr lang="en-US" sz="1400" dirty="0"/>
           </a:p>
@@ -3372,7 +3372,7 @@
                 <a:ea typeface="Calibri" pitchFamily="34" charset="-122"/>
                 <a:cs typeface="Calibri" pitchFamily="34" charset="-120"/>
               </a:rPr>
-              <a:t>Local-model consistency is weak</a:t>
+              <a:t>Honest "nothing changes" could kill urgency</a:t>
             </a:r>
             <a:endParaRPr lang="en-US" sz="1400" dirty="0"/>
           </a:p>
@@ -3414,7 +3414,7 @@
                 <a:ea typeface="Calibri" pitchFamily="34" charset="-122"/>
                 <a:cs typeface="Calibri" pitchFamily="34" charset="-120"/>
               </a:rPr>
-              <a:t>E1 accuracy 0.875 vs. human labels, but κ=0.159 between the primary and backup classifiers.</a:t>
+              <a:t>The mirror image of the false-urgency guardrail (slide 9): if the tool is too passive, it could resolve uncertainty without ever prompting action at all.</a:t>
             </a:r>
             <a:endParaRPr lang="en-US" sz="1400" dirty="0"/>
           </a:p>
@@ -3456,7 +3456,7 @@
                 <a:ea typeface="Calibri" pitchFamily="34" charset="-122"/>
                 <a:cs typeface="Calibri" pitchFamily="34" charset="-120"/>
               </a:rPr>
-              <a:t>MITIGATION:  Production path uses the stronger hosted model with retry-escalation; local is a documented fallback only.</a:t>
+              <a:t>MITIGATION:  The existing trace-to-cart conversion leading indicator is designed to catch exactly this — high trace-opens with low cart-adds is the signal.</a:t>
             </a:r>
             <a:endParaRPr lang="en-US" sz="1400" dirty="0"/>
           </a:p>
@@ -3581,7 +3581,7 @@
                 <a:ea typeface="Calibri" pitchFamily="34" charset="-122"/>
                 <a:cs typeface="Calibri" pitchFamily="34" charset="-120"/>
               </a:rPr>
-              <a:t>Segment validation stayed exploratory</a:t>
+              <a:t>Evidence framing could feel like friction</a:t>
             </a:r>
             <a:endParaRPr lang="en-US" sz="1400" dirty="0"/>
           </a:p>
@@ -3623,7 +3623,7 @@
                 <a:ea typeface="Calibri" pitchFamily="34" charset="-122"/>
                 <a:cs typeface="Calibri" pitchFamily="34" charset="-120"/>
               </a:rPr>
-              <a:t>Interviews weren't targeted at one pre-chosen segment (the brief's Part 3 sequencing) — the evidence didn't support choosing one first.</a:t>
+              <a:t>Users who just want a fast decision may experience Decision Check's confidence/evidence framing as an added analysis step, not a shortcut.</a:t>
             </a:r>
             <a:endParaRPr lang="en-US" sz="1400" dirty="0"/>
           </a:p>
@@ -3665,7 +3665,7 @@
                 <a:ea typeface="Calibri" pitchFamily="34" charset="-122"/>
                 <a:cs typeface="Calibri" pitchFamily="34" charset="-120"/>
               </a:rPr>
-              <a:t>MITIGATION:  Disclosed plainly (docs/decisions/opportunity-selection.md); the deck's chosen segment (slide 6) rests on the strongest available evidence anyway.</a:t>
+              <a:t>MITIGATION:  "Move to cart" stays the primary, always-visible path; Decision Check is opt-in/expandable, never a blocker.</a:t>
             </a:r>
             <a:endParaRPr lang="en-US" sz="1400" dirty="0"/>
           </a:p>
@@ -5739,7 +5739,48 @@
                 <a:ea typeface="Calibri" pitchFamily="34" charset="-122"/>
                 <a:cs typeface="Calibri" pitchFamily="34" charset="-120"/>
               </a:rPr>
-              <a:t>Adds two categories beyond the original 7 — social_validation and comparison_shopping (v3, docs/codebook.md) — closing a real gap against the brief's own question list. Neither has corpus data yet; reported honestly, not silently implied.</a:t>
+              <a:t>Adds two categories beyond the original 7 — social_validation and comparison_shopping (v3, </a:t>
+            </a:r>
+            <a:pPr indent="0" marL="0">
+              <a:lnSpc>
+                <a:spcPct val="115000"/>
+              </a:lnSpc>
+              <a:buNone/>
+            </a:pPr>
+            <a:r>
+              <a:rPr lang="en-US" sz="1400" i="1" u="sng" dirty="0">
+                <a:solidFill>
+                  <a:srgbClr val="6B6259"/>
+                </a:solidFill>
+                <a:latin typeface="Calibri" pitchFamily="34" charset="0"/>
+                <a:ea typeface="Calibri" pitchFamily="34" charset="-122"/>
+                <a:cs typeface="Calibri" pitchFamily="34" charset="-120"/>
+                <a:hlinkClick r:id="rId2" invalidUrl="" action="" tgtFrame="" tooltip="" history="1" highlightClick="0" endSnd="0">
+                  <a:extLst>
+                    <a:ext uri="{A12FA001-AC4F-418D-AE19-62706E023703}">
+                      <ahyp:hlinkClr xmlns:ahyp="http://schemas.microsoft.com/office/drawing/2018/hyperlinkcolor" val="tx"/>
+                    </a:ext>
+                  </a:extLst>
+                </a:hlinkClick>
+              </a:rPr>
+              <a:t>docs/codebook.md</a:t>
+            </a:r>
+            <a:pPr indent="0" marL="0">
+              <a:lnSpc>
+                <a:spcPct val="115000"/>
+              </a:lnSpc>
+              <a:buNone/>
+            </a:pPr>
+            <a:r>
+              <a:rPr lang="en-US" sz="1400" i="1" dirty="0">
+                <a:solidFill>
+                  <a:srgbClr val="6B6259"/>
+                </a:solidFill>
+                <a:latin typeface="Calibri" pitchFamily="34" charset="0"/>
+                <a:ea typeface="Calibri" pitchFamily="34" charset="-122"/>
+                <a:cs typeface="Calibri" pitchFamily="34" charset="-120"/>
+              </a:rPr>
+              <a:t>) — closing a real gap against the brief's own question list. Neither has corpus data yet; reported honestly, not silently implied.</a:t>
             </a:r>
             <a:endParaRPr lang="en-US" sz="1400" dirty="0"/>
           </a:p>
@@ -6025,7 +6066,7 @@
                 <a:latin typeface="Calibri" pitchFamily="34" charset="0"/>
                 <a:ea typeface="Calibri" pitchFamily="34" charset="-122"/>
                 <a:cs typeface="Calibri" pitchFamily="34" charset="-120"/>
-                <a:hlinkClick r:id="rId2" invalidUrl="" action="" tgtFrame="" tooltip="" history="1" highlightClick="0" endSnd="0">
+                <a:hlinkClick r:id="rId3" invalidUrl="" action="" tgtFrame="" tooltip="" history="1" highlightClick="0" endSnd="0">
                   <a:extLst>
                     <a:ext uri="{A12FA001-AC4F-418D-AE19-62706E023703}">
                       <ahyp:hlinkClr xmlns:ahyp="http://schemas.microsoft.com/office/drawing/2018/hyperlinkcolor" val="tx"/>
@@ -7764,7 +7805,42 @@
                 <a:ea typeface="Calibri" pitchFamily="34" charset="-122"/>
                 <a:cs typeface="Calibri" pitchFamily="34" charset="-120"/>
               </a:rPr>
-              <a:t>Full chain, in writing: docs/decisions/problem-definition.md — every link traces to a file already in this repo, not a narrative built after the fact.</a:t>
+              <a:t>Full chain, in writing: </a:t>
+            </a:r>
+            <a:pPr indent="0" marL="0">
+              <a:buNone/>
+            </a:pPr>
+            <a:r>
+              <a:rPr lang="en-US" sz="1400" i="1" u="sng" dirty="0">
+                <a:solidFill>
+                  <a:srgbClr val="6B6259"/>
+                </a:solidFill>
+                <a:latin typeface="Calibri" pitchFamily="34" charset="0"/>
+                <a:ea typeface="Calibri" pitchFamily="34" charset="-122"/>
+                <a:cs typeface="Calibri" pitchFamily="34" charset="-120"/>
+                <a:hlinkClick r:id="rId1" invalidUrl="" action="" tgtFrame="" tooltip="" history="1" highlightClick="0" endSnd="0">
+                  <a:extLst>
+                    <a:ext uri="{A12FA001-AC4F-418D-AE19-62706E023703}">
+                      <ahyp:hlinkClr xmlns:ahyp="http://schemas.microsoft.com/office/drawing/2018/hyperlinkcolor" val="tx"/>
+                    </a:ext>
+                  </a:extLst>
+                </a:hlinkClick>
+              </a:rPr>
+              <a:t>docs/decisions/problem-definition.md</a:t>
+            </a:r>
+            <a:pPr indent="0" marL="0">
+              <a:buNone/>
+            </a:pPr>
+            <a:r>
+              <a:rPr lang="en-US" sz="1400" i="1" dirty="0">
+                <a:solidFill>
+                  <a:srgbClr val="6B6259"/>
+                </a:solidFill>
+                <a:latin typeface="Calibri" pitchFamily="34" charset="0"/>
+                <a:ea typeface="Calibri" pitchFamily="34" charset="-122"/>
+                <a:cs typeface="Calibri" pitchFamily="34" charset="-120"/>
+              </a:rPr>
+              <a:t> — every link traces to a file already in this repo, not a narrative built after the fact.</a:t>
             </a:r>
             <a:endParaRPr lang="en-US" sz="1400" dirty="0"/>
           </a:p>
@@ -8960,7 +9036,48 @@
                 <a:ea typeface="Calibri" pitchFamily="34" charset="-122"/>
                 <a:cs typeface="Calibri" pitchFamily="34" charset="-120"/>
               </a:rPr>
-              <a:t>Chosen for being most fully evidenced and buildable — not for being the only real barrier. quality_trust, fit_size, and availability_decay are each independently confirmed too (docs/decisions/opportunity-selection.md); availability_decay has the strongest cross-method triangulation of all four (6/6 interviews, 32/32 survey).</a:t>
+              <a:t>Chosen for being most fully evidenced and buildable — not for being the only real barrier. quality_trust, fit_size, and availability_decay are each independently confirmed too (</a:t>
+            </a:r>
+            <a:pPr indent="0" marL="0">
+              <a:lnSpc>
+                <a:spcPct val="110000"/>
+              </a:lnSpc>
+              <a:buNone/>
+            </a:pPr>
+            <a:r>
+              <a:rPr lang="en-US" sz="1400" i="1" u="sng" dirty="0">
+                <a:solidFill>
+                  <a:srgbClr val="6B6259"/>
+                </a:solidFill>
+                <a:latin typeface="Calibri" pitchFamily="34" charset="0"/>
+                <a:ea typeface="Calibri" pitchFamily="34" charset="-122"/>
+                <a:cs typeface="Calibri" pitchFamily="34" charset="-120"/>
+                <a:hlinkClick r:id="rId1" invalidUrl="" action="" tgtFrame="" tooltip="" history="1" highlightClick="0" endSnd="0">
+                  <a:extLst>
+                    <a:ext uri="{A12FA001-AC4F-418D-AE19-62706E023703}">
+                      <ahyp:hlinkClr xmlns:ahyp="http://schemas.microsoft.com/office/drawing/2018/hyperlinkcolor" val="tx"/>
+                    </a:ext>
+                  </a:extLst>
+                </a:hlinkClick>
+              </a:rPr>
+              <a:t>docs/decisions/opportunity-selection.md</a:t>
+            </a:r>
+            <a:pPr indent="0" marL="0">
+              <a:lnSpc>
+                <a:spcPct val="110000"/>
+              </a:lnSpc>
+              <a:buNone/>
+            </a:pPr>
+            <a:r>
+              <a:rPr lang="en-US" sz="1400" i="1" dirty="0">
+                <a:solidFill>
+                  <a:srgbClr val="6B6259"/>
+                </a:solidFill>
+                <a:latin typeface="Calibri" pitchFamily="34" charset="0"/>
+                <a:ea typeface="Calibri" pitchFamily="34" charset="-122"/>
+                <a:cs typeface="Calibri" pitchFamily="34" charset="-120"/>
+              </a:rPr>
+              <a:t>); availability_decay has the strongest cross-method triangulation of all four (6/6 interviews, 32/32 survey).</a:t>
             </a:r>
             <a:endParaRPr lang="en-US" sz="1400" dirty="0"/>
           </a:p>

--- a/docs/deck/NL Myntra.pptx
+++ b/docs/deck/NL Myntra.pptx
@@ -1944,7 +1944,7 @@
     <p:bg>
       <p:bgPr>
         <a:solidFill>
-          <a:srgbClr val="211D1B"/>
+          <a:srgbClr val="F6F1EA"/>
         </a:solidFill>
       </p:bgPr>
     </p:bg>
@@ -1987,9 +1987,9 @@
               <a:buNone/>
             </a:pPr>
             <a:r>
-              <a:rPr lang="en-US" sz="1400" spc="200" kern="0" dirty="0">
-                <a:solidFill>
-                  <a:srgbClr val="C97B72"/>
+              <a:rPr lang="en-US" sz="1400" b="1" spc="200" kern="0" dirty="0">
+                <a:solidFill>
+                  <a:srgbClr val="5B3A4A"/>
                 </a:solidFill>
                 <a:latin typeface="Calibri" pitchFamily="34" charset="0"/>
                 <a:ea typeface="Calibri" pitchFamily="34" charset="-122"/>
@@ -2031,7 +2031,7 @@
             <a:r>
               <a:rPr lang="en-US" sz="3000" b="1" dirty="0">
                 <a:solidFill>
-                  <a:srgbClr val="F6F1EA"/>
+                  <a:srgbClr val="211D1B"/>
                 </a:solidFill>
                 <a:latin typeface="Cambria" pitchFamily="34" charset="0"/>
                 <a:ea typeface="Cambria" pitchFamily="34" charset="-122"/>
@@ -2070,7 +2070,7 @@
             <a:r>
               <a:rPr lang="en-US" sz="1500" dirty="0">
                 <a:solidFill>
-                  <a:srgbClr val="D9CFC4"/>
+                  <a:srgbClr val="6B6259"/>
                 </a:solidFill>
                 <a:latin typeface="Calibri" pitchFamily="34" charset="0"/>
                 <a:ea typeface="Calibri" pitchFamily="34" charset="-122"/>
@@ -2651,11 +2651,11 @@
             </a:avLst>
           </a:prstGeom>
           <a:solidFill>
-            <a:srgbClr val="2C2622"/>
+            <a:srgbClr val="FFFFFF"/>
           </a:solidFill>
           <a:ln w="12700">
             <a:solidFill>
-              <a:srgbClr val="463D36"/>
+              <a:srgbClr val="E3D9CB"/>
             </a:solidFill>
             <a:prstDash val="solid"/>
           </a:ln>
@@ -2691,7 +2691,7 @@
             <a:r>
               <a:rPr lang="en-US" sz="1400" dirty="0">
                 <a:solidFill>
-                  <a:srgbClr val="D9CFC4"/>
+                  <a:srgbClr val="3A342E"/>
                 </a:solidFill>
                 <a:latin typeface="Calibri" pitchFamily="34" charset="0"/>
                 <a:ea typeface="Calibri" pitchFamily="34" charset="-122"/>
@@ -2730,7 +2730,7 @@
             <a:r>
               <a:rPr lang="en-US" sz="1400" i="1" dirty="0">
                 <a:solidFill>
-                  <a:srgbClr val="9A9088"/>
+                  <a:srgbClr val="8A8078"/>
                 </a:solidFill>
                 <a:latin typeface="Calibri" pitchFamily="34" charset="0"/>
                 <a:ea typeface="Calibri" pitchFamily="34" charset="-122"/>
@@ -2769,7 +2769,7 @@
             <a:r>
               <a:rPr lang="en-US" sz="1400" dirty="0">
                 <a:solidFill>
-                  <a:srgbClr val="9A9088"/>
+                  <a:srgbClr val="8A8078"/>
                 </a:solidFill>
                 <a:latin typeface="Calibri" pitchFamily="34" charset="0"/>
                 <a:ea typeface="Calibri" pitchFamily="34" charset="-122"/>
@@ -2808,7 +2808,7 @@
             <a:r>
               <a:rPr lang="en-US" sz="1400" dirty="0">
                 <a:solidFill>
-                  <a:srgbClr val="9A9088"/>
+                  <a:srgbClr val="8A8078"/>
                 </a:solidFill>
                 <a:latin typeface="Calibri" pitchFamily="34" charset="0"/>
                 <a:ea typeface="Calibri" pitchFamily="34" charset="-122"/>
@@ -2834,7 +2834,7 @@
     <p:bg>
       <p:bgPr>
         <a:solidFill>
-          <a:srgbClr val="211D1B"/>
+          <a:srgbClr val="F6F1EA"/>
         </a:solidFill>
       </p:bgPr>
     </p:bg>
@@ -2882,7 +2882,7 @@
             <a:r>
               <a:rPr lang="en-US" sz="2800" b="1" dirty="0">
                 <a:solidFill>
-                  <a:srgbClr val="F6F1EA"/>
+                  <a:srgbClr val="211D1B"/>
                 </a:solidFill>
                 <a:latin typeface="Cambria" pitchFamily="34" charset="0"/>
                 <a:ea typeface="Cambria" pitchFamily="34" charset="-122"/>
@@ -2911,11 +2911,11 @@
             </a:avLst>
           </a:prstGeom>
           <a:solidFill>
-            <a:srgbClr val="2C2622"/>
+            <a:srgbClr val="FFFFFF"/>
           </a:solidFill>
           <a:ln w="12700">
             <a:solidFill>
-              <a:srgbClr val="463D36"/>
+              <a:srgbClr val="E3D9CB"/>
             </a:solidFill>
             <a:prstDash val="solid"/>
           </a:ln>
@@ -2948,7 +2948,7 @@
             <a:r>
               <a:rPr lang="en-US" sz="1400" b="1" dirty="0">
                 <a:solidFill>
-                  <a:srgbClr val="C97B72"/>
+                  <a:srgbClr val="5B3A4A"/>
                 </a:solidFill>
                 <a:latin typeface="Calibri" pitchFamily="34" charset="0"/>
                 <a:ea typeface="Calibri" pitchFamily="34" charset="-122"/>
@@ -2990,7 +2990,7 @@
             <a:r>
               <a:rPr lang="en-US" sz="1400" dirty="0">
                 <a:solidFill>
-                  <a:srgbClr val="B9AEA2"/>
+                  <a:srgbClr val="3A342E"/>
                 </a:solidFill>
                 <a:latin typeface="Calibri" pitchFamily="34" charset="0"/>
                 <a:ea typeface="Calibri" pitchFamily="34" charset="-122"/>
@@ -3032,7 +3032,7 @@
             <a:r>
               <a:rPr lang="en-US" sz="1400" dirty="0">
                 <a:solidFill>
-                  <a:srgbClr val="8FAF93"/>
+                  <a:srgbClr val="4B6B4F"/>
                 </a:solidFill>
                 <a:latin typeface="Calibri" pitchFamily="34" charset="0"/>
                 <a:ea typeface="Calibri" pitchFamily="34" charset="-122"/>
@@ -3120,11 +3120,11 @@
             </a:avLst>
           </a:prstGeom>
           <a:solidFill>
-            <a:srgbClr val="2C2622"/>
+            <a:srgbClr val="FFFFFF"/>
           </a:solidFill>
           <a:ln w="12700">
             <a:solidFill>
-              <a:srgbClr val="463D36"/>
+              <a:srgbClr val="E3D9CB"/>
             </a:solidFill>
             <a:prstDash val="solid"/>
           </a:ln>
@@ -3157,7 +3157,7 @@
             <a:r>
               <a:rPr lang="en-US" sz="1400" b="1" dirty="0">
                 <a:solidFill>
-                  <a:srgbClr val="C97B72"/>
+                  <a:srgbClr val="5B3A4A"/>
                 </a:solidFill>
                 <a:latin typeface="Calibri" pitchFamily="34" charset="0"/>
                 <a:ea typeface="Calibri" pitchFamily="34" charset="-122"/>
@@ -3199,7 +3199,7 @@
             <a:r>
               <a:rPr lang="en-US" sz="1400" dirty="0">
                 <a:solidFill>
-                  <a:srgbClr val="B9AEA2"/>
+                  <a:srgbClr val="3A342E"/>
                 </a:solidFill>
                 <a:latin typeface="Calibri" pitchFamily="34" charset="0"/>
                 <a:ea typeface="Calibri" pitchFamily="34" charset="-122"/>
@@ -3241,7 +3241,7 @@
             <a:r>
               <a:rPr lang="en-US" sz="1400" dirty="0">
                 <a:solidFill>
-                  <a:srgbClr val="8FAF93"/>
+                  <a:srgbClr val="4B6B4F"/>
                 </a:solidFill>
                 <a:latin typeface="Calibri" pitchFamily="34" charset="0"/>
                 <a:ea typeface="Calibri" pitchFamily="34" charset="-122"/>
@@ -3329,11 +3329,11 @@
             </a:avLst>
           </a:prstGeom>
           <a:solidFill>
-            <a:srgbClr val="2C2622"/>
+            <a:srgbClr val="FFFFFF"/>
           </a:solidFill>
           <a:ln w="12700">
             <a:solidFill>
-              <a:srgbClr val="463D36"/>
+              <a:srgbClr val="E3D9CB"/>
             </a:solidFill>
             <a:prstDash val="solid"/>
           </a:ln>
@@ -3366,7 +3366,7 @@
             <a:r>
               <a:rPr lang="en-US" sz="1400" b="1" dirty="0">
                 <a:solidFill>
-                  <a:srgbClr val="C97B72"/>
+                  <a:srgbClr val="5B3A4A"/>
                 </a:solidFill>
                 <a:latin typeface="Calibri" pitchFamily="34" charset="0"/>
                 <a:ea typeface="Calibri" pitchFamily="34" charset="-122"/>
@@ -3408,7 +3408,7 @@
             <a:r>
               <a:rPr lang="en-US" sz="1400" dirty="0">
                 <a:solidFill>
-                  <a:srgbClr val="B9AEA2"/>
+                  <a:srgbClr val="3A342E"/>
                 </a:solidFill>
                 <a:latin typeface="Calibri" pitchFamily="34" charset="0"/>
                 <a:ea typeface="Calibri" pitchFamily="34" charset="-122"/>
@@ -3450,7 +3450,7 @@
             <a:r>
               <a:rPr lang="en-US" sz="1400" dirty="0">
                 <a:solidFill>
-                  <a:srgbClr val="8FAF93"/>
+                  <a:srgbClr val="4B6B4F"/>
                 </a:solidFill>
                 <a:latin typeface="Calibri" pitchFamily="34" charset="0"/>
                 <a:ea typeface="Calibri" pitchFamily="34" charset="-122"/>
@@ -3538,11 +3538,11 @@
             </a:avLst>
           </a:prstGeom>
           <a:solidFill>
-            <a:srgbClr val="2C2622"/>
+            <a:srgbClr val="FFFFFF"/>
           </a:solidFill>
           <a:ln w="12700">
             <a:solidFill>
-              <a:srgbClr val="463D36"/>
+              <a:srgbClr val="E3D9CB"/>
             </a:solidFill>
             <a:prstDash val="solid"/>
           </a:ln>
@@ -3575,7 +3575,7 @@
             <a:r>
               <a:rPr lang="en-US" sz="1400" b="1" dirty="0">
                 <a:solidFill>
-                  <a:srgbClr val="C97B72"/>
+                  <a:srgbClr val="5B3A4A"/>
                 </a:solidFill>
                 <a:latin typeface="Calibri" pitchFamily="34" charset="0"/>
                 <a:ea typeface="Calibri" pitchFamily="34" charset="-122"/>
@@ -3617,7 +3617,7 @@
             <a:r>
               <a:rPr lang="en-US" sz="1400" dirty="0">
                 <a:solidFill>
-                  <a:srgbClr val="B9AEA2"/>
+                  <a:srgbClr val="3A342E"/>
                 </a:solidFill>
                 <a:latin typeface="Calibri" pitchFamily="34" charset="0"/>
                 <a:ea typeface="Calibri" pitchFamily="34" charset="-122"/>
@@ -3659,7 +3659,7 @@
             <a:r>
               <a:rPr lang="en-US" sz="1400" dirty="0">
                 <a:solidFill>
-                  <a:srgbClr val="8FAF93"/>
+                  <a:srgbClr val="4B6B4F"/>
                 </a:solidFill>
                 <a:latin typeface="Calibri" pitchFamily="34" charset="0"/>
                 <a:ea typeface="Calibri" pitchFamily="34" charset="-122"/>
@@ -3771,7 +3771,7 @@
             <a:r>
               <a:rPr lang="en-US" sz="1400" u="sng" dirty="0">
                 <a:solidFill>
-                  <a:srgbClr val="F6F1EA"/>
+                  <a:srgbClr val="211D1B"/>
                 </a:solidFill>
                 <a:latin typeface="Calibri" pitchFamily="34" charset="0"/>
                 <a:ea typeface="Calibri" pitchFamily="34" charset="-122"/>
@@ -3817,7 +3817,7 @@
             <a:r>
               <a:rPr lang="en-US" sz="1400" dirty="0">
                 <a:solidFill>
-                  <a:srgbClr val="9A9088"/>
+                  <a:srgbClr val="8A8078"/>
                 </a:solidFill>
                 <a:latin typeface="Calibri" pitchFamily="34" charset="0"/>
                 <a:ea typeface="Calibri" pitchFamily="34" charset="-122"/>
@@ -3856,7 +3856,7 @@
             <a:r>
               <a:rPr lang="en-US" sz="1400" dirty="0">
                 <a:solidFill>
-                  <a:srgbClr val="9A9088"/>
+                  <a:srgbClr val="8A8078"/>
                 </a:solidFill>
                 <a:latin typeface="Calibri" pitchFamily="34" charset="0"/>
                 <a:ea typeface="Calibri" pitchFamily="34" charset="-122"/>
@@ -10005,7 +10005,7 @@
         <p:spPr>
           <a:xfrm>
             <a:off x="640080" y="457200"/>
-            <a:ext cx="10911535" cy="731520"/>
+            <a:ext cx="10911535" cy="502920"/>
           </a:xfrm>
           <a:prstGeom prst="rect">
             <a:avLst/>
@@ -10032,7 +10032,7 @@
                 <a:ea typeface="Cambria" pitchFamily="34" charset="-122"/>
                 <a:cs typeface="Cambria" pitchFamily="34" charset="-120"/>
               </a:rPr>
-              <a:t>Live MVP: the problem, resolved end to end</a:t>
+              <a:t>Live MVP walkthrough</a:t>
             </a:r>
             <a:endParaRPr lang="en-US" sz="2800" dirty="0"/>
           </a:p>
@@ -10046,622 +10046,12 @@
         </p:nvSpPr>
         <p:spPr>
           <a:xfrm>
-            <a:off x="2246224" y="1225296"/>
-            <a:ext cx="1664208" cy="2212848"/>
+            <a:off x="7406640" y="457200"/>
+            <a:ext cx="4114800" cy="457200"/>
           </a:xfrm>
           <a:prstGeom prst="roundRect">
             <a:avLst>
-              <a:gd name="adj" fmla="val 7692"/>
-            </a:avLst>
-          </a:prstGeom>
-          <a:solidFill>
-            <a:srgbClr val="211D1B"/>
-          </a:solidFill>
-          <a:ln/>
-        </p:spPr>
-      </p:sp>
-      <p:pic>
-        <p:nvPicPr>
-          <p:cNvPr id="4" name="Image 0" descr="C:\Users\sanka\Documents\Projects\NL-Myntra Graduation Project\docs\deck-assets\01-persona-picker-expanded.png">    </p:cNvPr>
-          <p:cNvPicPr>
-            <a:picLocks noChangeAspect="1"/>
-          </p:cNvPicPr>
-          <p:nvPr/>
-        </p:nvPicPr>
-        <p:blipFill>
-          <a:blip r:embed="rId1"/>
-          <a:srcRect l="0" r="0" t="0" b="0"/>
-          <a:stretch/>
-        </p:blipFill>
-        <p:spPr>
-          <a:xfrm>
-            <a:off x="2301088" y="1280160"/>
-            <a:ext cx="1554480" cy="2103120"/>
-          </a:xfrm>
-          <a:prstGeom prst="rect">
-            <a:avLst/>
-          </a:prstGeom>
-        </p:spPr>
-      </p:pic>
-      <p:sp>
-        <p:nvSpPr>
-          <p:cNvPr id="5" name="Text 2"/>
-          <p:cNvSpPr txBox="1"/>
-          <p:nvPr/>
-        </p:nvSpPr>
-        <p:spPr>
-          <a:xfrm>
-            <a:off x="2072488" y="3474720"/>
-            <a:ext cx="2011680" cy="320040"/>
-          </a:xfrm>
-          <a:prstGeom prst="rect">
-            <a:avLst/>
-          </a:prstGeom>
-          <a:noFill/>
-          <a:ln/>
-        </p:spPr>
-        <p:txBody>
-          <a:bodyPr wrap="square" lIns="0" tIns="0" rIns="0" bIns="0" rtlCol="0" anchor="ctr"/>
-          <a:lstStyle/>
-          <a:p>
-            <a:pPr algn="ctr" indent="0" marL="0">
-              <a:lnSpc>
-                <a:spcPct val="105000"/>
-              </a:lnSpc>
-              <a:buNone/>
-            </a:pPr>
-            <a:r>
-              <a:rPr lang="en-US" sz="1400" b="1" dirty="0">
-                <a:solidFill>
-                  <a:srgbClr val="211D1B"/>
-                </a:solidFill>
-                <a:latin typeface="Calibri" pitchFamily="34" charset="0"/>
-                <a:ea typeface="Calibri" pitchFamily="34" charset="-122"/>
-                <a:cs typeface="Calibri" pitchFamily="34" charset="-120"/>
-              </a:rPr>
-              <a:t>Persona Picker</a:t>
-            </a:r>
-            <a:endParaRPr lang="en-US" sz="1400" dirty="0"/>
-          </a:p>
-        </p:txBody>
-      </p:sp>
-      <p:sp>
-        <p:nvSpPr>
-          <p:cNvPr id="6" name="Text 3"/>
-          <p:cNvSpPr txBox="1"/>
-          <p:nvPr/>
-        </p:nvSpPr>
-        <p:spPr>
-          <a:xfrm>
-            <a:off x="3855568" y="1280160"/>
-            <a:ext cx="457200" cy="2103120"/>
-          </a:xfrm>
-          <a:prstGeom prst="rect">
-            <a:avLst/>
-          </a:prstGeom>
-          <a:noFill/>
-          <a:ln/>
-        </p:spPr>
-        <p:txBody>
-          <a:bodyPr wrap="square" lIns="0" tIns="0" rIns="0" bIns="0" rtlCol="0" anchor="ctr"/>
-          <a:lstStyle/>
-          <a:p>
-            <a:pPr algn="ctr" indent="0" marL="0">
-              <a:buNone/>
-            </a:pPr>
-            <a:r>
-              <a:rPr lang="en-US" sz="1600" dirty="0">
-                <a:solidFill>
-                  <a:srgbClr val="B5822A"/>
-                </a:solidFill>
-                <a:latin typeface="Calibri" pitchFamily="34" charset="0"/>
-                <a:ea typeface="Calibri" pitchFamily="34" charset="-122"/>
-                <a:cs typeface="Calibri" pitchFamily="34" charset="-120"/>
-              </a:rPr>
-              <a:t>→</a:t>
-            </a:r>
-            <a:endParaRPr lang="en-US" sz="1600" dirty="0"/>
-          </a:p>
-        </p:txBody>
-      </p:sp>
-      <p:sp>
-        <p:nvSpPr>
-          <p:cNvPr id="7" name="Shape 4"/>
-          <p:cNvSpPr/>
-          <p:nvPr/>
-        </p:nvSpPr>
-        <p:spPr>
-          <a:xfrm>
-            <a:off x="4257904" y="1225296"/>
-            <a:ext cx="1664208" cy="2212848"/>
-          </a:xfrm>
-          <a:prstGeom prst="roundRect">
-            <a:avLst>
-              <a:gd name="adj" fmla="val 7692"/>
-            </a:avLst>
-          </a:prstGeom>
-          <a:solidFill>
-            <a:srgbClr val="211D1B"/>
-          </a:solidFill>
-          <a:ln/>
-        </p:spPr>
-      </p:sp>
-      <p:pic>
-        <p:nvPicPr>
-          <p:cNvPr id="8" name="Image 1" descr="C:\Users\sanka\Documents\Projects\NL-Myntra Graduation Project\docs\deck-assets\02-wishlist-intelligence.png">    </p:cNvPr>
-          <p:cNvPicPr>
-            <a:picLocks noChangeAspect="1"/>
-          </p:cNvPicPr>
-          <p:nvPr/>
-        </p:nvPicPr>
-        <p:blipFill>
-          <a:blip r:embed="rId2"/>
-          <a:srcRect l="0" r="0" t="0" b="0"/>
-          <a:stretch/>
-        </p:blipFill>
-        <p:spPr>
-          <a:xfrm>
-            <a:off x="4312768" y="1280160"/>
-            <a:ext cx="1554480" cy="2103120"/>
-          </a:xfrm>
-          <a:prstGeom prst="rect">
-            <a:avLst/>
-          </a:prstGeom>
-        </p:spPr>
-      </p:pic>
-      <p:sp>
-        <p:nvSpPr>
-          <p:cNvPr id="9" name="Text 5"/>
-          <p:cNvSpPr txBox="1"/>
-          <p:nvPr/>
-        </p:nvSpPr>
-        <p:spPr>
-          <a:xfrm>
-            <a:off x="4084168" y="3474720"/>
-            <a:ext cx="2011680" cy="320040"/>
-          </a:xfrm>
-          <a:prstGeom prst="rect">
-            <a:avLst/>
-          </a:prstGeom>
-          <a:noFill/>
-          <a:ln/>
-        </p:spPr>
-        <p:txBody>
-          <a:bodyPr wrap="square" lIns="0" tIns="0" rIns="0" bIns="0" rtlCol="0" anchor="ctr"/>
-          <a:lstStyle/>
-          <a:p>
-            <a:pPr algn="ctr" indent="0" marL="0">
-              <a:lnSpc>
-                <a:spcPct val="105000"/>
-              </a:lnSpc>
-              <a:buNone/>
-            </a:pPr>
-            <a:r>
-              <a:rPr lang="en-US" sz="1400" b="1" dirty="0">
-                <a:solidFill>
-                  <a:srgbClr val="211D1B"/>
-                </a:solidFill>
-                <a:latin typeface="Calibri" pitchFamily="34" charset="0"/>
-                <a:ea typeface="Calibri" pitchFamily="34" charset="-122"/>
-                <a:cs typeface="Calibri" pitchFamily="34" charset="-120"/>
-              </a:rPr>
-              <a:t>Wishlist Intelligence</a:t>
-            </a:r>
-            <a:endParaRPr lang="en-US" sz="1400" dirty="0"/>
-          </a:p>
-        </p:txBody>
-      </p:sp>
-      <p:sp>
-        <p:nvSpPr>
-          <p:cNvPr id="10" name="Text 6"/>
-          <p:cNvSpPr txBox="1"/>
-          <p:nvPr/>
-        </p:nvSpPr>
-        <p:spPr>
-          <a:xfrm>
-            <a:off x="5867248" y="1280160"/>
-            <a:ext cx="457200" cy="2103120"/>
-          </a:xfrm>
-          <a:prstGeom prst="rect">
-            <a:avLst/>
-          </a:prstGeom>
-          <a:noFill/>
-          <a:ln/>
-        </p:spPr>
-        <p:txBody>
-          <a:bodyPr wrap="square" lIns="0" tIns="0" rIns="0" bIns="0" rtlCol="0" anchor="ctr"/>
-          <a:lstStyle/>
-          <a:p>
-            <a:pPr algn="ctr" indent="0" marL="0">
-              <a:buNone/>
-            </a:pPr>
-            <a:r>
-              <a:rPr lang="en-US" sz="1600" dirty="0">
-                <a:solidFill>
-                  <a:srgbClr val="B5822A"/>
-                </a:solidFill>
-                <a:latin typeface="Calibri" pitchFamily="34" charset="0"/>
-                <a:ea typeface="Calibri" pitchFamily="34" charset="-122"/>
-                <a:cs typeface="Calibri" pitchFamily="34" charset="-120"/>
-              </a:rPr>
-              <a:t>→</a:t>
-            </a:r>
-            <a:endParaRPr lang="en-US" sz="1600" dirty="0"/>
-          </a:p>
-        </p:txBody>
-      </p:sp>
-      <p:sp>
-        <p:nvSpPr>
-          <p:cNvPr id="11" name="Shape 7"/>
-          <p:cNvSpPr/>
-          <p:nvPr/>
-        </p:nvSpPr>
-        <p:spPr>
-          <a:xfrm>
-            <a:off x="6269584" y="1225296"/>
-            <a:ext cx="1664208" cy="2212848"/>
-          </a:xfrm>
-          <a:prstGeom prst="roundRect">
-            <a:avLst>
-              <a:gd name="adj" fmla="val 7692"/>
-            </a:avLst>
-          </a:prstGeom>
-          <a:solidFill>
-            <a:srgbClr val="211D1B"/>
-          </a:solidFill>
-          <a:ln/>
-        </p:spPr>
-      </p:sp>
-      <p:pic>
-        <p:nvPicPr>
-          <p:cNvPr id="12" name="Image 2" descr="C:\Users\sanka\Documents\Projects\NL-Myntra Graduation Project\docs\deck-assets\03-item-detail-price-box.png">    </p:cNvPr>
-          <p:cNvPicPr>
-            <a:picLocks noChangeAspect="1"/>
-          </p:cNvPicPr>
-          <p:nvPr/>
-        </p:nvPicPr>
-        <p:blipFill>
-          <a:blip r:embed="rId3"/>
-          <a:srcRect l="0" r="0" t="0" b="0"/>
-          <a:stretch/>
-        </p:blipFill>
-        <p:spPr>
-          <a:xfrm>
-            <a:off x="6324448" y="1280160"/>
-            <a:ext cx="1554480" cy="2103120"/>
-          </a:xfrm>
-          <a:prstGeom prst="rect">
-            <a:avLst/>
-          </a:prstGeom>
-        </p:spPr>
-      </p:pic>
-      <p:sp>
-        <p:nvSpPr>
-          <p:cNvPr id="13" name="Text 8"/>
-          <p:cNvSpPr txBox="1"/>
-          <p:nvPr/>
-        </p:nvSpPr>
-        <p:spPr>
-          <a:xfrm>
-            <a:off x="6095848" y="3474720"/>
-            <a:ext cx="2011680" cy="320040"/>
-          </a:xfrm>
-          <a:prstGeom prst="rect">
-            <a:avLst/>
-          </a:prstGeom>
-          <a:noFill/>
-          <a:ln/>
-        </p:spPr>
-        <p:txBody>
-          <a:bodyPr wrap="square" lIns="0" tIns="0" rIns="0" bIns="0" rtlCol="0" anchor="ctr"/>
-          <a:lstStyle/>
-          <a:p>
-            <a:pPr algn="ctr" indent="0" marL="0">
-              <a:lnSpc>
-                <a:spcPct val="105000"/>
-              </a:lnSpc>
-              <a:buNone/>
-            </a:pPr>
-            <a:r>
-              <a:rPr lang="en-US" sz="1400" b="1" dirty="0">
-                <a:solidFill>
-                  <a:srgbClr val="211D1B"/>
-                </a:solidFill>
-                <a:latin typeface="Calibri" pitchFamily="34" charset="0"/>
-                <a:ea typeface="Calibri" pitchFamily="34" charset="-122"/>
-                <a:cs typeface="Calibri" pitchFamily="34" charset="-120"/>
-              </a:rPr>
-              <a:t>Item Detail</a:t>
-            </a:r>
-            <a:endParaRPr lang="en-US" sz="1400" dirty="0"/>
-          </a:p>
-        </p:txBody>
-      </p:sp>
-      <p:sp>
-        <p:nvSpPr>
-          <p:cNvPr id="14" name="Text 9"/>
-          <p:cNvSpPr txBox="1"/>
-          <p:nvPr/>
-        </p:nvSpPr>
-        <p:spPr>
-          <a:xfrm>
-            <a:off x="7878928" y="1280160"/>
-            <a:ext cx="457200" cy="2103120"/>
-          </a:xfrm>
-          <a:prstGeom prst="rect">
-            <a:avLst/>
-          </a:prstGeom>
-          <a:noFill/>
-          <a:ln/>
-        </p:spPr>
-        <p:txBody>
-          <a:bodyPr wrap="square" lIns="0" tIns="0" rIns="0" bIns="0" rtlCol="0" anchor="ctr"/>
-          <a:lstStyle/>
-          <a:p>
-            <a:pPr algn="ctr" indent="0" marL="0">
-              <a:buNone/>
-            </a:pPr>
-            <a:r>
-              <a:rPr lang="en-US" sz="1600" dirty="0">
-                <a:solidFill>
-                  <a:srgbClr val="B5822A"/>
-                </a:solidFill>
-                <a:latin typeface="Calibri" pitchFamily="34" charset="0"/>
-                <a:ea typeface="Calibri" pitchFamily="34" charset="-122"/>
-                <a:cs typeface="Calibri" pitchFamily="34" charset="-120"/>
-              </a:rPr>
-              <a:t>→</a:t>
-            </a:r>
-            <a:endParaRPr lang="en-US" sz="1600" dirty="0"/>
-          </a:p>
-        </p:txBody>
-      </p:sp>
-      <p:sp>
-        <p:nvSpPr>
-          <p:cNvPr id="15" name="Shape 10"/>
-          <p:cNvSpPr/>
-          <p:nvPr/>
-        </p:nvSpPr>
-        <p:spPr>
-          <a:xfrm>
-            <a:off x="8281264" y="1225296"/>
-            <a:ext cx="1664208" cy="2212848"/>
-          </a:xfrm>
-          <a:prstGeom prst="roundRect">
-            <a:avLst>
-              <a:gd name="adj" fmla="val 7692"/>
-            </a:avLst>
-          </a:prstGeom>
-          <a:solidFill>
-            <a:srgbClr val="211D1B"/>
-          </a:solidFill>
-          <a:ln/>
-        </p:spPr>
-      </p:sp>
-      <p:pic>
-        <p:nvPicPr>
-          <p:cNvPr id="16" name="Image 3" descr="C:\Users\sanka\Documents\Projects\NL-Myntra Graduation Project\docs\deck-assets\04-decision-check-open.png">    </p:cNvPr>
-          <p:cNvPicPr>
-            <a:picLocks noChangeAspect="1"/>
-          </p:cNvPicPr>
-          <p:nvPr/>
-        </p:nvPicPr>
-        <p:blipFill>
-          <a:blip r:embed="rId4"/>
-          <a:srcRect l="0" r="0" t="0" b="0"/>
-          <a:stretch/>
-        </p:blipFill>
-        <p:spPr>
-          <a:xfrm>
-            <a:off x="8336128" y="1280160"/>
-            <a:ext cx="1554480" cy="2103120"/>
-          </a:xfrm>
-          <a:prstGeom prst="rect">
-            <a:avLst/>
-          </a:prstGeom>
-        </p:spPr>
-      </p:pic>
-      <p:sp>
-        <p:nvSpPr>
-          <p:cNvPr id="17" name="Text 11"/>
-          <p:cNvSpPr txBox="1"/>
-          <p:nvPr/>
-        </p:nvSpPr>
-        <p:spPr>
-          <a:xfrm>
-            <a:off x="8107528" y="3474720"/>
-            <a:ext cx="2011680" cy="320040"/>
-          </a:xfrm>
-          <a:prstGeom prst="rect">
-            <a:avLst/>
-          </a:prstGeom>
-          <a:noFill/>
-          <a:ln/>
-        </p:spPr>
-        <p:txBody>
-          <a:bodyPr wrap="square" lIns="0" tIns="0" rIns="0" bIns="0" rtlCol="0" anchor="ctr"/>
-          <a:lstStyle/>
-          <a:p>
-            <a:pPr algn="ctr" indent="0" marL="0">
-              <a:lnSpc>
-                <a:spcPct val="105000"/>
-              </a:lnSpc>
-              <a:buNone/>
-            </a:pPr>
-            <a:r>
-              <a:rPr lang="en-US" sz="1400" b="1" dirty="0">
-                <a:solidFill>
-                  <a:srgbClr val="211D1B"/>
-                </a:solidFill>
-                <a:latin typeface="Calibri" pitchFamily="34" charset="0"/>
-                <a:ea typeface="Calibri" pitchFamily="34" charset="-122"/>
-                <a:cs typeface="Calibri" pitchFamily="34" charset="-120"/>
-              </a:rPr>
-              <a:t>Decision Check</a:t>
-            </a:r>
-            <a:endParaRPr lang="en-US" sz="1400" dirty="0"/>
-          </a:p>
-        </p:txBody>
-      </p:sp>
-      <p:sp>
-        <p:nvSpPr>
-          <p:cNvPr id="18" name="Shape 12"/>
-          <p:cNvSpPr/>
-          <p:nvPr/>
-        </p:nvSpPr>
-        <p:spPr>
-          <a:xfrm>
-            <a:off x="640080" y="3931920"/>
-            <a:ext cx="10881360" cy="1828800"/>
-          </a:xfrm>
-          <a:prstGeom prst="roundRect">
-            <a:avLst>
-              <a:gd name="adj" fmla="val 4000"/>
-            </a:avLst>
-          </a:prstGeom>
-          <a:solidFill>
-            <a:srgbClr val="EFE6D8"/>
-          </a:solidFill>
-          <a:ln/>
-        </p:spPr>
-      </p:sp>
-      <p:sp>
-        <p:nvSpPr>
-          <p:cNvPr id="19" name="Text 13"/>
-          <p:cNvSpPr txBox="1"/>
-          <p:nvPr/>
-        </p:nvSpPr>
-        <p:spPr>
-          <a:xfrm>
-            <a:off x="914400" y="4069080"/>
-            <a:ext cx="10332720" cy="274320"/>
-          </a:xfrm>
-          <a:prstGeom prst="rect">
-            <a:avLst/>
-          </a:prstGeom>
-          <a:noFill/>
-          <a:ln/>
-        </p:spPr>
-        <p:txBody>
-          <a:bodyPr wrap="square" lIns="0" tIns="0" rIns="0" bIns="0" rtlCol="0" anchor="ctr"/>
-          <a:lstStyle/>
-          <a:p>
-            <a:pPr indent="0" marL="0">
-              <a:buNone/>
-            </a:pPr>
-            <a:r>
-              <a:rPr lang="en-US" sz="1400" b="1" spc="100" kern="0" dirty="0">
-                <a:solidFill>
-                  <a:srgbClr val="5B3A4A"/>
-                </a:solidFill>
-                <a:latin typeface="Calibri" pitchFamily="34" charset="0"/>
-                <a:ea typeface="Calibri" pitchFamily="34" charset="-122"/>
-                <a:cs typeface="Calibri" pitchFamily="34" charset="-120"/>
-              </a:rPr>
-              <a:t>FLAGSHIP CASE — WIDE-LEG JEANS</a:t>
-            </a:r>
-            <a:endParaRPr lang="en-US" sz="1400" dirty="0"/>
-          </a:p>
-        </p:txBody>
-      </p:sp>
-      <p:sp>
-        <p:nvSpPr>
-          <p:cNvPr id="20" name="Text 14"/>
-          <p:cNvSpPr txBox="1"/>
-          <p:nvPr/>
-        </p:nvSpPr>
-        <p:spPr>
-          <a:xfrm>
-            <a:off x="914400" y="4389120"/>
-            <a:ext cx="10332720" cy="594360"/>
-          </a:xfrm>
-          <a:prstGeom prst="rect">
-            <a:avLst/>
-          </a:prstGeom>
-          <a:noFill/>
-          <a:ln/>
-        </p:spPr>
-        <p:txBody>
-          <a:bodyPr wrap="square" lIns="0" tIns="0" rIns="0" bIns="0" rtlCol="0" anchor="ctr"/>
-          <a:lstStyle/>
-          <a:p>
-            <a:pPr indent="0" marL="0">
-              <a:lnSpc>
-                <a:spcPct val="115000"/>
-              </a:lnSpc>
-              <a:buNone/>
-            </a:pPr>
-            <a:r>
-              <a:rPr lang="en-US" sz="1400" dirty="0">
-                <a:solidFill>
-                  <a:srgbClr val="211D1B"/>
-                </a:solidFill>
-                <a:latin typeface="Calibri" pitchFamily="34" charset="0"/>
-                <a:ea typeface="Calibri" pitchFamily="34" charset="-122"/>
-                <a:cs typeface="Calibri" pitchFamily="34" charset="-120"/>
-              </a:rPr>
-              <a:t>“If it was 1,200 I probably would've bought it then and there.” — the real interview quote (slide 4) directly powers this item's price-history box and Decision Check reasoning. Traced end to end from problem definition to pixel, not a plausible-sounding guess.</a:t>
-            </a:r>
-            <a:endParaRPr lang="en-US" sz="1400" dirty="0"/>
-          </a:p>
-        </p:txBody>
-      </p:sp>
-      <p:sp>
-        <p:nvSpPr>
-          <p:cNvPr id="21" name="Text 15"/>
-          <p:cNvSpPr txBox="1"/>
-          <p:nvPr/>
-        </p:nvSpPr>
-        <p:spPr>
-          <a:xfrm>
-            <a:off x="914400" y="5029200"/>
-            <a:ext cx="10332720" cy="640080"/>
-          </a:xfrm>
-          <a:prstGeom prst="rect">
-            <a:avLst/>
-          </a:prstGeom>
-          <a:noFill/>
-          <a:ln/>
-        </p:spPr>
-        <p:txBody>
-          <a:bodyPr wrap="square" lIns="0" tIns="0" rIns="0" bIns="0" rtlCol="0" anchor="ctr"/>
-          <a:lstStyle/>
-          <a:p>
-            <a:pPr indent="0" marL="0">
-              <a:lnSpc>
-                <a:spcPct val="110000"/>
-              </a:lnSpc>
-              <a:buNone/>
-            </a:pPr>
-            <a:r>
-              <a:rPr lang="en-US" sz="1400" i="1" dirty="0">
-                <a:solidFill>
-                  <a:srgbClr val="6B6259"/>
-                </a:solidFill>
-                <a:latin typeface="Calibri" pitchFamily="34" charset="0"/>
-                <a:ea typeface="Calibri" pitchFamily="34" charset="-122"/>
-                <a:cs typeface="Calibri" pitchFamily="34" charset="-120"/>
-              </a:rPr>
-              <a:t>Also shown live today: real category filter chips, an honest "Holding steady" bucket for settled-but-thin-evidence items, and "Tracking a partial move" for items with a real, quantified price drop that hasn't hit target yet — three separate, verified fixes so the UI never contradicts its own data.</a:t>
-            </a:r>
-            <a:endParaRPr lang="en-US" sz="1400" dirty="0"/>
-          </a:p>
-        </p:txBody>
-      </p:sp>
-      <p:sp>
-        <p:nvSpPr>
-          <p:cNvPr id="22" name="Shape 16"/>
-          <p:cNvSpPr/>
-          <p:nvPr/>
-        </p:nvSpPr>
-        <p:spPr>
-          <a:xfrm>
-            <a:off x="640080" y="5897880"/>
-            <a:ext cx="10881360" cy="411480"/>
-          </a:xfrm>
-          <a:prstGeom prst="roundRect">
-            <a:avLst>
-              <a:gd name="adj" fmla="val 17778"/>
+              <a:gd name="adj" fmla="val 16000"/>
             </a:avLst>
           </a:prstGeom>
           <a:solidFill>
@@ -10677,30 +10067,30 @@
       </p:sp>
       <p:sp>
         <p:nvSpPr>
-          <p:cNvPr id="23" name="Text 17"/>
-          <p:cNvSpPr txBox="1"/>
-          <p:nvPr/>
-        </p:nvSpPr>
-        <p:spPr>
-          <a:xfrm>
-            <a:off x="914400" y="5897880"/>
-            <a:ext cx="10058400" cy="457200"/>
-          </a:xfrm>
-          <a:prstGeom prst="rect">
-            <a:avLst/>
-          </a:prstGeom>
-          <a:noFill/>
-          <a:ln/>
-        </p:spPr>
-        <p:txBody>
-          <a:bodyPr wrap="square" lIns="0" tIns="0" rIns="0" bIns="0" rtlCol="0" anchor="ctr"/>
-          <a:lstStyle/>
-          <a:p>
-            <a:pPr indent="0" marL="0">
-              <a:buNone/>
-            </a:pPr>
-            <a:r>
-              <a:rPr lang="en-US" sz="1400" b="1" spc="100" kern="0" dirty="0">
+          <p:cNvPr id="4" name="Text 2"/>
+          <p:cNvSpPr txBox="1"/>
+          <p:nvPr/>
+        </p:nvSpPr>
+        <p:spPr>
+          <a:xfrm>
+            <a:off x="7543800" y="457200"/>
+            <a:ext cx="3840480" cy="457200"/>
+          </a:xfrm>
+          <a:prstGeom prst="rect">
+            <a:avLst/>
+          </a:prstGeom>
+          <a:noFill/>
+          <a:ln/>
+        </p:spPr>
+        <p:txBody>
+          <a:bodyPr wrap="square" lIns="0" tIns="0" rIns="0" bIns="0" rtlCol="0" anchor="ctr"/>
+          <a:lstStyle/>
+          <a:p>
+            <a:pPr indent="0" marL="0">
+              <a:buNone/>
+            </a:pPr>
+            <a:r>
+              <a:rPr lang="en-US" sz="1400" b="1" spc="50" kern="0" dirty="0">
                 <a:solidFill>
                   <a:srgbClr val="4B6B4F"/>
                 </a:solidFill>
@@ -10708,7 +10098,7 @@
                 <a:ea typeface="Calibri" pitchFamily="34" charset="-122"/>
                 <a:cs typeface="Calibri" pitchFamily="34" charset="-120"/>
               </a:rPr>
-              <a:t>LIVE MVP   </a:t>
+              <a:t>LIVE MVP  </a:t>
             </a:r>
             <a:pPr indent="0" marL="0">
               <a:buNone/>
@@ -10721,7 +10111,7 @@
                 <a:latin typeface="Courier New" pitchFamily="34" charset="0"/>
                 <a:ea typeface="Courier New" pitchFamily="34" charset="-122"/>
                 <a:cs typeface="Courier New" pitchFamily="34" charset="-120"/>
-                <a:hlinkClick r:id="rId5" invalidUrl="" action="" tgtFrame="" tooltip="" history="1" highlightClick="0" endSnd="0">
+                <a:hlinkClick r:id="rId1" invalidUrl="" action="" tgtFrame="" tooltip="" history="1" highlightClick="0" endSnd="0">
                   <a:extLst>
                     <a:ext uri="{A12FA001-AC4F-418D-AE19-62706E023703}">
                       <ahyp:hlinkClr xmlns:ahyp="http://schemas.microsoft.com/office/drawing/2018/hyperlinkcolor" val="tx"/>
@@ -10729,7 +10119,617 @@
                   </a:extLst>
                 </a:hlinkClick>
               </a:rPr>
-              <a:t>https://mvp-henna-delta.vercel.app</a:t>
+              <a:t>mvp-henna-delta.vercel.app</a:t>
+            </a:r>
+            <a:endParaRPr lang="en-US" sz="1400" dirty="0"/>
+          </a:p>
+        </p:txBody>
+      </p:sp>
+      <p:sp>
+        <p:nvSpPr>
+          <p:cNvPr id="5" name="Shape 3"/>
+          <p:cNvSpPr/>
+          <p:nvPr/>
+        </p:nvSpPr>
+        <p:spPr>
+          <a:xfrm>
+            <a:off x="1606144" y="1088136"/>
+            <a:ext cx="2121408" cy="2807208"/>
+          </a:xfrm>
+          <a:prstGeom prst="roundRect">
+            <a:avLst>
+              <a:gd name="adj" fmla="val 6034"/>
+            </a:avLst>
+          </a:prstGeom>
+          <a:solidFill>
+            <a:srgbClr val="211D1B"/>
+          </a:solidFill>
+          <a:ln/>
+        </p:spPr>
+      </p:sp>
+      <p:pic>
+        <p:nvPicPr>
+          <p:cNvPr id="6" name="Image 0" descr="C:\Users\sanka\Documents\Projects\NL-Myntra Graduation Project\docs\deck-assets\01-persona-picker-expanded.png">    </p:cNvPr>
+          <p:cNvPicPr>
+            <a:picLocks noChangeAspect="1"/>
+          </p:cNvPicPr>
+          <p:nvPr/>
+        </p:nvPicPr>
+        <p:blipFill>
+          <a:blip r:embed="rId2"/>
+          <a:srcRect l="0" r="0" t="0" b="0"/>
+          <a:stretch/>
+        </p:blipFill>
+        <p:spPr>
+          <a:xfrm>
+            <a:off x="1661008" y="1143000"/>
+            <a:ext cx="2011680" cy="2697480"/>
+          </a:xfrm>
+          <a:prstGeom prst="rect">
+            <a:avLst/>
+          </a:prstGeom>
+        </p:spPr>
+      </p:pic>
+      <p:sp>
+        <p:nvSpPr>
+          <p:cNvPr id="7" name="Text 4"/>
+          <p:cNvSpPr txBox="1"/>
+          <p:nvPr/>
+        </p:nvSpPr>
+        <p:spPr>
+          <a:xfrm>
+            <a:off x="1432408" y="3931920"/>
+            <a:ext cx="2468880" cy="320040"/>
+          </a:xfrm>
+          <a:prstGeom prst="rect">
+            <a:avLst/>
+          </a:prstGeom>
+          <a:noFill/>
+          <a:ln/>
+        </p:spPr>
+        <p:txBody>
+          <a:bodyPr wrap="square" lIns="0" tIns="0" rIns="0" bIns="0" rtlCol="0" anchor="ctr"/>
+          <a:lstStyle/>
+          <a:p>
+            <a:pPr algn="ctr" indent="0" marL="0">
+              <a:lnSpc>
+                <a:spcPct val="105000"/>
+              </a:lnSpc>
+              <a:buNone/>
+            </a:pPr>
+            <a:r>
+              <a:rPr lang="en-US" sz="1400" b="1" dirty="0">
+                <a:solidFill>
+                  <a:srgbClr val="211D1B"/>
+                </a:solidFill>
+                <a:latin typeface="Calibri" pitchFamily="34" charset="0"/>
+                <a:ea typeface="Calibri" pitchFamily="34" charset="-122"/>
+                <a:cs typeface="Calibri" pitchFamily="34" charset="-120"/>
+              </a:rPr>
+              <a:t>Persona Picker</a:t>
+            </a:r>
+            <a:endParaRPr lang="en-US" sz="1400" dirty="0"/>
+          </a:p>
+        </p:txBody>
+      </p:sp>
+      <p:sp>
+        <p:nvSpPr>
+          <p:cNvPr id="8" name="Text 5"/>
+          <p:cNvSpPr txBox="1"/>
+          <p:nvPr/>
+        </p:nvSpPr>
+        <p:spPr>
+          <a:xfrm>
+            <a:off x="3672688" y="1143000"/>
+            <a:ext cx="274320" cy="2697480"/>
+          </a:xfrm>
+          <a:prstGeom prst="rect">
+            <a:avLst/>
+          </a:prstGeom>
+          <a:noFill/>
+          <a:ln/>
+        </p:spPr>
+        <p:txBody>
+          <a:bodyPr wrap="square" lIns="0" tIns="0" rIns="0" bIns="0" rtlCol="0" anchor="ctr"/>
+          <a:lstStyle/>
+          <a:p>
+            <a:pPr algn="ctr" indent="0" marL="0">
+              <a:buNone/>
+            </a:pPr>
+            <a:r>
+              <a:rPr lang="en-US" sz="1600" dirty="0">
+                <a:solidFill>
+                  <a:srgbClr val="B5822A"/>
+                </a:solidFill>
+                <a:latin typeface="Calibri" pitchFamily="34" charset="0"/>
+                <a:ea typeface="Calibri" pitchFamily="34" charset="-122"/>
+                <a:cs typeface="Calibri" pitchFamily="34" charset="-120"/>
+              </a:rPr>
+              <a:t>→</a:t>
+            </a:r>
+            <a:endParaRPr lang="en-US" sz="1600" dirty="0"/>
+          </a:p>
+        </p:txBody>
+      </p:sp>
+      <p:sp>
+        <p:nvSpPr>
+          <p:cNvPr id="9" name="Shape 6"/>
+          <p:cNvSpPr/>
+          <p:nvPr/>
+        </p:nvSpPr>
+        <p:spPr>
+          <a:xfrm>
+            <a:off x="3892144" y="1088136"/>
+            <a:ext cx="2121408" cy="2807208"/>
+          </a:xfrm>
+          <a:prstGeom prst="roundRect">
+            <a:avLst>
+              <a:gd name="adj" fmla="val 6034"/>
+            </a:avLst>
+          </a:prstGeom>
+          <a:solidFill>
+            <a:srgbClr val="211D1B"/>
+          </a:solidFill>
+          <a:ln/>
+        </p:spPr>
+      </p:sp>
+      <p:pic>
+        <p:nvPicPr>
+          <p:cNvPr id="10" name="Image 1" descr="C:\Users\sanka\Documents\Projects\NL-Myntra Graduation Project\docs\deck-assets\02-wishlist-intelligence.png">    </p:cNvPr>
+          <p:cNvPicPr>
+            <a:picLocks noChangeAspect="1"/>
+          </p:cNvPicPr>
+          <p:nvPr/>
+        </p:nvPicPr>
+        <p:blipFill>
+          <a:blip r:embed="rId3"/>
+          <a:srcRect l="0" r="0" t="0" b="0"/>
+          <a:stretch/>
+        </p:blipFill>
+        <p:spPr>
+          <a:xfrm>
+            <a:off x="3947008" y="1143000"/>
+            <a:ext cx="2011680" cy="2697480"/>
+          </a:xfrm>
+          <a:prstGeom prst="rect">
+            <a:avLst/>
+          </a:prstGeom>
+        </p:spPr>
+      </p:pic>
+      <p:sp>
+        <p:nvSpPr>
+          <p:cNvPr id="11" name="Text 7"/>
+          <p:cNvSpPr txBox="1"/>
+          <p:nvPr/>
+        </p:nvSpPr>
+        <p:spPr>
+          <a:xfrm>
+            <a:off x="3718408" y="3931920"/>
+            <a:ext cx="2468880" cy="320040"/>
+          </a:xfrm>
+          <a:prstGeom prst="rect">
+            <a:avLst/>
+          </a:prstGeom>
+          <a:noFill/>
+          <a:ln/>
+        </p:spPr>
+        <p:txBody>
+          <a:bodyPr wrap="square" lIns="0" tIns="0" rIns="0" bIns="0" rtlCol="0" anchor="ctr"/>
+          <a:lstStyle/>
+          <a:p>
+            <a:pPr algn="ctr" indent="0" marL="0">
+              <a:lnSpc>
+                <a:spcPct val="105000"/>
+              </a:lnSpc>
+              <a:buNone/>
+            </a:pPr>
+            <a:r>
+              <a:rPr lang="en-US" sz="1400" b="1" dirty="0">
+                <a:solidFill>
+                  <a:srgbClr val="211D1B"/>
+                </a:solidFill>
+                <a:latin typeface="Calibri" pitchFamily="34" charset="0"/>
+                <a:ea typeface="Calibri" pitchFamily="34" charset="-122"/>
+                <a:cs typeface="Calibri" pitchFamily="34" charset="-120"/>
+              </a:rPr>
+              <a:t>Wishlist Intelligence</a:t>
+            </a:r>
+            <a:endParaRPr lang="en-US" sz="1400" dirty="0"/>
+          </a:p>
+        </p:txBody>
+      </p:sp>
+      <p:sp>
+        <p:nvSpPr>
+          <p:cNvPr id="12" name="Text 8"/>
+          <p:cNvSpPr txBox="1"/>
+          <p:nvPr/>
+        </p:nvSpPr>
+        <p:spPr>
+          <a:xfrm>
+            <a:off x="5958688" y="1143000"/>
+            <a:ext cx="274320" cy="2697480"/>
+          </a:xfrm>
+          <a:prstGeom prst="rect">
+            <a:avLst/>
+          </a:prstGeom>
+          <a:noFill/>
+          <a:ln/>
+        </p:spPr>
+        <p:txBody>
+          <a:bodyPr wrap="square" lIns="0" tIns="0" rIns="0" bIns="0" rtlCol="0" anchor="ctr"/>
+          <a:lstStyle/>
+          <a:p>
+            <a:pPr algn="ctr" indent="0" marL="0">
+              <a:buNone/>
+            </a:pPr>
+            <a:r>
+              <a:rPr lang="en-US" sz="1600" dirty="0">
+                <a:solidFill>
+                  <a:srgbClr val="B5822A"/>
+                </a:solidFill>
+                <a:latin typeface="Calibri" pitchFamily="34" charset="0"/>
+                <a:ea typeface="Calibri" pitchFamily="34" charset="-122"/>
+                <a:cs typeface="Calibri" pitchFamily="34" charset="-120"/>
+              </a:rPr>
+              <a:t>→</a:t>
+            </a:r>
+            <a:endParaRPr lang="en-US" sz="1600" dirty="0"/>
+          </a:p>
+        </p:txBody>
+      </p:sp>
+      <p:sp>
+        <p:nvSpPr>
+          <p:cNvPr id="13" name="Shape 9"/>
+          <p:cNvSpPr/>
+          <p:nvPr/>
+        </p:nvSpPr>
+        <p:spPr>
+          <a:xfrm>
+            <a:off x="6178144" y="1088136"/>
+            <a:ext cx="2121408" cy="2807208"/>
+          </a:xfrm>
+          <a:prstGeom prst="roundRect">
+            <a:avLst>
+              <a:gd name="adj" fmla="val 6034"/>
+            </a:avLst>
+          </a:prstGeom>
+          <a:solidFill>
+            <a:srgbClr val="211D1B"/>
+          </a:solidFill>
+          <a:ln/>
+        </p:spPr>
+      </p:sp>
+      <p:pic>
+        <p:nvPicPr>
+          <p:cNvPr id="14" name="Image 2" descr="C:\Users\sanka\Documents\Projects\NL-Myntra Graduation Project\docs\deck-assets\03-item-detail-price-box.png">    </p:cNvPr>
+          <p:cNvPicPr>
+            <a:picLocks noChangeAspect="1"/>
+          </p:cNvPicPr>
+          <p:nvPr/>
+        </p:nvPicPr>
+        <p:blipFill>
+          <a:blip r:embed="rId4"/>
+          <a:srcRect l="0" r="0" t="0" b="0"/>
+          <a:stretch/>
+        </p:blipFill>
+        <p:spPr>
+          <a:xfrm>
+            <a:off x="6233008" y="1143000"/>
+            <a:ext cx="2011680" cy="2697480"/>
+          </a:xfrm>
+          <a:prstGeom prst="rect">
+            <a:avLst/>
+          </a:prstGeom>
+        </p:spPr>
+      </p:pic>
+      <p:sp>
+        <p:nvSpPr>
+          <p:cNvPr id="15" name="Text 10"/>
+          <p:cNvSpPr txBox="1"/>
+          <p:nvPr/>
+        </p:nvSpPr>
+        <p:spPr>
+          <a:xfrm>
+            <a:off x="6004408" y="3931920"/>
+            <a:ext cx="2468880" cy="320040"/>
+          </a:xfrm>
+          <a:prstGeom prst="rect">
+            <a:avLst/>
+          </a:prstGeom>
+          <a:noFill/>
+          <a:ln/>
+        </p:spPr>
+        <p:txBody>
+          <a:bodyPr wrap="square" lIns="0" tIns="0" rIns="0" bIns="0" rtlCol="0" anchor="ctr"/>
+          <a:lstStyle/>
+          <a:p>
+            <a:pPr algn="ctr" indent="0" marL="0">
+              <a:lnSpc>
+                <a:spcPct val="105000"/>
+              </a:lnSpc>
+              <a:buNone/>
+            </a:pPr>
+            <a:r>
+              <a:rPr lang="en-US" sz="1400" b="1" dirty="0">
+                <a:solidFill>
+                  <a:srgbClr val="211D1B"/>
+                </a:solidFill>
+                <a:latin typeface="Calibri" pitchFamily="34" charset="0"/>
+                <a:ea typeface="Calibri" pitchFamily="34" charset="-122"/>
+                <a:cs typeface="Calibri" pitchFamily="34" charset="-120"/>
+              </a:rPr>
+              <a:t>Item Detail</a:t>
+            </a:r>
+            <a:endParaRPr lang="en-US" sz="1400" dirty="0"/>
+          </a:p>
+        </p:txBody>
+      </p:sp>
+      <p:sp>
+        <p:nvSpPr>
+          <p:cNvPr id="16" name="Text 11"/>
+          <p:cNvSpPr txBox="1"/>
+          <p:nvPr/>
+        </p:nvSpPr>
+        <p:spPr>
+          <a:xfrm>
+            <a:off x="8244688" y="1143000"/>
+            <a:ext cx="274320" cy="2697480"/>
+          </a:xfrm>
+          <a:prstGeom prst="rect">
+            <a:avLst/>
+          </a:prstGeom>
+          <a:noFill/>
+          <a:ln/>
+        </p:spPr>
+        <p:txBody>
+          <a:bodyPr wrap="square" lIns="0" tIns="0" rIns="0" bIns="0" rtlCol="0" anchor="ctr"/>
+          <a:lstStyle/>
+          <a:p>
+            <a:pPr algn="ctr" indent="0" marL="0">
+              <a:buNone/>
+            </a:pPr>
+            <a:r>
+              <a:rPr lang="en-US" sz="1600" dirty="0">
+                <a:solidFill>
+                  <a:srgbClr val="B5822A"/>
+                </a:solidFill>
+                <a:latin typeface="Calibri" pitchFamily="34" charset="0"/>
+                <a:ea typeface="Calibri" pitchFamily="34" charset="-122"/>
+                <a:cs typeface="Calibri" pitchFamily="34" charset="-120"/>
+              </a:rPr>
+              <a:t>→</a:t>
+            </a:r>
+            <a:endParaRPr lang="en-US" sz="1600" dirty="0"/>
+          </a:p>
+        </p:txBody>
+      </p:sp>
+      <p:sp>
+        <p:nvSpPr>
+          <p:cNvPr id="17" name="Shape 12"/>
+          <p:cNvSpPr/>
+          <p:nvPr/>
+        </p:nvSpPr>
+        <p:spPr>
+          <a:xfrm>
+            <a:off x="8464144" y="1088136"/>
+            <a:ext cx="2121408" cy="2807208"/>
+          </a:xfrm>
+          <a:prstGeom prst="roundRect">
+            <a:avLst>
+              <a:gd name="adj" fmla="val 6034"/>
+            </a:avLst>
+          </a:prstGeom>
+          <a:solidFill>
+            <a:srgbClr val="211D1B"/>
+          </a:solidFill>
+          <a:ln/>
+        </p:spPr>
+      </p:sp>
+      <p:pic>
+        <p:nvPicPr>
+          <p:cNvPr id="18" name="Image 3" descr="C:\Users\sanka\Documents\Projects\NL-Myntra Graduation Project\docs\deck-assets\04-decision-check-open.png">    </p:cNvPr>
+          <p:cNvPicPr>
+            <a:picLocks noChangeAspect="1"/>
+          </p:cNvPicPr>
+          <p:nvPr/>
+        </p:nvPicPr>
+        <p:blipFill>
+          <a:blip r:embed="rId5"/>
+          <a:srcRect l="0" r="0" t="0" b="0"/>
+          <a:stretch/>
+        </p:blipFill>
+        <p:spPr>
+          <a:xfrm>
+            <a:off x="8519008" y="1143000"/>
+            <a:ext cx="2011680" cy="2697480"/>
+          </a:xfrm>
+          <a:prstGeom prst="rect">
+            <a:avLst/>
+          </a:prstGeom>
+        </p:spPr>
+      </p:pic>
+      <p:sp>
+        <p:nvSpPr>
+          <p:cNvPr id="19" name="Text 13"/>
+          <p:cNvSpPr txBox="1"/>
+          <p:nvPr/>
+        </p:nvSpPr>
+        <p:spPr>
+          <a:xfrm>
+            <a:off x="8290408" y="3931920"/>
+            <a:ext cx="2468880" cy="320040"/>
+          </a:xfrm>
+          <a:prstGeom prst="rect">
+            <a:avLst/>
+          </a:prstGeom>
+          <a:noFill/>
+          <a:ln/>
+        </p:spPr>
+        <p:txBody>
+          <a:bodyPr wrap="square" lIns="0" tIns="0" rIns="0" bIns="0" rtlCol="0" anchor="ctr"/>
+          <a:lstStyle/>
+          <a:p>
+            <a:pPr algn="ctr" indent="0" marL="0">
+              <a:lnSpc>
+                <a:spcPct val="105000"/>
+              </a:lnSpc>
+              <a:buNone/>
+            </a:pPr>
+            <a:r>
+              <a:rPr lang="en-US" sz="1400" b="1" dirty="0">
+                <a:solidFill>
+                  <a:srgbClr val="211D1B"/>
+                </a:solidFill>
+                <a:latin typeface="Calibri" pitchFamily="34" charset="0"/>
+                <a:ea typeface="Calibri" pitchFamily="34" charset="-122"/>
+                <a:cs typeface="Calibri" pitchFamily="34" charset="-120"/>
+              </a:rPr>
+              <a:t>Decision Check</a:t>
+            </a:r>
+            <a:endParaRPr lang="en-US" sz="1400" dirty="0"/>
+          </a:p>
+        </p:txBody>
+      </p:sp>
+      <p:sp>
+        <p:nvSpPr>
+          <p:cNvPr id="20" name="Shape 14"/>
+          <p:cNvSpPr/>
+          <p:nvPr/>
+        </p:nvSpPr>
+        <p:spPr>
+          <a:xfrm>
+            <a:off x="640080" y="4389120"/>
+            <a:ext cx="10881360" cy="1600200"/>
+          </a:xfrm>
+          <a:prstGeom prst="roundRect">
+            <a:avLst>
+              <a:gd name="adj" fmla="val 4571"/>
+            </a:avLst>
+          </a:prstGeom>
+          <a:solidFill>
+            <a:srgbClr val="EFE6D8"/>
+          </a:solidFill>
+          <a:ln/>
+        </p:spPr>
+      </p:sp>
+      <p:sp>
+        <p:nvSpPr>
+          <p:cNvPr id="21" name="Text 15"/>
+          <p:cNvSpPr txBox="1"/>
+          <p:nvPr/>
+        </p:nvSpPr>
+        <p:spPr>
+          <a:xfrm>
+            <a:off x="914400" y="4517136"/>
+            <a:ext cx="10332720" cy="256032"/>
+          </a:xfrm>
+          <a:prstGeom prst="rect">
+            <a:avLst/>
+          </a:prstGeom>
+          <a:noFill/>
+          <a:ln/>
+        </p:spPr>
+        <p:txBody>
+          <a:bodyPr wrap="square" lIns="0" tIns="0" rIns="0" bIns="0" rtlCol="0" anchor="ctr"/>
+          <a:lstStyle/>
+          <a:p>
+            <a:pPr indent="0" marL="0">
+              <a:buNone/>
+            </a:pPr>
+            <a:r>
+              <a:rPr lang="en-US" sz="1400" b="1" spc="100" kern="0" dirty="0">
+                <a:solidFill>
+                  <a:srgbClr val="5B3A4A"/>
+                </a:solidFill>
+                <a:latin typeface="Calibri" pitchFamily="34" charset="0"/>
+                <a:ea typeface="Calibri" pitchFamily="34" charset="-122"/>
+                <a:cs typeface="Calibri" pitchFamily="34" charset="-120"/>
+              </a:rPr>
+              <a:t>FLAGSHIP CASE — WIDE-LEG JEANS</a:t>
+            </a:r>
+            <a:endParaRPr lang="en-US" sz="1400" dirty="0"/>
+          </a:p>
+        </p:txBody>
+      </p:sp>
+      <p:sp>
+        <p:nvSpPr>
+          <p:cNvPr id="22" name="Text 16"/>
+          <p:cNvSpPr txBox="1"/>
+          <p:nvPr/>
+        </p:nvSpPr>
+        <p:spPr>
+          <a:xfrm>
+            <a:off x="914400" y="4809744"/>
+            <a:ext cx="10332720" cy="502920"/>
+          </a:xfrm>
+          <a:prstGeom prst="rect">
+            <a:avLst/>
+          </a:prstGeom>
+          <a:noFill/>
+          <a:ln/>
+        </p:spPr>
+        <p:txBody>
+          <a:bodyPr wrap="square" lIns="0" tIns="0" rIns="0" bIns="0" rtlCol="0" anchor="ctr"/>
+          <a:lstStyle/>
+          <a:p>
+            <a:pPr indent="0" marL="0">
+              <a:lnSpc>
+                <a:spcPct val="115000"/>
+              </a:lnSpc>
+              <a:buNone/>
+            </a:pPr>
+            <a:r>
+              <a:rPr lang="en-US" sz="1400" dirty="0">
+                <a:solidFill>
+                  <a:srgbClr val="211D1B"/>
+                </a:solidFill>
+                <a:latin typeface="Calibri" pitchFamily="34" charset="0"/>
+                <a:ea typeface="Calibri" pitchFamily="34" charset="-122"/>
+                <a:cs typeface="Calibri" pitchFamily="34" charset="-120"/>
+              </a:rPr>
+              <a:t>“If it was 1,200 I probably would've bought it then and there.” — the real interview quote (slide 4) directly powers this item's price-history box and Decision Check reasoning. Traced end to end from problem definition to pixel, not a plausible-sounding guess.</a:t>
+            </a:r>
+            <a:endParaRPr lang="en-US" sz="1400" dirty="0"/>
+          </a:p>
+        </p:txBody>
+      </p:sp>
+      <p:sp>
+        <p:nvSpPr>
+          <p:cNvPr id="23" name="Text 17"/>
+          <p:cNvSpPr txBox="1"/>
+          <p:nvPr/>
+        </p:nvSpPr>
+        <p:spPr>
+          <a:xfrm>
+            <a:off x="914400" y="5330952"/>
+            <a:ext cx="10332720" cy="594360"/>
+          </a:xfrm>
+          <a:prstGeom prst="rect">
+            <a:avLst/>
+          </a:prstGeom>
+          <a:noFill/>
+          <a:ln/>
+        </p:spPr>
+        <p:txBody>
+          <a:bodyPr wrap="square" lIns="0" tIns="0" rIns="0" bIns="0" rtlCol="0" anchor="ctr"/>
+          <a:lstStyle/>
+          <a:p>
+            <a:pPr indent="0" marL="0">
+              <a:lnSpc>
+                <a:spcPct val="110000"/>
+              </a:lnSpc>
+              <a:buNone/>
+            </a:pPr>
+            <a:r>
+              <a:rPr lang="en-US" sz="1400" i="1" dirty="0">
+                <a:solidFill>
+                  <a:srgbClr val="6B6259"/>
+                </a:solidFill>
+                <a:latin typeface="Calibri" pitchFamily="34" charset="0"/>
+                <a:ea typeface="Calibri" pitchFamily="34" charset="-122"/>
+                <a:cs typeface="Calibri" pitchFamily="34" charset="-120"/>
+              </a:rPr>
+              <a:t>Also shown live today: real category filter chips, an honest "Holding steady" bucket for settled-but-thin-evidence items, and "Tracking a partial move" for items with a real, quantified price drop that hasn't hit target yet — three separate, verified fixes so the UI never contradicts its own data.</a:t>
             </a:r>
             <a:endParaRPr lang="en-US" sz="1400" dirty="0"/>
           </a:p>
